--- a/docs/proposal/salon_pos_proposal.pptx
+++ b/docs/proposal/salon_pos_proposal.pptx
@@ -13,6 +13,7 @@
     <p:sldId id="261" r:id="rId12"/>
     <p:sldId id="262" r:id="rId13"/>
     <p:sldId id="263" r:id="rId14"/>
+    <p:sldId id="264" r:id="rId15"/>
   </p:sldIdLst>
   <p:sldSz cx="9144000" cy="5143500" type="screen4x3"/>
   <p:notesSz cx="6858000" cy="9144000"/>
@@ -3183,14 +3184,57 @@
       </p:sp>
       <p:sp>
         <p:nvSpPr>
-          <p:cNvPr id="4" name="TextBox 3"/>
-          <p:cNvSpPr txBox="1"/>
-          <p:nvPr/>
-        </p:nvSpPr>
-        <p:spPr>
-          <a:xfrm>
-            <a:off x="640080" y="1097280"/>
-            <a:ext cx="6400800" cy="411480"/>
+          <p:cNvPr id="4" name="Oval 3"/>
+          <p:cNvSpPr/>
+          <p:nvPr/>
+        </p:nvSpPr>
+        <p:spPr>
+          <a:xfrm>
+            <a:off x="7132320" y="182880"/>
+            <a:ext cx="2286000" cy="2286000"/>
+          </a:xfrm>
+          <a:prstGeom prst="ellipse">
+            <a:avLst/>
+          </a:prstGeom>
+          <a:solidFill>
+            <a:srgbClr val="14B8A6"/>
+          </a:solidFill>
+          <a:ln>
+            <a:noFill/>
+          </a:ln>
+        </p:spPr>
+        <p:style>
+          <a:lnRef idx="1">
+            <a:schemeClr val="accent1"/>
+          </a:lnRef>
+          <a:fillRef idx="3">
+            <a:schemeClr val="accent1"/>
+          </a:fillRef>
+          <a:effectRef idx="2">
+            <a:schemeClr val="accent1"/>
+          </a:effectRef>
+          <a:fontRef idx="minor">
+            <a:schemeClr val="lt1"/>
+          </a:fontRef>
+        </p:style>
+        <p:txBody>
+          <a:bodyPr rtlCol="0" anchor="ctr"/>
+          <a:lstStyle/>
+          <a:p>
+            <a:pPr algn="ctr"/>
+          </a:p>
+        </p:txBody>
+      </p:sp>
+      <p:sp>
+        <p:nvSpPr>
+          <p:cNvPr id="5" name="TextBox 4"/>
+          <p:cNvSpPr txBox="1"/>
+          <p:nvPr/>
+        </p:nvSpPr>
+        <p:spPr>
+          <a:xfrm>
+            <a:off x="640080" y="1005840"/>
+            <a:ext cx="6400800" cy="365760"/>
           </a:xfrm>
           <a:prstGeom prst="rect">
             <a:avLst/>
@@ -3205,7 +3249,7 @@
           <a:p>
             <a:pPr algn="l"/>
             <a:r>
-              <a:rPr sz="1000" b="1" i="0">
+              <a:rPr sz="1000" b="1">
                 <a:solidFill>
                   <a:srgbClr val="14B8A6"/>
                 </a:solidFill>
@@ -3218,14 +3262,14 @@
       </p:sp>
       <p:sp>
         <p:nvSpPr>
-          <p:cNvPr id="5" name="TextBox 4"/>
-          <p:cNvSpPr txBox="1"/>
-          <p:nvPr/>
-        </p:nvSpPr>
-        <p:spPr>
-          <a:xfrm>
-            <a:off x="640080" y="1600200"/>
-            <a:ext cx="7772400" cy="914400"/>
+          <p:cNvPr id="6" name="TextBox 5"/>
+          <p:cNvSpPr txBox="1"/>
+          <p:nvPr/>
+        </p:nvSpPr>
+        <p:spPr>
+          <a:xfrm>
+            <a:off x="640080" y="1508760"/>
+            <a:ext cx="7772400" cy="822960"/>
           </a:xfrm>
           <a:prstGeom prst="rect">
             <a:avLst/>
@@ -3240,7 +3284,7 @@
           <a:p>
             <a:pPr algn="l"/>
             <a:r>
-              <a:rPr sz="3400" b="1" i="0">
+              <a:rPr sz="3300" b="1">
                 <a:solidFill>
                   <a:srgbClr val="FFFFFF"/>
                 </a:solidFill>
@@ -3253,13 +3297,13 @@
       </p:sp>
       <p:sp>
         <p:nvSpPr>
-          <p:cNvPr id="6" name="TextBox 5"/>
-          <p:cNvSpPr txBox="1"/>
-          <p:nvPr/>
-        </p:nvSpPr>
-        <p:spPr>
-          <a:xfrm>
-            <a:off x="640080" y="2423160"/>
+          <p:cNvPr id="7" name="TextBox 6"/>
+          <p:cNvSpPr txBox="1"/>
+          <p:nvPr/>
+        </p:nvSpPr>
+        <p:spPr>
+          <a:xfrm>
+            <a:off x="640080" y="2286000"/>
             <a:ext cx="7772400" cy="777240"/>
           </a:xfrm>
           <a:prstGeom prst="rect">
@@ -3275,7 +3319,7 @@
           <a:p>
             <a:pPr algn="l"/>
             <a:r>
-              <a:rPr sz="4200" b="1" i="0">
+              <a:rPr sz="4400" b="1">
                 <a:solidFill>
                   <a:srgbClr val="FFFFFF"/>
                 </a:solidFill>
@@ -3288,14 +3332,14 @@
       </p:sp>
       <p:sp>
         <p:nvSpPr>
-          <p:cNvPr id="7" name="TextBox 6"/>
-          <p:cNvSpPr txBox="1"/>
-          <p:nvPr/>
-        </p:nvSpPr>
-        <p:spPr>
-          <a:xfrm>
-            <a:off x="640080" y="3383280"/>
-            <a:ext cx="7315200" cy="502920"/>
+          <p:cNvPr id="8" name="TextBox 7"/>
+          <p:cNvSpPr txBox="1"/>
+          <p:nvPr/>
+        </p:nvSpPr>
+        <p:spPr>
+          <a:xfrm>
+            <a:off x="640080" y="3246120"/>
+            <a:ext cx="7315200" cy="457200"/>
           </a:xfrm>
           <a:prstGeom prst="rect">
             <a:avLst/>
@@ -3310,7 +3354,7 @@
           <a:p>
             <a:pPr algn="l"/>
             <a:r>
-              <a:rPr sz="1500" b="0" i="0">
+              <a:rPr sz="1500" b="0">
                 <a:solidFill>
                   <a:srgbClr val="B0C4DE"/>
                 </a:solidFill>
@@ -3323,14 +3367,57 @@
       </p:sp>
       <p:sp>
         <p:nvSpPr>
-          <p:cNvPr id="8" name="TextBox 7"/>
-          <p:cNvSpPr txBox="1"/>
-          <p:nvPr/>
-        </p:nvSpPr>
-        <p:spPr>
-          <a:xfrm>
-            <a:off x="640080" y="4023360"/>
-            <a:ext cx="3657600" cy="365760"/>
+          <p:cNvPr id="9" name="Rectangle 8"/>
+          <p:cNvSpPr/>
+          <p:nvPr/>
+        </p:nvSpPr>
+        <p:spPr>
+          <a:xfrm>
+            <a:off x="640080" y="3886200"/>
+            <a:ext cx="2560320" cy="347472"/>
+          </a:xfrm>
+          <a:prstGeom prst="rect">
+            <a:avLst/>
+          </a:prstGeom>
+          <a:solidFill>
+            <a:srgbClr val="0D9488"/>
+          </a:solidFill>
+          <a:ln>
+            <a:noFill/>
+          </a:ln>
+        </p:spPr>
+        <p:style>
+          <a:lnRef idx="1">
+            <a:schemeClr val="accent1"/>
+          </a:lnRef>
+          <a:fillRef idx="3">
+            <a:schemeClr val="accent1"/>
+          </a:fillRef>
+          <a:effectRef idx="2">
+            <a:schemeClr val="accent1"/>
+          </a:effectRef>
+          <a:fontRef idx="minor">
+            <a:schemeClr val="lt1"/>
+          </a:fontRef>
+        </p:style>
+        <p:txBody>
+          <a:bodyPr rtlCol="0" anchor="ctr"/>
+          <a:lstStyle/>
+          <a:p>
+            <a:pPr algn="ctr"/>
+          </a:p>
+        </p:txBody>
+      </p:sp>
+      <p:sp>
+        <p:nvSpPr>
+          <p:cNvPr id="10" name="TextBox 9"/>
+          <p:cNvSpPr txBox="1"/>
+          <p:nvPr/>
+        </p:nvSpPr>
+        <p:spPr>
+          <a:xfrm>
+            <a:off x="640080" y="3886200"/>
+            <a:ext cx="2560320" cy="347472"/>
           </a:xfrm>
           <a:prstGeom prst="rect">
             <a:avLst/>
@@ -3345,7 +3432,42 @@
           <a:p>
             <a:pPr algn="l"/>
             <a:r>
-              <a:rPr sz="1200" b="0" i="0">
+              <a:rPr sz="1200" b="1">
+                <a:solidFill>
+                  <a:srgbClr val="FFFFFF"/>
+                </a:solidFill>
+                <a:latin typeface="Calibri"/>
+              </a:rPr>
+              <a:t>  開発進行中</a:t>
+            </a:r>
+          </a:p>
+        </p:txBody>
+      </p:sp>
+      <p:sp>
+        <p:nvSpPr>
+          <p:cNvPr id="11" name="TextBox 10"/>
+          <p:cNvSpPr txBox="1"/>
+          <p:nvPr/>
+        </p:nvSpPr>
+        <p:spPr>
+          <a:xfrm>
+            <a:off x="3337560" y="3886200"/>
+            <a:ext cx="2286000" cy="347472"/>
+          </a:xfrm>
+          <a:prstGeom prst="rect">
+            <a:avLst/>
+          </a:prstGeom>
+          <a:noFill/>
+        </p:spPr>
+        <p:txBody>
+          <a:bodyPr wrap="square">
+            <a:spAutoFit/>
+          </a:bodyPr>
+          <a:lstStyle/>
+          <a:p>
+            <a:pPr algn="l"/>
+            <a:r>
+              <a:rPr sz="1200" b="0">
                 <a:solidFill>
                   <a:srgbClr val="14B8A6"/>
                 </a:solidFill>
@@ -3484,7 +3606,7 @@
           <a:p>
             <a:pPr algn="l"/>
             <a:r>
-              <a:rPr sz="2200" b="1" i="0">
+              <a:rPr sz="2200" b="1">
                 <a:solidFill>
                   <a:srgbClr val="FFFFFF"/>
                 </a:solidFill>
@@ -3504,17 +3626,17 @@
         <p:spPr>
           <a:xfrm>
             <a:off x="5486400" y="822960"/>
-            <a:ext cx="3383280" cy="3383280"/>
+            <a:ext cx="3383280" cy="3474720"/>
           </a:xfrm>
           <a:prstGeom prst="rect">
             <a:avLst/>
           </a:prstGeom>
           <a:solidFill>
-            <a:srgbClr val="EBF5FB"/>
+            <a:srgbClr val="FEF2F2"/>
           </a:solidFill>
-          <a:ln w="6350">
+          <a:ln w="9525">
             <a:solidFill>
-              <a:srgbClr val="0D9488"/>
+              <a:srgbClr val="FECACA"/>
             </a:solidFill>
           </a:ln>
         </p:spPr>
@@ -3549,28 +3671,28 @@
         <p:spPr>
           <a:xfrm>
             <a:off x="5486400" y="896112"/>
-            <a:ext cx="3383280" cy="411480"/>
-          </a:xfrm>
-          <a:prstGeom prst="rect">
-            <a:avLst/>
-          </a:prstGeom>
-          <a:noFill/>
-        </p:spPr>
-        <p:txBody>
-          <a:bodyPr wrap="square">
-            <a:spAutoFit/>
-          </a:bodyPr>
-          <a:lstStyle/>
-          <a:p>
-            <a:pPr algn="ctr"/>
-            <a:r>
-              <a:rPr sz="1300" b="1" i="0">
+            <a:ext cx="3383280" cy="384048"/>
+          </a:xfrm>
+          <a:prstGeom prst="rect">
+            <a:avLst/>
+          </a:prstGeom>
+          <a:noFill/>
+        </p:spPr>
+        <p:txBody>
+          <a:bodyPr wrap="square">
+            <a:spAutoFit/>
+          </a:bodyPr>
+          <a:lstStyle/>
+          <a:p>
+            <a:pPr algn="ctr"/>
+            <a:r>
+              <a:rPr sz="1200" b="1">
                 <a:solidFill>
                   <a:srgbClr val="334155"/>
                 </a:solidFill>
                 <a:latin typeface="Calibri"/>
               </a:rPr>
-              <a:t>年間維持費</a:t>
+              <a:t>現行の年間維持費</a:t>
             </a:r>
           </a:p>
         </p:txBody>
@@ -3583,23 +3705,23 @@
         </p:nvSpPr>
         <p:spPr>
           <a:xfrm>
-            <a:off x="5486400" y="1325880"/>
-            <a:ext cx="3383280" cy="777240"/>
-          </a:xfrm>
-          <a:prstGeom prst="rect">
-            <a:avLst/>
-          </a:prstGeom>
-          <a:noFill/>
-        </p:spPr>
-        <p:txBody>
-          <a:bodyPr wrap="square">
-            <a:spAutoFit/>
-          </a:bodyPr>
-          <a:lstStyle/>
-          <a:p>
-            <a:pPr algn="ctr"/>
-            <a:r>
-              <a:rPr sz="4200" b="1" i="0">
+            <a:off x="5486400" y="1298448"/>
+            <a:ext cx="3383280" cy="804672"/>
+          </a:xfrm>
+          <a:prstGeom prst="rect">
+            <a:avLst/>
+          </a:prstGeom>
+          <a:noFill/>
+        </p:spPr>
+        <p:txBody>
+          <a:bodyPr wrap="square">
+            <a:spAutoFit/>
+          </a:bodyPr>
+          <a:lstStyle/>
+          <a:p>
+            <a:pPr algn="ctr"/>
+            <a:r>
+              <a:rPr sz="4400" b="1">
                 <a:solidFill>
                   <a:srgbClr val="DC2626"/>
                 </a:solidFill>
@@ -3618,7 +3740,42 @@
         </p:nvSpPr>
         <p:spPr>
           <a:xfrm>
-            <a:off x="5486400" y="2176272"/>
+            <a:off x="5486400" y="2148840"/>
+            <a:ext cx="3383280" cy="347472"/>
+          </a:xfrm>
+          <a:prstGeom prst="rect">
+            <a:avLst/>
+          </a:prstGeom>
+          <a:noFill/>
+        </p:spPr>
+        <p:txBody>
+          <a:bodyPr wrap="square">
+            <a:spAutoFit/>
+          </a:bodyPr>
+          <a:lstStyle/>
+          <a:p>
+            <a:pPr algn="ctr"/>
+            <a:r>
+              <a:rPr sz="1100" b="0">
+                <a:solidFill>
+                  <a:srgbClr val="64748B"/>
+                </a:solidFill>
+                <a:latin typeface="Calibri"/>
+              </a:rPr>
+              <a:t>70店舗 × 5,000円 × 12ヶ月</a:t>
+            </a:r>
+          </a:p>
+        </p:txBody>
+      </p:sp>
+      <p:sp>
+        <p:nvSpPr>
+          <p:cNvPr id="9" name="TextBox 8"/>
+          <p:cNvSpPr txBox="1"/>
+          <p:nvPr/>
+        </p:nvSpPr>
+        <p:spPr>
+          <a:xfrm>
+            <a:off x="5486400" y="2578608"/>
             <a:ext cx="3383280" cy="384048"/>
           </a:xfrm>
           <a:prstGeom prst="rect">
@@ -3634,42 +3791,7 @@
           <a:p>
             <a:pPr algn="ctr"/>
             <a:r>
-              <a:rPr sz="1100" b="0" i="0">
-                <a:solidFill>
-                  <a:srgbClr val="64748B"/>
-                </a:solidFill>
-                <a:latin typeface="Calibri"/>
-              </a:rPr>
-              <a:t>70店舗 × 5,000円 × 12ヶ月</a:t>
-            </a:r>
-          </a:p>
-        </p:txBody>
-      </p:sp>
-      <p:sp>
-        <p:nvSpPr>
-          <p:cNvPr id="9" name="TextBox 8"/>
-          <p:cNvSpPr txBox="1"/>
-          <p:nvPr/>
-        </p:nvSpPr>
-        <p:spPr>
-          <a:xfrm>
-            <a:off x="5486400" y="2633472"/>
-            <a:ext cx="3383280" cy="411480"/>
-          </a:xfrm>
-          <a:prstGeom prst="rect">
-            <a:avLst/>
-          </a:prstGeom>
-          <a:noFill/>
-        </p:spPr>
-        <p:txBody>
-          <a:bodyPr wrap="square">
-            <a:spAutoFit/>
-          </a:bodyPr>
-          <a:lstStyle/>
-          <a:p>
-            <a:pPr algn="ctr"/>
-            <a:r>
-              <a:rPr sz="1400" b="1" i="0">
+              <a:rPr sz="1400" b="1">
                 <a:solidFill>
                   <a:srgbClr val="DC2626"/>
                 </a:solidFill>
@@ -3688,23 +3810,23 @@
         </p:nvSpPr>
         <p:spPr>
           <a:xfrm>
-            <a:off x="5486400" y="3063240"/>
-            <a:ext cx="3383280" cy="320040"/>
-          </a:xfrm>
-          <a:prstGeom prst="rect">
-            <a:avLst/>
-          </a:prstGeom>
-          <a:noFill/>
-        </p:spPr>
-        <p:txBody>
-          <a:bodyPr wrap="square">
-            <a:spAutoFit/>
-          </a:bodyPr>
-          <a:lstStyle/>
-          <a:p>
-            <a:pPr algn="ctr"/>
-            <a:r>
-              <a:rPr sz="1000" b="0" i="0">
+            <a:off x="5486400" y="3035808"/>
+            <a:ext cx="3383280" cy="292608"/>
+          </a:xfrm>
+          <a:prstGeom prst="rect">
+            <a:avLst/>
+          </a:prstGeom>
+          <a:noFill/>
+        </p:spPr>
+        <p:txBody>
+          <a:bodyPr wrap="square">
+            <a:spAutoFit/>
+          </a:bodyPr>
+          <a:lstStyle/>
+          <a:p>
+            <a:pPr algn="ctr"/>
+            <a:r>
+              <a:rPr sz="1000" b="0">
                 <a:solidFill>
                   <a:srgbClr val="64748B"/>
                 </a:solidFill>
@@ -3732,7 +3854,7 @@
           <a:solidFill>
             <a:srgbClr val="F5F7FA"/>
           </a:solidFill>
-          <a:ln w="6350">
+          <a:ln w="9525">
             <a:solidFill>
               <a:srgbClr val="E2E8F0"/>
             </a:solidFill>
@@ -3784,13 +3906,13 @@
           <a:p>
             <a:pPr algn="l"/>
             <a:r>
-              <a:rPr sz="1200" b="0" i="0">
+              <a:rPr sz="1200" b="0">
                 <a:solidFill>
                   <a:srgbClr val="1A1A2E"/>
                 </a:solidFill>
                 <a:latin typeface="Calibri"/>
               </a:rPr>
-              <a:t>▶  20年前のPOSシステム（VitaminC）を継続使用中</a:t>
+              <a:t>▶  20年前のシステム（VitaminC）を継続使用中</a:t>
             </a:r>
           </a:p>
         </p:txBody>
@@ -3812,7 +3934,7 @@
           <a:solidFill>
             <a:srgbClr val="F5F7FA"/>
           </a:solidFill>
-          <a:ln w="6350">
+          <a:ln w="9525">
             <a:solidFill>
               <a:srgbClr val="E2E8F0"/>
             </a:solidFill>
@@ -3864,7 +3986,7 @@
           <a:p>
             <a:pPr algn="l"/>
             <a:r>
-              <a:rPr sz="1200" b="0" i="0">
+              <a:rPr sz="1200" b="0">
                 <a:solidFill>
                   <a:srgbClr val="1A1A2E"/>
                 </a:solidFill>
@@ -3892,7 +4014,7 @@
           <a:solidFill>
             <a:srgbClr val="F5F7FA"/>
           </a:solidFill>
-          <a:ln w="6350">
+          <a:ln w="9525">
             <a:solidFill>
               <a:srgbClr val="E2E8F0"/>
             </a:solidFill>
@@ -3944,7 +4066,7 @@
           <a:p>
             <a:pPr algn="l"/>
             <a:r>
-              <a:rPr sz="1200" b="0" i="0">
+              <a:rPr sz="1200" b="0">
                 <a:solidFill>
                   <a:srgbClr val="1A1A2E"/>
                 </a:solidFill>
@@ -3972,7 +4094,7 @@
           <a:solidFill>
             <a:srgbClr val="F5F7FA"/>
           </a:solidFill>
-          <a:ln w="6350">
+          <a:ln w="9525">
             <a:solidFill>
               <a:srgbClr val="E2E8F0"/>
             </a:solidFill>
@@ -4024,7 +4146,7 @@
           <a:p>
             <a:pPr algn="l"/>
             <a:r>
-              <a:rPr sz="1200" b="0" i="0">
+              <a:rPr sz="1200" b="0">
                 <a:solidFill>
                   <a:srgbClr val="1A1A2E"/>
                 </a:solidFill>
@@ -4052,7 +4174,7 @@
           <a:solidFill>
             <a:srgbClr val="F5F7FA"/>
           </a:solidFill>
-          <a:ln w="6350">
+          <a:ln w="9525">
             <a:solidFill>
               <a:srgbClr val="E2E8F0"/>
             </a:solidFill>
@@ -4104,7 +4226,7 @@
           <a:p>
             <a:pPr algn="l"/>
             <a:r>
-              <a:rPr sz="1200" b="0" i="0">
+              <a:rPr sz="1200" b="0">
                 <a:solidFill>
                   <a:srgbClr val="1A1A2E"/>
                 </a:solidFill>
@@ -4191,7 +4313,7 @@
             <a:avLst/>
           </a:prstGeom>
           <a:solidFill>
-            <a:srgbClr val="1E3A5F"/>
+            <a:srgbClr val="0D9488"/>
           </a:solidFill>
           <a:ln>
             <a:noFill/>
@@ -4243,13 +4365,13 @@
           <a:p>
             <a:pPr algn="l"/>
             <a:r>
-              <a:rPr sz="2200" b="1" i="0">
+              <a:rPr sz="2200" b="1">
                 <a:solidFill>
                   <a:srgbClr val="FFFFFF"/>
                 </a:solidFill>
                 <a:latin typeface="Calibri"/>
               </a:rPr>
-              <a:t>提案概要</a:t>
+              <a:t>開発は既に進行中  —  Milestone 1 完了（2026年7月）</a:t>
             </a:r>
           </a:p>
         </p:txBody>
@@ -4263,7 +4385,7 @@
         <p:spPr>
           <a:xfrm>
             <a:off x="365760" y="777240"/>
-            <a:ext cx="8229600" cy="365760"/>
+            <a:ext cx="8412480" cy="347472"/>
           </a:xfrm>
           <a:prstGeom prst="rect">
             <a:avLst/>
@@ -4278,13 +4400,13 @@
           <a:p>
             <a:pPr algn="l"/>
             <a:r>
-              <a:rPr sz="1400" b="1" i="0">
-                <a:solidFill>
-                  <a:srgbClr val="0D9488"/>
-                </a:solidFill>
-                <a:latin typeface="Calibri"/>
-              </a:rPr>
-              <a:t>自社開発POSシステム — 概要</a:t>
+              <a:rPr sz="1300" b="0">
+                <a:solidFill>
+                  <a:srgbClr val="334155"/>
+                </a:solidFill>
+                <a:latin typeface="Calibri"/>
+              </a:rPr>
+              <a:t>提案ベースではなく、実際に動くコードが存在します</a:t>
             </a:r>
           </a:p>
         </p:txBody>
@@ -4297,8 +4419,8 @@
         </p:nvSpPr>
         <p:spPr>
           <a:xfrm>
-            <a:off x="320040" y="1280160"/>
-            <a:ext cx="4160520" cy="1371600"/>
+            <a:off x="274320" y="1261872"/>
+            <a:ext cx="4160520" cy="1572768"/>
           </a:xfrm>
           <a:prstGeom prst="rect">
             <a:avLst/>
@@ -4306,9 +4428,9 @@
           <a:solidFill>
             <a:srgbClr val="F5F7FA"/>
           </a:solidFill>
-          <a:ln w="6350">
+          <a:ln w="19050">
             <a:solidFill>
-              <a:srgbClr val="CBD5E1"/>
+              <a:srgbClr val="16A34A"/>
             </a:solidFill>
           </a:ln>
         </p:spPr>
@@ -4336,95 +4458,23 @@
       </p:sp>
       <p:sp>
         <p:nvSpPr>
-          <p:cNvPr id="7" name="TextBox 6"/>
-          <p:cNvSpPr txBox="1"/>
-          <p:nvPr/>
-        </p:nvSpPr>
-        <p:spPr>
-          <a:xfrm>
-            <a:off x="502920" y="1371600"/>
-            <a:ext cx="3840480" cy="365760"/>
-          </a:xfrm>
-          <a:prstGeom prst="rect">
-            <a:avLst/>
-          </a:prstGeom>
-          <a:noFill/>
-        </p:spPr>
-        <p:txBody>
-          <a:bodyPr wrap="square">
-            <a:spAutoFit/>
-          </a:bodyPr>
-          <a:lstStyle/>
-          <a:p>
-            <a:pPr algn="l"/>
-            <a:r>
-              <a:rPr sz="1200" b="1" i="0">
-                <a:solidFill>
-                  <a:srgbClr val="0D9488"/>
-                </a:solidFill>
-                <a:latin typeface="Calibri"/>
-              </a:rPr>
-              <a:t>目的</a:t>
-            </a:r>
-          </a:p>
-        </p:txBody>
-      </p:sp>
-      <p:sp>
-        <p:nvSpPr>
-          <p:cNvPr id="8" name="TextBox 7"/>
-          <p:cNvSpPr txBox="1"/>
-          <p:nvPr/>
-        </p:nvSpPr>
-        <p:spPr>
-          <a:xfrm>
-            <a:off x="502920" y="1755648"/>
-            <a:ext cx="3840480" cy="777240"/>
-          </a:xfrm>
-          <a:prstGeom prst="rect">
-            <a:avLst/>
-          </a:prstGeom>
-          <a:noFill/>
-        </p:spPr>
-        <p:txBody>
-          <a:bodyPr wrap="square">
-            <a:spAutoFit/>
-          </a:bodyPr>
-          <a:lstStyle/>
-          <a:p>
-            <a:pPr algn="l"/>
-            <a:r>
-              <a:rPr sz="1500" b="1" i="0">
-                <a:solidFill>
-                  <a:srgbClr val="1A1A2E"/>
-                </a:solidFill>
-                <a:latin typeface="Calibri"/>
-              </a:rPr>
-              <a:t>現行システムの完全リプレイス</a:t>
-            </a:r>
-          </a:p>
-        </p:txBody>
-      </p:sp>
-      <p:sp>
-        <p:nvSpPr>
-          <p:cNvPr id="9" name="Rectangle 8"/>
+          <p:cNvPr id="7" name="Oval 6"/>
           <p:cNvSpPr/>
           <p:nvPr/>
         </p:nvSpPr>
         <p:spPr>
           <a:xfrm>
-            <a:off x="4754879" y="1280160"/>
-            <a:ext cx="4160520" cy="1371600"/>
-          </a:xfrm>
-          <a:prstGeom prst="rect">
+            <a:off x="438912" y="1426463"/>
+            <a:ext cx="457200" cy="457200"/>
+          </a:xfrm>
+          <a:prstGeom prst="ellipse">
             <a:avLst/>
           </a:prstGeom>
           <a:solidFill>
-            <a:srgbClr val="F5F7FA"/>
+            <a:srgbClr val="16A34A"/>
           </a:solidFill>
-          <a:ln w="6350">
-            <a:solidFill>
-              <a:srgbClr val="CBD5E1"/>
-            </a:solidFill>
+          <a:ln>
+            <a:noFill/>
           </a:ln>
         </p:spPr>
         <p:style>
@@ -4451,14 +4501,14 @@
       </p:sp>
       <p:sp>
         <p:nvSpPr>
-          <p:cNvPr id="10" name="TextBox 9"/>
-          <p:cNvSpPr txBox="1"/>
-          <p:nvPr/>
-        </p:nvSpPr>
-        <p:spPr>
-          <a:xfrm>
-            <a:off x="4937759" y="1371600"/>
-            <a:ext cx="3840480" cy="365760"/>
+          <p:cNvPr id="8" name="TextBox 7"/>
+          <p:cNvSpPr txBox="1"/>
+          <p:nvPr/>
+        </p:nvSpPr>
+        <p:spPr>
+          <a:xfrm>
+            <a:off x="1024127" y="1399031"/>
+            <a:ext cx="3291840" cy="384048"/>
           </a:xfrm>
           <a:prstGeom prst="rect">
             <a:avLst/>
@@ -4473,27 +4523,27 @@
           <a:p>
             <a:pPr algn="l"/>
             <a:r>
-              <a:rPr sz="1200" b="1" i="0">
-                <a:solidFill>
-                  <a:srgbClr val="0D9488"/>
-                </a:solidFill>
-                <a:latin typeface="Calibri"/>
-              </a:rPr>
-              <a:t>対象</a:t>
-            </a:r>
-          </a:p>
-        </p:txBody>
-      </p:sp>
-      <p:sp>
-        <p:nvSpPr>
-          <p:cNvPr id="11" name="TextBox 10"/>
-          <p:cNvSpPr txBox="1"/>
-          <p:nvPr/>
-        </p:nvSpPr>
-        <p:spPr>
-          <a:xfrm>
-            <a:off x="4937759" y="1755648"/>
-            <a:ext cx="3840480" cy="777240"/>
+              <a:rPr sz="1300" b="1">
+                <a:solidFill>
+                  <a:srgbClr val="16A34A"/>
+                </a:solidFill>
+                <a:latin typeface="Calibri"/>
+              </a:rPr>
+              <a:t>会計・決済エンジン</a:t>
+            </a:r>
+          </a:p>
+        </p:txBody>
+      </p:sp>
+      <p:sp>
+        <p:nvSpPr>
+          <p:cNvPr id="9" name="TextBox 8"/>
+          <p:cNvSpPr txBox="1"/>
+          <p:nvPr/>
+        </p:nvSpPr>
+        <p:spPr>
+          <a:xfrm>
+            <a:off x="475488" y="1883664"/>
+            <a:ext cx="3840480" cy="822960"/>
           </a:xfrm>
           <a:prstGeom prst="rect">
             <a:avLst/>
@@ -4508,27 +4558,28 @@
           <a:p>
             <a:pPr algn="l"/>
             <a:r>
-              <a:rPr sz="1500" b="1" i="0">
-                <a:solidFill>
-                  <a:srgbClr val="1A1A2E"/>
-                </a:solidFill>
-                <a:latin typeface="Calibri"/>
-              </a:rPr>
-              <a:t>グループ全70店舗</a:t>
-            </a:r>
-          </a:p>
-        </p:txBody>
-      </p:sp>
-      <p:sp>
-        <p:nvSpPr>
-          <p:cNvPr id="12" name="Rectangle 11"/>
+              <a:rPr sz="1100" b="0">
+                <a:solidFill>
+                  <a:srgbClr val="334155"/>
+                </a:solidFill>
+                <a:latin typeface="Calibri"/>
+              </a:rPr>
+              <a:t>複数決済手段（現金/カード/電子マネー）対応
+返金・割引・端数処理すべて実装済み</a:t>
+            </a:r>
+          </a:p>
+        </p:txBody>
+      </p:sp>
+      <p:sp>
+        <p:nvSpPr>
+          <p:cNvPr id="10" name="Rectangle 9"/>
           <p:cNvSpPr/>
           <p:nvPr/>
         </p:nvSpPr>
         <p:spPr>
           <a:xfrm>
-            <a:off x="320040" y="2852928"/>
-            <a:ext cx="4160520" cy="1371600"/>
+            <a:off x="4754880" y="1261872"/>
+            <a:ext cx="4160520" cy="1572768"/>
           </a:xfrm>
           <a:prstGeom prst="rect">
             <a:avLst/>
@@ -4536,9 +4587,9 @@
           <a:solidFill>
             <a:srgbClr val="F5F7FA"/>
           </a:solidFill>
-          <a:ln w="6350">
+          <a:ln w="19050">
             <a:solidFill>
-              <a:srgbClr val="CBD5E1"/>
+              <a:srgbClr val="0891B2"/>
             </a:solidFill>
           </a:ln>
         </p:spPr>
@@ -4566,95 +4617,23 @@
       </p:sp>
       <p:sp>
         <p:nvSpPr>
-          <p:cNvPr id="13" name="TextBox 12"/>
-          <p:cNvSpPr txBox="1"/>
-          <p:nvPr/>
-        </p:nvSpPr>
-        <p:spPr>
-          <a:xfrm>
-            <a:off x="502920" y="2944368"/>
-            <a:ext cx="3840480" cy="365760"/>
-          </a:xfrm>
-          <a:prstGeom prst="rect">
-            <a:avLst/>
-          </a:prstGeom>
-          <a:noFill/>
-        </p:spPr>
-        <p:txBody>
-          <a:bodyPr wrap="square">
-            <a:spAutoFit/>
-          </a:bodyPr>
-          <a:lstStyle/>
-          <a:p>
-            <a:pPr algn="l"/>
-            <a:r>
-              <a:rPr sz="1200" b="1" i="0">
-                <a:solidFill>
-                  <a:srgbClr val="0D9488"/>
-                </a:solidFill>
-                <a:latin typeface="Calibri"/>
-              </a:rPr>
-              <a:t>開発方式</a:t>
-            </a:r>
-          </a:p>
-        </p:txBody>
-      </p:sp>
-      <p:sp>
-        <p:nvSpPr>
-          <p:cNvPr id="14" name="TextBox 13"/>
-          <p:cNvSpPr txBox="1"/>
-          <p:nvPr/>
-        </p:nvSpPr>
-        <p:spPr>
-          <a:xfrm>
-            <a:off x="502920" y="3328416"/>
-            <a:ext cx="3840480" cy="777240"/>
-          </a:xfrm>
-          <a:prstGeom prst="rect">
-            <a:avLst/>
-          </a:prstGeom>
-          <a:noFill/>
-        </p:spPr>
-        <p:txBody>
-          <a:bodyPr wrap="square">
-            <a:spAutoFit/>
-          </a:bodyPr>
-          <a:lstStyle/>
-          <a:p>
-            <a:pPr algn="l"/>
-            <a:r>
-              <a:rPr sz="1500" b="1" i="0">
-                <a:solidFill>
-                  <a:srgbClr val="1A1A2E"/>
-                </a:solidFill>
-                <a:latin typeface="Calibri"/>
-              </a:rPr>
-              <a:t>Flutter（iOS/Android/タブレット）</a:t>
-            </a:r>
-          </a:p>
-        </p:txBody>
-      </p:sp>
-      <p:sp>
-        <p:nvSpPr>
-          <p:cNvPr id="15" name="Rectangle 14"/>
+          <p:cNvPr id="11" name="Oval 10"/>
           <p:cNvSpPr/>
           <p:nvPr/>
         </p:nvSpPr>
         <p:spPr>
           <a:xfrm>
-            <a:off x="4754879" y="2852928"/>
-            <a:ext cx="4160520" cy="1371600"/>
-          </a:xfrm>
-          <a:prstGeom prst="rect">
+            <a:off x="4919472" y="1426463"/>
+            <a:ext cx="457200" cy="457200"/>
+          </a:xfrm>
+          <a:prstGeom prst="ellipse">
             <a:avLst/>
           </a:prstGeom>
           <a:solidFill>
-            <a:srgbClr val="F5F7FA"/>
+            <a:srgbClr val="0891B2"/>
           </a:solidFill>
-          <a:ln w="6350">
-            <a:solidFill>
-              <a:srgbClr val="CBD5E1"/>
-            </a:solidFill>
+          <a:ln>
+            <a:noFill/>
           </a:ln>
         </p:spPr>
         <p:style>
@@ -4681,14 +4660,173 @@
       </p:sp>
       <p:sp>
         <p:nvSpPr>
+          <p:cNvPr id="12" name="TextBox 11"/>
+          <p:cNvSpPr txBox="1"/>
+          <p:nvPr/>
+        </p:nvSpPr>
+        <p:spPr>
+          <a:xfrm>
+            <a:off x="5504688" y="1399031"/>
+            <a:ext cx="3291840" cy="384048"/>
+          </a:xfrm>
+          <a:prstGeom prst="rect">
+            <a:avLst/>
+          </a:prstGeom>
+          <a:noFill/>
+        </p:spPr>
+        <p:txBody>
+          <a:bodyPr wrap="square">
+            <a:spAutoFit/>
+          </a:bodyPr>
+          <a:lstStyle/>
+          <a:p>
+            <a:pPr algn="l"/>
+            <a:r>
+              <a:rPr sz="1300" b="1">
+                <a:solidFill>
+                  <a:srgbClr val="0891B2"/>
+                </a:solidFill>
+                <a:latin typeface="Calibri"/>
+              </a:rPr>
+              <a:t>プロモーションエンジン</a:t>
+            </a:r>
+          </a:p>
+        </p:txBody>
+      </p:sp>
+      <p:sp>
+        <p:nvSpPr>
+          <p:cNvPr id="13" name="TextBox 12"/>
+          <p:cNvSpPr txBox="1"/>
+          <p:nvPr/>
+        </p:nvSpPr>
+        <p:spPr>
+          <a:xfrm>
+            <a:off x="4956048" y="1883664"/>
+            <a:ext cx="3840480" cy="822960"/>
+          </a:xfrm>
+          <a:prstGeom prst="rect">
+            <a:avLst/>
+          </a:prstGeom>
+          <a:noFill/>
+        </p:spPr>
+        <p:txBody>
+          <a:bodyPr wrap="square">
+            <a:spAutoFit/>
+          </a:bodyPr>
+          <a:lstStyle/>
+          <a:p>
+            <a:pPr algn="l"/>
+            <a:r>
+              <a:rPr sz="1100" b="0">
+                <a:solidFill>
+                  <a:srgbClr val="334155"/>
+                </a:solidFill>
+                <a:latin typeface="Calibri"/>
+              </a:rPr>
+              <a:t>クーポン・割引ルール適用
+複数プロモーション組み合わせ対応</a:t>
+            </a:r>
+          </a:p>
+        </p:txBody>
+      </p:sp>
+      <p:sp>
+        <p:nvSpPr>
+          <p:cNvPr id="14" name="Rectangle 13"/>
+          <p:cNvSpPr/>
+          <p:nvPr/>
+        </p:nvSpPr>
+        <p:spPr>
+          <a:xfrm>
+            <a:off x="274320" y="2980944"/>
+            <a:ext cx="4160520" cy="1572768"/>
+          </a:xfrm>
+          <a:prstGeom prst="rect">
+            <a:avLst/>
+          </a:prstGeom>
+          <a:solidFill>
+            <a:srgbClr val="F5F7FA"/>
+          </a:solidFill>
+          <a:ln w="19050">
+            <a:solidFill>
+              <a:srgbClr val="7C3AED"/>
+            </a:solidFill>
+          </a:ln>
+        </p:spPr>
+        <p:style>
+          <a:lnRef idx="1">
+            <a:schemeClr val="accent1"/>
+          </a:lnRef>
+          <a:fillRef idx="3">
+            <a:schemeClr val="accent1"/>
+          </a:fillRef>
+          <a:effectRef idx="2">
+            <a:schemeClr val="accent1"/>
+          </a:effectRef>
+          <a:fontRef idx="minor">
+            <a:schemeClr val="lt1"/>
+          </a:fontRef>
+        </p:style>
+        <p:txBody>
+          <a:bodyPr rtlCol="0" anchor="ctr"/>
+          <a:lstStyle/>
+          <a:p>
+            <a:pPr algn="ctr"/>
+          </a:p>
+        </p:txBody>
+      </p:sp>
+      <p:sp>
+        <p:nvSpPr>
+          <p:cNvPr id="15" name="Oval 14"/>
+          <p:cNvSpPr/>
+          <p:nvPr/>
+        </p:nvSpPr>
+        <p:spPr>
+          <a:xfrm>
+            <a:off x="438912" y="3145536"/>
+            <a:ext cx="457200" cy="457200"/>
+          </a:xfrm>
+          <a:prstGeom prst="ellipse">
+            <a:avLst/>
+          </a:prstGeom>
+          <a:solidFill>
+            <a:srgbClr val="7C3AED"/>
+          </a:solidFill>
+          <a:ln>
+            <a:noFill/>
+          </a:ln>
+        </p:spPr>
+        <p:style>
+          <a:lnRef idx="1">
+            <a:schemeClr val="accent1"/>
+          </a:lnRef>
+          <a:fillRef idx="3">
+            <a:schemeClr val="accent1"/>
+          </a:fillRef>
+          <a:effectRef idx="2">
+            <a:schemeClr val="accent1"/>
+          </a:effectRef>
+          <a:fontRef idx="minor">
+            <a:schemeClr val="lt1"/>
+          </a:fontRef>
+        </p:style>
+        <p:txBody>
+          <a:bodyPr rtlCol="0" anchor="ctr"/>
+          <a:lstStyle/>
+          <a:p>
+            <a:pPr algn="ctr"/>
+          </a:p>
+        </p:txBody>
+      </p:sp>
+      <p:sp>
+        <p:nvSpPr>
           <p:cNvPr id="16" name="TextBox 15"/>
           <p:cNvSpPr txBox="1"/>
           <p:nvPr/>
         </p:nvSpPr>
         <p:spPr>
           <a:xfrm>
-            <a:off x="4937759" y="2944368"/>
-            <a:ext cx="3840480" cy="365760"/>
+            <a:off x="1024127" y="3118103"/>
+            <a:ext cx="3291840" cy="384048"/>
           </a:xfrm>
           <a:prstGeom prst="rect">
             <a:avLst/>
@@ -4703,13 +4841,13 @@
           <a:p>
             <a:pPr algn="l"/>
             <a:r>
-              <a:rPr sz="1200" b="1" i="0">
-                <a:solidFill>
-                  <a:srgbClr val="0D9488"/>
-                </a:solidFill>
-                <a:latin typeface="Calibri"/>
-              </a:rPr>
-              <a:t>データ管理</a:t>
+              <a:rPr sz="1300" b="1">
+                <a:solidFill>
+                  <a:srgbClr val="7C3AED"/>
+                </a:solidFill>
+                <a:latin typeface="Calibri"/>
+              </a:rPr>
+              <a:t>スタッフ売上管理エンジン</a:t>
             </a:r>
           </a:p>
         </p:txBody>
@@ -4722,8 +4860,8 @@
         </p:nvSpPr>
         <p:spPr>
           <a:xfrm>
-            <a:off x="4937759" y="3328416"/>
-            <a:ext cx="3840480" cy="777240"/>
+            <a:off x="475488" y="3602736"/>
+            <a:ext cx="3840480" cy="822960"/>
           </a:xfrm>
           <a:prstGeom prst="rect">
             <a:avLst/>
@@ -4738,13 +4876,14 @@
           <a:p>
             <a:pPr algn="l"/>
             <a:r>
-              <a:rPr sz="1500" b="1" i="0">
-                <a:solidFill>
-                  <a:srgbClr val="1A1A2E"/>
-                </a:solidFill>
-                <a:latin typeface="Calibri"/>
-              </a:rPr>
-              <a:t>オフライン対応＋クラウド同期</a:t>
+              <a:rPr sz="1100" b="0">
+                <a:solidFill>
+                  <a:srgbClr val="334155"/>
+                </a:solidFill>
+                <a:latin typeface="Calibri"/>
+              </a:rPr>
+              <a:t>スタッフ別コミッション自動計算
+権限管理・勤怠連携設計済み</a:t>
             </a:r>
           </a:p>
         </p:txBody>
@@ -4757,10 +4896,55 @@
         </p:nvSpPr>
         <p:spPr>
           <a:xfrm>
-            <a:off x="320040" y="4572000"/>
-            <a:ext cx="8503920" cy="438912"/>
-          </a:xfrm>
-          <a:prstGeom prst="rect">
+            <a:off x="4754880" y="2980944"/>
+            <a:ext cx="4160520" cy="1572768"/>
+          </a:xfrm>
+          <a:prstGeom prst="rect">
+            <a:avLst/>
+          </a:prstGeom>
+          <a:solidFill>
+            <a:srgbClr val="F5F7FA"/>
+          </a:solidFill>
+          <a:ln w="19050">
+            <a:solidFill>
+              <a:srgbClr val="0D9488"/>
+            </a:solidFill>
+          </a:ln>
+        </p:spPr>
+        <p:style>
+          <a:lnRef idx="1">
+            <a:schemeClr val="accent1"/>
+          </a:lnRef>
+          <a:fillRef idx="3">
+            <a:schemeClr val="accent1"/>
+          </a:fillRef>
+          <a:effectRef idx="2">
+            <a:schemeClr val="accent1"/>
+          </a:effectRef>
+          <a:fontRef idx="minor">
+            <a:schemeClr val="lt1"/>
+          </a:fontRef>
+        </p:style>
+        <p:txBody>
+          <a:bodyPr rtlCol="0" anchor="ctr"/>
+          <a:lstStyle/>
+          <a:p>
+            <a:pPr algn="ctr"/>
+          </a:p>
+        </p:txBody>
+      </p:sp>
+      <p:sp>
+        <p:nvSpPr>
+          <p:cNvPr id="19" name="Oval 18"/>
+          <p:cNvSpPr/>
+          <p:nvPr/>
+        </p:nvSpPr>
+        <p:spPr>
+          <a:xfrm>
+            <a:off x="4919472" y="3145536"/>
+            <a:ext cx="457200" cy="457200"/>
+          </a:xfrm>
+          <a:prstGeom prst="ellipse">
             <a:avLst/>
           </a:prstGeom>
           <a:solidFill>
@@ -4794,35 +4978,149 @@
       </p:sp>
       <p:sp>
         <p:nvSpPr>
-          <p:cNvPr id="19" name="TextBox 18"/>
-          <p:cNvSpPr txBox="1"/>
-          <p:nvPr/>
-        </p:nvSpPr>
-        <p:spPr>
-          <a:xfrm>
-            <a:off x="320040" y="4599432"/>
-            <a:ext cx="8503920" cy="384048"/>
-          </a:xfrm>
-          <a:prstGeom prst="rect">
-            <a:avLst/>
-          </a:prstGeom>
-          <a:noFill/>
-        </p:spPr>
-        <p:txBody>
-          <a:bodyPr wrap="square">
-            <a:spAutoFit/>
-          </a:bodyPr>
-          <a:lstStyle/>
-          <a:p>
-            <a:pPr algn="ctr"/>
-            <a:r>
-              <a:rPr sz="1200" b="1" i="0">
+          <p:cNvPr id="20" name="TextBox 19"/>
+          <p:cNvSpPr txBox="1"/>
+          <p:nvPr/>
+        </p:nvSpPr>
+        <p:spPr>
+          <a:xfrm>
+            <a:off x="5504688" y="3118103"/>
+            <a:ext cx="3291840" cy="384048"/>
+          </a:xfrm>
+          <a:prstGeom prst="rect">
+            <a:avLst/>
+          </a:prstGeom>
+          <a:noFill/>
+        </p:spPr>
+        <p:txBody>
+          <a:bodyPr wrap="square">
+            <a:spAutoFit/>
+          </a:bodyPr>
+          <a:lstStyle/>
+          <a:p>
+            <a:pPr algn="l"/>
+            <a:r>
+              <a:rPr sz="1300" b="1">
+                <a:solidFill>
+                  <a:srgbClr val="0D9488"/>
+                </a:solidFill>
+                <a:latin typeface="Calibri"/>
+              </a:rPr>
+              <a:t>予約→会計 連携</a:t>
+            </a:r>
+          </a:p>
+        </p:txBody>
+      </p:sp>
+      <p:sp>
+        <p:nvSpPr>
+          <p:cNvPr id="21" name="TextBox 20"/>
+          <p:cNvSpPr txBox="1"/>
+          <p:nvPr/>
+        </p:nvSpPr>
+        <p:spPr>
+          <a:xfrm>
+            <a:off x="4956048" y="3602736"/>
+            <a:ext cx="3840480" cy="822960"/>
+          </a:xfrm>
+          <a:prstGeom prst="rect">
+            <a:avLst/>
+          </a:prstGeom>
+          <a:noFill/>
+        </p:spPr>
+        <p:txBody>
+          <a:bodyPr wrap="square">
+            <a:spAutoFit/>
+          </a:bodyPr>
+          <a:lstStyle/>
+          <a:p>
+            <a:pPr algn="l"/>
+            <a:r>
+              <a:rPr sz="1100" b="0">
+                <a:solidFill>
+                  <a:srgbClr val="334155"/>
+                </a:solidFill>
+                <a:latin typeface="Calibri"/>
+              </a:rPr>
+              <a:t>予約完了→そのまま会計伝票生成
+シームレスなフロー実現済み</a:t>
+            </a:r>
+          </a:p>
+        </p:txBody>
+      </p:sp>
+      <p:sp>
+        <p:nvSpPr>
+          <p:cNvPr id="22" name="Rectangle 21"/>
+          <p:cNvSpPr/>
+          <p:nvPr/>
+        </p:nvSpPr>
+        <p:spPr>
+          <a:xfrm>
+            <a:off x="274320" y="4645152"/>
+            <a:ext cx="8595360" cy="365760"/>
+          </a:xfrm>
+          <a:prstGeom prst="rect">
+            <a:avLst/>
+          </a:prstGeom>
+          <a:solidFill>
+            <a:srgbClr val="1E3A5F"/>
+          </a:solidFill>
+          <a:ln>
+            <a:noFill/>
+          </a:ln>
+        </p:spPr>
+        <p:style>
+          <a:lnRef idx="1">
+            <a:schemeClr val="accent1"/>
+          </a:lnRef>
+          <a:fillRef idx="3">
+            <a:schemeClr val="accent1"/>
+          </a:fillRef>
+          <a:effectRef idx="2">
+            <a:schemeClr val="accent1"/>
+          </a:effectRef>
+          <a:fontRef idx="minor">
+            <a:schemeClr val="lt1"/>
+          </a:fontRef>
+        </p:style>
+        <p:txBody>
+          <a:bodyPr rtlCol="0" anchor="ctr"/>
+          <a:lstStyle/>
+          <a:p>
+            <a:pPr algn="ctr"/>
+          </a:p>
+        </p:txBody>
+      </p:sp>
+      <p:sp>
+        <p:nvSpPr>
+          <p:cNvPr id="23" name="TextBox 22"/>
+          <p:cNvSpPr txBox="1"/>
+          <p:nvPr/>
+        </p:nvSpPr>
+        <p:spPr>
+          <a:xfrm>
+            <a:off x="274320" y="4645152"/>
+            <a:ext cx="8595360" cy="365760"/>
+          </a:xfrm>
+          <a:prstGeom prst="rect">
+            <a:avLst/>
+          </a:prstGeom>
+          <a:noFill/>
+        </p:spPr>
+        <p:txBody>
+          <a:bodyPr wrap="square">
+            <a:spAutoFit/>
+          </a:bodyPr>
+          <a:lstStyle/>
+          <a:p>
+            <a:pPr algn="ctr"/>
+            <a:r>
+              <a:rPr sz="1200" b="1">
                 <a:solidFill>
                   <a:srgbClr val="FFFFFF"/>
                 </a:solidFill>
                 <a:latin typeface="Calibri"/>
               </a:rPr>
-              <a:t>社内エンジニアによる開発 → 外注費ゼロ・迅速な改修対応・完全カスタマイズ</a:t>
+              <a:t>テスト373件 全通過  ／  アーキテクチャ設計書25本以上 整備済み</a:t>
             </a:r>
           </a:p>
         </p:txBody>
@@ -4955,27 +5253,62 @@
           <a:p>
             <a:pPr algn="l"/>
             <a:r>
-              <a:rPr sz="2200" b="1" i="0">
+              <a:rPr sz="2200" b="1">
                 <a:solidFill>
                   <a:srgbClr val="FFFFFF"/>
                 </a:solidFill>
                 <a:latin typeface="Calibri"/>
               </a:rPr>
-              <a:t>主要機能（案）</a:t>
-            </a:r>
-          </a:p>
-        </p:txBody>
-      </p:sp>
-      <p:sp>
-        <p:nvSpPr>
-          <p:cNvPr id="5" name="Rectangle 4"/>
+              <a:t>提案概要</a:t>
+            </a:r>
+          </a:p>
+        </p:txBody>
+      </p:sp>
+      <p:sp>
+        <p:nvSpPr>
+          <p:cNvPr id="5" name="TextBox 4"/>
+          <p:cNvSpPr txBox="1"/>
+          <p:nvPr/>
+        </p:nvSpPr>
+        <p:spPr>
+          <a:xfrm>
+            <a:off x="365760" y="777240"/>
+            <a:ext cx="8229600" cy="365760"/>
+          </a:xfrm>
+          <a:prstGeom prst="rect">
+            <a:avLst/>
+          </a:prstGeom>
+          <a:noFill/>
+        </p:spPr>
+        <p:txBody>
+          <a:bodyPr wrap="square">
+            <a:spAutoFit/>
+          </a:bodyPr>
+          <a:lstStyle/>
+          <a:p>
+            <a:pPr algn="l"/>
+            <a:r>
+              <a:rPr sz="1400" b="1">
+                <a:solidFill>
+                  <a:srgbClr val="0D9488"/>
+                </a:solidFill>
+                <a:latin typeface="Calibri"/>
+              </a:rPr>
+              <a:t>自社開発POSシステム — 概要</a:t>
+            </a:r>
+          </a:p>
+        </p:txBody>
+      </p:sp>
+      <p:sp>
+        <p:nvSpPr>
+          <p:cNvPr id="6" name="Rectangle 5"/>
           <p:cNvSpPr/>
           <p:nvPr/>
         </p:nvSpPr>
         <p:spPr>
           <a:xfrm>
-            <a:off x="228600" y="804672"/>
-            <a:ext cx="2743200" cy="1828800"/>
+            <a:off x="320040" y="1280160"/>
+            <a:ext cx="4160520" cy="1371600"/>
           </a:xfrm>
           <a:prstGeom prst="rect">
             <a:avLst/>
@@ -4983,7 +5316,7 @@
           <a:solidFill>
             <a:srgbClr val="F5F7FA"/>
           </a:solidFill>
-          <a:ln w="6350">
+          <a:ln w="9525">
             <a:solidFill>
               <a:srgbClr val="CBD5E1"/>
             </a:solidFill>
@@ -5013,14 +5346,14 @@
       </p:sp>
       <p:sp>
         <p:nvSpPr>
-          <p:cNvPr id="6" name="TextBox 5"/>
-          <p:cNvSpPr txBox="1"/>
-          <p:nvPr/>
-        </p:nvSpPr>
-        <p:spPr>
-          <a:xfrm>
-            <a:off x="365760" y="914400"/>
-            <a:ext cx="2468880" cy="411480"/>
+          <p:cNvPr id="7" name="TextBox 6"/>
+          <p:cNvSpPr txBox="1"/>
+          <p:nvPr/>
+        </p:nvSpPr>
+        <p:spPr>
+          <a:xfrm>
+            <a:off x="502920" y="1371600"/>
+            <a:ext cx="3840480" cy="365760"/>
           </a:xfrm>
           <a:prstGeom prst="rect">
             <a:avLst/>
@@ -5035,27 +5368,27 @@
           <a:p>
             <a:pPr algn="l"/>
             <a:r>
-              <a:rPr sz="1300" b="1" i="0">
-                <a:solidFill>
-                  <a:srgbClr val="1E3A5F"/>
-                </a:solidFill>
-                <a:latin typeface="Calibri"/>
-              </a:rPr>
-              <a:t>POS・会計</a:t>
-            </a:r>
-          </a:p>
-        </p:txBody>
-      </p:sp>
-      <p:sp>
-        <p:nvSpPr>
-          <p:cNvPr id="7" name="TextBox 6"/>
-          <p:cNvSpPr txBox="1"/>
-          <p:nvPr/>
-        </p:nvSpPr>
-        <p:spPr>
-          <a:xfrm>
-            <a:off x="365760" y="1399032"/>
-            <a:ext cx="2514600" cy="1051560"/>
+              <a:rPr sz="1200" b="1">
+                <a:solidFill>
+                  <a:srgbClr val="0D9488"/>
+                </a:solidFill>
+                <a:latin typeface="Calibri"/>
+              </a:rPr>
+              <a:t>目的</a:t>
+            </a:r>
+          </a:p>
+        </p:txBody>
+      </p:sp>
+      <p:sp>
+        <p:nvSpPr>
+          <p:cNvPr id="8" name="TextBox 7"/>
+          <p:cNvSpPr txBox="1"/>
+          <p:nvPr/>
+        </p:nvSpPr>
+        <p:spPr>
+          <a:xfrm>
+            <a:off x="502920" y="1783080"/>
+            <a:ext cx="3840480" cy="749808"/>
           </a:xfrm>
           <a:prstGeom prst="rect">
             <a:avLst/>
@@ -5070,28 +5403,27 @@
           <a:p>
             <a:pPr algn="l"/>
             <a:r>
-              <a:rPr sz="1200" b="0" i="0">
-                <a:solidFill>
-                  <a:srgbClr val="334155"/>
-                </a:solidFill>
-                <a:latin typeface="Calibri"/>
-              </a:rPr>
-              <a:t>会計/レシート印刷
-クーポン・割引管理</a:t>
-            </a:r>
-          </a:p>
-        </p:txBody>
-      </p:sp>
-      <p:sp>
-        <p:nvSpPr>
-          <p:cNvPr id="8" name="Rectangle 7"/>
+              <a:rPr sz="1500" b="1">
+                <a:solidFill>
+                  <a:srgbClr val="1A1A2E"/>
+                </a:solidFill>
+                <a:latin typeface="Calibri"/>
+              </a:rPr>
+              <a:t>現行システムの完全リプレイス</a:t>
+            </a:r>
+          </a:p>
+        </p:txBody>
+      </p:sp>
+      <p:sp>
+        <p:nvSpPr>
+          <p:cNvPr id="9" name="Rectangle 8"/>
           <p:cNvSpPr/>
           <p:nvPr/>
         </p:nvSpPr>
         <p:spPr>
           <a:xfrm>
-            <a:off x="3154680" y="804672"/>
-            <a:ext cx="2743200" cy="1828800"/>
+            <a:off x="4754879" y="1280160"/>
+            <a:ext cx="4160520" cy="1371600"/>
           </a:xfrm>
           <a:prstGeom prst="rect">
             <a:avLst/>
@@ -5099,7 +5431,7 @@
           <a:solidFill>
             <a:srgbClr val="F5F7FA"/>
           </a:solidFill>
-          <a:ln w="6350">
+          <a:ln w="9525">
             <a:solidFill>
               <a:srgbClr val="CBD5E1"/>
             </a:solidFill>
@@ -5129,14 +5461,14 @@
       </p:sp>
       <p:sp>
         <p:nvSpPr>
-          <p:cNvPr id="9" name="TextBox 8"/>
-          <p:cNvSpPr txBox="1"/>
-          <p:nvPr/>
-        </p:nvSpPr>
-        <p:spPr>
-          <a:xfrm>
-            <a:off x="3291840" y="914400"/>
-            <a:ext cx="2468880" cy="411480"/>
+          <p:cNvPr id="10" name="TextBox 9"/>
+          <p:cNvSpPr txBox="1"/>
+          <p:nvPr/>
+        </p:nvSpPr>
+        <p:spPr>
+          <a:xfrm>
+            <a:off x="4937759" y="1371600"/>
+            <a:ext cx="3840480" cy="365760"/>
           </a:xfrm>
           <a:prstGeom prst="rect">
             <a:avLst/>
@@ -5151,27 +5483,27 @@
           <a:p>
             <a:pPr algn="l"/>
             <a:r>
-              <a:rPr sz="1300" b="1" i="0">
-                <a:solidFill>
-                  <a:srgbClr val="1E3A5F"/>
-                </a:solidFill>
-                <a:latin typeface="Calibri"/>
-              </a:rPr>
-              <a:t>予約・スケジュール</a:t>
-            </a:r>
-          </a:p>
-        </p:txBody>
-      </p:sp>
-      <p:sp>
-        <p:nvSpPr>
-          <p:cNvPr id="10" name="TextBox 9"/>
-          <p:cNvSpPr txBox="1"/>
-          <p:nvPr/>
-        </p:nvSpPr>
-        <p:spPr>
-          <a:xfrm>
-            <a:off x="3291840" y="1399032"/>
-            <a:ext cx="2514600" cy="1051560"/>
+              <a:rPr sz="1200" b="1">
+                <a:solidFill>
+                  <a:srgbClr val="0D9488"/>
+                </a:solidFill>
+                <a:latin typeface="Calibri"/>
+              </a:rPr>
+              <a:t>対象</a:t>
+            </a:r>
+          </a:p>
+        </p:txBody>
+      </p:sp>
+      <p:sp>
+        <p:nvSpPr>
+          <p:cNvPr id="11" name="TextBox 10"/>
+          <p:cNvSpPr txBox="1"/>
+          <p:nvPr/>
+        </p:nvSpPr>
+        <p:spPr>
+          <a:xfrm>
+            <a:off x="4937759" y="1783080"/>
+            <a:ext cx="3840480" cy="749808"/>
           </a:xfrm>
           <a:prstGeom prst="rect">
             <a:avLst/>
@@ -5186,28 +5518,27 @@
           <a:p>
             <a:pPr algn="l"/>
             <a:r>
-              <a:rPr sz="1200" b="0" i="0">
-                <a:solidFill>
-                  <a:srgbClr val="334155"/>
-                </a:solidFill>
-                <a:latin typeface="Calibri"/>
-              </a:rPr>
-              <a:t>顧客予約/スタッフシフト
-リマインド通知</a:t>
-            </a:r>
-          </a:p>
-        </p:txBody>
-      </p:sp>
-      <p:sp>
-        <p:nvSpPr>
-          <p:cNvPr id="11" name="Rectangle 10"/>
+              <a:rPr sz="1500" b="1">
+                <a:solidFill>
+                  <a:srgbClr val="1A1A2E"/>
+                </a:solidFill>
+                <a:latin typeface="Calibri"/>
+              </a:rPr>
+              <a:t>グループ全70店舗</a:t>
+            </a:r>
+          </a:p>
+        </p:txBody>
+      </p:sp>
+      <p:sp>
+        <p:nvSpPr>
+          <p:cNvPr id="12" name="Rectangle 11"/>
           <p:cNvSpPr/>
           <p:nvPr/>
         </p:nvSpPr>
         <p:spPr>
           <a:xfrm>
-            <a:off x="6080760" y="804672"/>
-            <a:ext cx="2743200" cy="1828800"/>
+            <a:off x="320040" y="2852928"/>
+            <a:ext cx="4160520" cy="1371600"/>
           </a:xfrm>
           <a:prstGeom prst="rect">
             <a:avLst/>
@@ -5215,7 +5546,7 @@
           <a:solidFill>
             <a:srgbClr val="F5F7FA"/>
           </a:solidFill>
-          <a:ln w="6350">
+          <a:ln w="9525">
             <a:solidFill>
               <a:srgbClr val="CBD5E1"/>
             </a:solidFill>
@@ -5245,14 +5576,14 @@
       </p:sp>
       <p:sp>
         <p:nvSpPr>
-          <p:cNvPr id="12" name="TextBox 11"/>
-          <p:cNvSpPr txBox="1"/>
-          <p:nvPr/>
-        </p:nvSpPr>
-        <p:spPr>
-          <a:xfrm>
-            <a:off x="6217920" y="914400"/>
-            <a:ext cx="2468880" cy="411480"/>
+          <p:cNvPr id="13" name="TextBox 12"/>
+          <p:cNvSpPr txBox="1"/>
+          <p:nvPr/>
+        </p:nvSpPr>
+        <p:spPr>
+          <a:xfrm>
+            <a:off x="502920" y="2944368"/>
+            <a:ext cx="3840480" cy="365760"/>
           </a:xfrm>
           <a:prstGeom prst="rect">
             <a:avLst/>
@@ -5267,27 +5598,27 @@
           <a:p>
             <a:pPr algn="l"/>
             <a:r>
-              <a:rPr sz="1300" b="1" i="0">
-                <a:solidFill>
-                  <a:srgbClr val="1E3A5F"/>
-                </a:solidFill>
-                <a:latin typeface="Calibri"/>
-              </a:rPr>
-              <a:t>顧客管理</a:t>
-            </a:r>
-          </a:p>
-        </p:txBody>
-      </p:sp>
-      <p:sp>
-        <p:nvSpPr>
-          <p:cNvPr id="13" name="TextBox 12"/>
-          <p:cNvSpPr txBox="1"/>
-          <p:nvPr/>
-        </p:nvSpPr>
-        <p:spPr>
-          <a:xfrm>
-            <a:off x="6217920" y="1399032"/>
-            <a:ext cx="2514600" cy="1051560"/>
+              <a:rPr sz="1200" b="1">
+                <a:solidFill>
+                  <a:srgbClr val="0D9488"/>
+                </a:solidFill>
+                <a:latin typeface="Calibri"/>
+              </a:rPr>
+              <a:t>開発方式</a:t>
+            </a:r>
+          </a:p>
+        </p:txBody>
+      </p:sp>
+      <p:sp>
+        <p:nvSpPr>
+          <p:cNvPr id="14" name="TextBox 13"/>
+          <p:cNvSpPr txBox="1"/>
+          <p:nvPr/>
+        </p:nvSpPr>
+        <p:spPr>
+          <a:xfrm>
+            <a:off x="502920" y="3355848"/>
+            <a:ext cx="3840480" cy="749808"/>
           </a:xfrm>
           <a:prstGeom prst="rect">
             <a:avLst/>
@@ -5302,28 +5633,27 @@
           <a:p>
             <a:pPr algn="l"/>
             <a:r>
-              <a:rPr sz="1200" b="0" i="0">
-                <a:solidFill>
-                  <a:srgbClr val="334155"/>
-                </a:solidFill>
-                <a:latin typeface="Calibri"/>
-              </a:rPr>
-              <a:t>来店履歴/施術メモ
-ポイント・VIP管理</a:t>
-            </a:r>
-          </a:p>
-        </p:txBody>
-      </p:sp>
-      <p:sp>
-        <p:nvSpPr>
-          <p:cNvPr id="14" name="Rectangle 13"/>
+              <a:rPr sz="1500" b="1">
+                <a:solidFill>
+                  <a:srgbClr val="1A1A2E"/>
+                </a:solidFill>
+                <a:latin typeface="Calibri"/>
+              </a:rPr>
+              <a:t>Flutter（iOS/Android/タブレット）</a:t>
+            </a:r>
+          </a:p>
+        </p:txBody>
+      </p:sp>
+      <p:sp>
+        <p:nvSpPr>
+          <p:cNvPr id="15" name="Rectangle 14"/>
           <p:cNvSpPr/>
           <p:nvPr/>
         </p:nvSpPr>
         <p:spPr>
           <a:xfrm>
-            <a:off x="228600" y="2862072"/>
-            <a:ext cx="2743200" cy="1828800"/>
+            <a:off x="4754879" y="2852928"/>
+            <a:ext cx="4160520" cy="1371600"/>
           </a:xfrm>
           <a:prstGeom prst="rect">
             <a:avLst/>
@@ -5331,7 +5661,7 @@
           <a:solidFill>
             <a:srgbClr val="F5F7FA"/>
           </a:solidFill>
-          <a:ln w="6350">
+          <a:ln w="9525">
             <a:solidFill>
               <a:srgbClr val="CBD5E1"/>
             </a:solidFill>
@@ -5361,14 +5691,14 @@
       </p:sp>
       <p:sp>
         <p:nvSpPr>
-          <p:cNvPr id="15" name="TextBox 14"/>
-          <p:cNvSpPr txBox="1"/>
-          <p:nvPr/>
-        </p:nvSpPr>
-        <p:spPr>
-          <a:xfrm>
-            <a:off x="365760" y="2971800"/>
-            <a:ext cx="2468880" cy="411480"/>
+          <p:cNvPr id="16" name="TextBox 15"/>
+          <p:cNvSpPr txBox="1"/>
+          <p:nvPr/>
+        </p:nvSpPr>
+        <p:spPr>
+          <a:xfrm>
+            <a:off x="4937759" y="2944368"/>
+            <a:ext cx="3840480" cy="365760"/>
           </a:xfrm>
           <a:prstGeom prst="rect">
             <a:avLst/>
@@ -5383,27 +5713,27 @@
           <a:p>
             <a:pPr algn="l"/>
             <a:r>
-              <a:rPr sz="1300" b="1" i="0">
-                <a:solidFill>
-                  <a:srgbClr val="1E3A5F"/>
-                </a:solidFill>
-                <a:latin typeface="Calibri"/>
-              </a:rPr>
-              <a:t>在庫管理</a:t>
-            </a:r>
-          </a:p>
-        </p:txBody>
-      </p:sp>
-      <p:sp>
-        <p:nvSpPr>
-          <p:cNvPr id="16" name="TextBox 15"/>
-          <p:cNvSpPr txBox="1"/>
-          <p:nvPr/>
-        </p:nvSpPr>
-        <p:spPr>
-          <a:xfrm>
-            <a:off x="365760" y="3456432"/>
-            <a:ext cx="2514600" cy="1051560"/>
+              <a:rPr sz="1200" b="1">
+                <a:solidFill>
+                  <a:srgbClr val="0D9488"/>
+                </a:solidFill>
+                <a:latin typeface="Calibri"/>
+              </a:rPr>
+              <a:t>データ管理</a:t>
+            </a:r>
+          </a:p>
+        </p:txBody>
+      </p:sp>
+      <p:sp>
+        <p:nvSpPr>
+          <p:cNvPr id="17" name="TextBox 16"/>
+          <p:cNvSpPr txBox="1"/>
+          <p:nvPr/>
+        </p:nvSpPr>
+        <p:spPr>
+          <a:xfrm>
+            <a:off x="4937759" y="3355848"/>
+            <a:ext cx="3840480" cy="749808"/>
           </a:xfrm>
           <a:prstGeom prst="rect">
             <a:avLst/>
@@ -5418,39 +5748,36 @@
           <a:p>
             <a:pPr algn="l"/>
             <a:r>
-              <a:rPr sz="1200" b="0" i="0">
-                <a:solidFill>
-                  <a:srgbClr val="334155"/>
-                </a:solidFill>
-                <a:latin typeface="Calibri"/>
-              </a:rPr>
-              <a:t>商品・薬剤の在庫追跡
-発注アラート</a:t>
-            </a:r>
-          </a:p>
-        </p:txBody>
-      </p:sp>
-      <p:sp>
-        <p:nvSpPr>
-          <p:cNvPr id="17" name="Rectangle 16"/>
+              <a:rPr sz="1500" b="1">
+                <a:solidFill>
+                  <a:srgbClr val="1A1A2E"/>
+                </a:solidFill>
+                <a:latin typeface="Calibri"/>
+              </a:rPr>
+              <a:t>オフライン対応＋クラウド同期</a:t>
+            </a:r>
+          </a:p>
+        </p:txBody>
+      </p:sp>
+      <p:sp>
+        <p:nvSpPr>
+          <p:cNvPr id="18" name="Rectangle 17"/>
           <p:cNvSpPr/>
           <p:nvPr/>
         </p:nvSpPr>
         <p:spPr>
           <a:xfrm>
-            <a:off x="3154680" y="2862072"/>
-            <a:ext cx="2743200" cy="1828800"/>
+            <a:off x="320040" y="4572000"/>
+            <a:ext cx="8503920" cy="438912"/>
           </a:xfrm>
           <a:prstGeom prst="rect">
             <a:avLst/>
           </a:prstGeom>
           <a:solidFill>
-            <a:srgbClr val="F5F7FA"/>
+            <a:srgbClr val="0D9488"/>
           </a:solidFill>
-          <a:ln w="6350">
-            <a:solidFill>
-              <a:srgbClr val="CBD5E1"/>
-            </a:solidFill>
+          <a:ln>
+            <a:noFill/>
           </a:ln>
         </p:spPr>
         <p:style>
@@ -5477,187 +5804,35 @@
       </p:sp>
       <p:sp>
         <p:nvSpPr>
-          <p:cNvPr id="18" name="TextBox 17"/>
-          <p:cNvSpPr txBox="1"/>
-          <p:nvPr/>
-        </p:nvSpPr>
-        <p:spPr>
-          <a:xfrm>
-            <a:off x="3291840" y="2971800"/>
-            <a:ext cx="2468880" cy="411480"/>
-          </a:xfrm>
-          <a:prstGeom prst="rect">
-            <a:avLst/>
-          </a:prstGeom>
-          <a:noFill/>
-        </p:spPr>
-        <p:txBody>
-          <a:bodyPr wrap="square">
-            <a:spAutoFit/>
-          </a:bodyPr>
-          <a:lstStyle/>
-          <a:p>
-            <a:pPr algn="l"/>
-            <a:r>
-              <a:rPr sz="1300" b="1" i="0">
-                <a:solidFill>
-                  <a:srgbClr val="1E3A5F"/>
-                </a:solidFill>
-                <a:latin typeface="Calibri"/>
-              </a:rPr>
-              <a:t>売上レポート</a:t>
-            </a:r>
-          </a:p>
-        </p:txBody>
-      </p:sp>
-      <p:sp>
-        <p:nvSpPr>
           <p:cNvPr id="19" name="TextBox 18"/>
           <p:cNvSpPr txBox="1"/>
           <p:nvPr/>
         </p:nvSpPr>
         <p:spPr>
           <a:xfrm>
-            <a:off x="3291840" y="3456432"/>
-            <a:ext cx="2514600" cy="1051560"/>
-          </a:xfrm>
-          <a:prstGeom prst="rect">
-            <a:avLst/>
-          </a:prstGeom>
-          <a:noFill/>
-        </p:spPr>
-        <p:txBody>
-          <a:bodyPr wrap="square">
-            <a:spAutoFit/>
-          </a:bodyPr>
-          <a:lstStyle/>
-          <a:p>
-            <a:pPr algn="l"/>
-            <a:r>
-              <a:rPr sz="1200" b="0" i="0">
-                <a:solidFill>
-                  <a:srgbClr val="334155"/>
-                </a:solidFill>
-                <a:latin typeface="Calibri"/>
-              </a:rPr>
-              <a:t>日次・月次・店舗別分析
-本部一括確認</a:t>
-            </a:r>
-          </a:p>
-        </p:txBody>
-      </p:sp>
-      <p:sp>
-        <p:nvSpPr>
-          <p:cNvPr id="20" name="Rectangle 19"/>
-          <p:cNvSpPr/>
-          <p:nvPr/>
-        </p:nvSpPr>
-        <p:spPr>
-          <a:xfrm>
-            <a:off x="6080760" y="2862072"/>
-            <a:ext cx="2743200" cy="1828800"/>
-          </a:xfrm>
-          <a:prstGeom prst="rect">
-            <a:avLst/>
-          </a:prstGeom>
-          <a:solidFill>
-            <a:srgbClr val="F5F7FA"/>
-          </a:solidFill>
-          <a:ln w="6350">
-            <a:solidFill>
-              <a:srgbClr val="CBD5E1"/>
-            </a:solidFill>
-          </a:ln>
-        </p:spPr>
-        <p:style>
-          <a:lnRef idx="1">
-            <a:schemeClr val="accent1"/>
-          </a:lnRef>
-          <a:fillRef idx="3">
-            <a:schemeClr val="accent1"/>
-          </a:fillRef>
-          <a:effectRef idx="2">
-            <a:schemeClr val="accent1"/>
-          </a:effectRef>
-          <a:fontRef idx="minor">
-            <a:schemeClr val="lt1"/>
-          </a:fontRef>
-        </p:style>
-        <p:txBody>
-          <a:bodyPr rtlCol="0" anchor="ctr"/>
-          <a:lstStyle/>
-          <a:p>
-            <a:pPr algn="ctr"/>
-          </a:p>
-        </p:txBody>
-      </p:sp>
-      <p:sp>
-        <p:nvSpPr>
-          <p:cNvPr id="21" name="TextBox 20"/>
-          <p:cNvSpPr txBox="1"/>
-          <p:nvPr/>
-        </p:nvSpPr>
-        <p:spPr>
-          <a:xfrm>
-            <a:off x="6217920" y="2971800"/>
-            <a:ext cx="2468880" cy="411480"/>
-          </a:xfrm>
-          <a:prstGeom prst="rect">
-            <a:avLst/>
-          </a:prstGeom>
-          <a:noFill/>
-        </p:spPr>
-        <p:txBody>
-          <a:bodyPr wrap="square">
-            <a:spAutoFit/>
-          </a:bodyPr>
-          <a:lstStyle/>
-          <a:p>
-            <a:pPr algn="l"/>
-            <a:r>
-              <a:rPr sz="1300" b="1" i="0">
-                <a:solidFill>
-                  <a:srgbClr val="1E3A5F"/>
-                </a:solidFill>
-                <a:latin typeface="Calibri"/>
-              </a:rPr>
-              <a:t>スタッフ管理</a:t>
-            </a:r>
-          </a:p>
-        </p:txBody>
-      </p:sp>
-      <p:sp>
-        <p:nvSpPr>
-          <p:cNvPr id="22" name="TextBox 21"/>
-          <p:cNvSpPr txBox="1"/>
-          <p:nvPr/>
-        </p:nvSpPr>
-        <p:spPr>
-          <a:xfrm>
-            <a:off x="6217920" y="3456432"/>
-            <a:ext cx="2514600" cy="1051560"/>
-          </a:xfrm>
-          <a:prstGeom prst="rect">
-            <a:avLst/>
-          </a:prstGeom>
-          <a:noFill/>
-        </p:spPr>
-        <p:txBody>
-          <a:bodyPr wrap="square">
-            <a:spAutoFit/>
-          </a:bodyPr>
-          <a:lstStyle/>
-          <a:p>
-            <a:pPr algn="l"/>
-            <a:r>
-              <a:rPr sz="1200" b="0" i="0">
-                <a:solidFill>
-                  <a:srgbClr val="334155"/>
-                </a:solidFill>
-                <a:latin typeface="Calibri"/>
-              </a:rPr>
-              <a:t>権限設定/勤怠記録
-コミッション計算</a:t>
+            <a:off x="320040" y="4572000"/>
+            <a:ext cx="8503920" cy="438912"/>
+          </a:xfrm>
+          <a:prstGeom prst="rect">
+            <a:avLst/>
+          </a:prstGeom>
+          <a:noFill/>
+        </p:spPr>
+        <p:txBody>
+          <a:bodyPr wrap="square">
+            <a:spAutoFit/>
+          </a:bodyPr>
+          <a:lstStyle/>
+          <a:p>
+            <a:pPr algn="ctr"/>
+            <a:r>
+              <a:rPr sz="1200" b="1">
+                <a:solidFill>
+                  <a:srgbClr val="FFFFFF"/>
+                </a:solidFill>
+                <a:latin typeface="Calibri"/>
+              </a:rPr>
+              <a:t>社内エンジニアによる開発 → 外注費ゼロ・迅速な改修・完全カスタマイズ</a:t>
             </a:r>
           </a:p>
         </p:txBody>
@@ -5790,13 +5965,13 @@
           <a:p>
             <a:pPr algn="l"/>
             <a:r>
-              <a:rPr sz="2200" b="1" i="0">
+              <a:rPr sz="2200" b="1">
                 <a:solidFill>
                   <a:srgbClr val="FFFFFF"/>
                 </a:solidFill>
                 <a:latin typeface="Calibri"/>
               </a:rPr>
-              <a:t>コスト比較  —  現行 vs 新システム</a:t>
+              <a:t>主要機能（案）</a:t>
             </a:r>
           </a:p>
         </p:txBody>
@@ -5809,18 +5984,18 @@
         </p:nvSpPr>
         <p:spPr>
           <a:xfrm>
-            <a:off x="274320" y="804672"/>
-            <a:ext cx="3977639" cy="3611880"/>
+            <a:off x="228600" y="804672"/>
+            <a:ext cx="2743200" cy="1828800"/>
           </a:xfrm>
           <a:prstGeom prst="rect">
             <a:avLst/>
           </a:prstGeom>
           <a:solidFill>
-            <a:srgbClr val="FEF2F2"/>
+            <a:srgbClr val="F5F7FA"/>
           </a:solidFill>
-          <a:ln w="6350">
+          <a:ln w="9525">
             <a:solidFill>
-              <a:srgbClr val="FECACA"/>
+              <a:srgbClr val="CBD5E1"/>
             </a:solidFill>
           </a:ln>
         </p:spPr>
@@ -5854,29 +6029,29 @@
         </p:nvSpPr>
         <p:spPr>
           <a:xfrm>
-            <a:off x="274320" y="868680"/>
-            <a:ext cx="3977639" cy="457200"/>
-          </a:xfrm>
-          <a:prstGeom prst="rect">
-            <a:avLst/>
-          </a:prstGeom>
-          <a:noFill/>
-        </p:spPr>
-        <p:txBody>
-          <a:bodyPr wrap="square">
-            <a:spAutoFit/>
-          </a:bodyPr>
-          <a:lstStyle/>
-          <a:p>
-            <a:pPr algn="ctr"/>
-            <a:r>
-              <a:rPr sz="1400" b="1" i="0">
-                <a:solidFill>
-                  <a:srgbClr val="DC2626"/>
-                </a:solidFill>
-                <a:latin typeface="Calibri"/>
-              </a:rPr>
-              <a:t>現行システム（VitaminC）</a:t>
+            <a:off x="365760" y="914400"/>
+            <a:ext cx="2148840" cy="384048"/>
+          </a:xfrm>
+          <a:prstGeom prst="rect">
+            <a:avLst/>
+          </a:prstGeom>
+          <a:noFill/>
+        </p:spPr>
+        <p:txBody>
+          <a:bodyPr wrap="square">
+            <a:spAutoFit/>
+          </a:bodyPr>
+          <a:lstStyle/>
+          <a:p>
+            <a:pPr algn="l"/>
+            <a:r>
+              <a:rPr sz="1300" b="1">
+                <a:solidFill>
+                  <a:srgbClr val="1E3A5F"/>
+                </a:solidFill>
+                <a:latin typeface="Calibri"/>
+              </a:rPr>
+              <a:t>POS・会計</a:t>
             </a:r>
           </a:p>
         </p:txBody>
@@ -5889,19 +6064,17 @@
         </p:nvSpPr>
         <p:spPr>
           <a:xfrm>
-            <a:off x="502920" y="1463040"/>
-            <a:ext cx="3520440" cy="621792"/>
+            <a:off x="2057400" y="896112"/>
+            <a:ext cx="822960" cy="274320"/>
           </a:xfrm>
           <a:prstGeom prst="rect">
             <a:avLst/>
           </a:prstGeom>
           <a:solidFill>
-            <a:srgbClr val="FFFFFF"/>
+            <a:srgbClr val="16A34A"/>
           </a:solidFill>
-          <a:ln w="6350">
-            <a:solidFill>
-              <a:srgbClr val="FECACA"/>
-            </a:solidFill>
+          <a:ln>
+            <a:noFill/>
           </a:ln>
         </p:spPr>
         <p:style>
@@ -5934,8 +6107,43 @@
         </p:nvSpPr>
         <p:spPr>
           <a:xfrm>
-            <a:off x="640080" y="1572768"/>
-            <a:ext cx="1828800" cy="411480"/>
+            <a:off x="2057400" y="896112"/>
+            <a:ext cx="822960" cy="274320"/>
+          </a:xfrm>
+          <a:prstGeom prst="rect">
+            <a:avLst/>
+          </a:prstGeom>
+          <a:noFill/>
+        </p:spPr>
+        <p:txBody>
+          <a:bodyPr wrap="square">
+            <a:spAutoFit/>
+          </a:bodyPr>
+          <a:lstStyle/>
+          <a:p>
+            <a:pPr algn="ctr"/>
+            <a:r>
+              <a:rPr sz="900" b="1">
+                <a:solidFill>
+                  <a:srgbClr val="FFFFFF"/>
+                </a:solidFill>
+                <a:latin typeface="Calibri"/>
+              </a:rPr>
+              <a:t>実装済み</a:t>
+            </a:r>
+          </a:p>
+        </p:txBody>
+      </p:sp>
+      <p:sp>
+        <p:nvSpPr>
+          <p:cNvPr id="9" name="TextBox 8"/>
+          <p:cNvSpPr txBox="1"/>
+          <p:nvPr/>
+        </p:nvSpPr>
+        <p:spPr>
+          <a:xfrm>
+            <a:off x="365760" y="1399032"/>
+            <a:ext cx="2514600" cy="1051560"/>
           </a:xfrm>
           <a:prstGeom prst="rect">
             <a:avLst/>
@@ -5950,48 +6158,14 @@
           <a:p>
             <a:pPr algn="l"/>
             <a:r>
-              <a:rPr sz="1200" b="0" i="0">
+              <a:rPr sz="1200" b="0">
                 <a:solidFill>
                   <a:srgbClr val="334155"/>
                 </a:solidFill>
                 <a:latin typeface="Calibri"/>
               </a:rPr>
-              <a:t>月額保守費</a:t>
-            </a:r>
-          </a:p>
-        </p:txBody>
-      </p:sp>
-      <p:sp>
-        <p:nvSpPr>
-          <p:cNvPr id="9" name="TextBox 8"/>
-          <p:cNvSpPr txBox="1"/>
-          <p:nvPr/>
-        </p:nvSpPr>
-        <p:spPr>
-          <a:xfrm>
-            <a:off x="2240280" y="1554480"/>
-            <a:ext cx="1645920" cy="438912"/>
-          </a:xfrm>
-          <a:prstGeom prst="rect">
-            <a:avLst/>
-          </a:prstGeom>
-          <a:noFill/>
-        </p:spPr>
-        <p:txBody>
-          <a:bodyPr wrap="square">
-            <a:spAutoFit/>
-          </a:bodyPr>
-          <a:lstStyle/>
-          <a:p>
-            <a:pPr algn="r"/>
-            <a:r>
-              <a:rPr sz="1400" b="1" i="0">
-                <a:solidFill>
-                  <a:srgbClr val="DC2626"/>
-                </a:solidFill>
-                <a:latin typeface="Calibri"/>
-              </a:rPr>
-              <a:t>350,000円</a:t>
+              <a:t>会計/レシート印刷
+クーポン・割引管理</a:t>
             </a:r>
           </a:p>
         </p:txBody>
@@ -6004,18 +6178,18 @@
         </p:nvSpPr>
         <p:spPr>
           <a:xfrm>
-            <a:off x="502920" y="2267712"/>
-            <a:ext cx="3520440" cy="621792"/>
+            <a:off x="3154680" y="804672"/>
+            <a:ext cx="2743200" cy="1828800"/>
           </a:xfrm>
           <a:prstGeom prst="rect">
             <a:avLst/>
           </a:prstGeom>
           <a:solidFill>
-            <a:srgbClr val="FFFFFF"/>
+            <a:srgbClr val="F5F7FA"/>
           </a:solidFill>
-          <a:ln w="6350">
+          <a:ln w="9525">
             <a:solidFill>
-              <a:srgbClr val="FECACA"/>
+              <a:srgbClr val="CBD5E1"/>
             </a:solidFill>
           </a:ln>
         </p:spPr>
@@ -6049,8 +6223,8 @@
         </p:nvSpPr>
         <p:spPr>
           <a:xfrm>
-            <a:off x="640080" y="2377440"/>
-            <a:ext cx="1828800" cy="411480"/>
+            <a:off x="3291840" y="914400"/>
+            <a:ext cx="2148840" cy="384048"/>
           </a:xfrm>
           <a:prstGeom prst="rect">
             <a:avLst/>
@@ -6065,73 +6239,36 @@
           <a:p>
             <a:pPr algn="l"/>
             <a:r>
-              <a:rPr sz="1200" b="0" i="0">
-                <a:solidFill>
-                  <a:srgbClr val="334155"/>
-                </a:solidFill>
-                <a:latin typeface="Calibri"/>
-              </a:rPr>
-              <a:t>年間コスト</a:t>
-            </a:r>
-          </a:p>
-        </p:txBody>
-      </p:sp>
-      <p:sp>
-        <p:nvSpPr>
-          <p:cNvPr id="12" name="TextBox 11"/>
-          <p:cNvSpPr txBox="1"/>
-          <p:nvPr/>
-        </p:nvSpPr>
-        <p:spPr>
-          <a:xfrm>
-            <a:off x="2240280" y="2359152"/>
-            <a:ext cx="1645920" cy="438912"/>
-          </a:xfrm>
-          <a:prstGeom prst="rect">
-            <a:avLst/>
-          </a:prstGeom>
-          <a:noFill/>
-        </p:spPr>
-        <p:txBody>
-          <a:bodyPr wrap="square">
-            <a:spAutoFit/>
-          </a:bodyPr>
-          <a:lstStyle/>
-          <a:p>
-            <a:pPr algn="r"/>
-            <a:r>
-              <a:rPr sz="1400" b="1" i="0">
-                <a:solidFill>
-                  <a:srgbClr val="DC2626"/>
-                </a:solidFill>
-                <a:latin typeface="Calibri"/>
-              </a:rPr>
-              <a:t>4,200,000円</a:t>
-            </a:r>
-          </a:p>
-        </p:txBody>
-      </p:sp>
-      <p:sp>
-        <p:nvSpPr>
-          <p:cNvPr id="13" name="Rectangle 12"/>
+              <a:rPr sz="1300" b="1">
+                <a:solidFill>
+                  <a:srgbClr val="1E3A5F"/>
+                </a:solidFill>
+                <a:latin typeface="Calibri"/>
+              </a:rPr>
+              <a:t>予約・スケジュール</a:t>
+            </a:r>
+          </a:p>
+        </p:txBody>
+      </p:sp>
+      <p:sp>
+        <p:nvSpPr>
+          <p:cNvPr id="12" name="Rectangle 11"/>
           <p:cNvSpPr/>
           <p:nvPr/>
         </p:nvSpPr>
         <p:spPr>
           <a:xfrm>
-            <a:off x="502920" y="3072384"/>
-            <a:ext cx="3520440" cy="621792"/>
+            <a:off x="4983480" y="896112"/>
+            <a:ext cx="822960" cy="274320"/>
           </a:xfrm>
           <a:prstGeom prst="rect">
             <a:avLst/>
           </a:prstGeom>
           <a:solidFill>
-            <a:srgbClr val="FFFFFF"/>
+            <a:srgbClr val="16A34A"/>
           </a:solidFill>
-          <a:ln w="6350">
-            <a:solidFill>
-              <a:srgbClr val="FECACA"/>
-            </a:solidFill>
+          <a:ln>
+            <a:noFill/>
           </a:ln>
         </p:spPr>
         <p:style>
@@ -6158,14 +6295,49 @@
       </p:sp>
       <p:sp>
         <p:nvSpPr>
+          <p:cNvPr id="13" name="TextBox 12"/>
+          <p:cNvSpPr txBox="1"/>
+          <p:nvPr/>
+        </p:nvSpPr>
+        <p:spPr>
+          <a:xfrm>
+            <a:off x="4983480" y="896112"/>
+            <a:ext cx="822960" cy="274320"/>
+          </a:xfrm>
+          <a:prstGeom prst="rect">
+            <a:avLst/>
+          </a:prstGeom>
+          <a:noFill/>
+        </p:spPr>
+        <p:txBody>
+          <a:bodyPr wrap="square">
+            <a:spAutoFit/>
+          </a:bodyPr>
+          <a:lstStyle/>
+          <a:p>
+            <a:pPr algn="ctr"/>
+            <a:r>
+              <a:rPr sz="900" b="1">
+                <a:solidFill>
+                  <a:srgbClr val="FFFFFF"/>
+                </a:solidFill>
+                <a:latin typeface="Calibri"/>
+              </a:rPr>
+              <a:t>実装済み</a:t>
+            </a:r>
+          </a:p>
+        </p:txBody>
+      </p:sp>
+      <p:sp>
+        <p:nvSpPr>
           <p:cNvPr id="14" name="TextBox 13"/>
           <p:cNvSpPr txBox="1"/>
           <p:nvPr/>
         </p:nvSpPr>
         <p:spPr>
           <a:xfrm>
-            <a:off x="640080" y="3182112"/>
-            <a:ext cx="1828800" cy="411480"/>
+            <a:off x="3291840" y="1399032"/>
+            <a:ext cx="2514600" cy="1051560"/>
           </a:xfrm>
           <a:prstGeom prst="rect">
             <a:avLst/>
@@ -6180,107 +6352,38 @@
           <a:p>
             <a:pPr algn="l"/>
             <a:r>
-              <a:rPr sz="1200" b="0" i="0">
+              <a:rPr sz="1200" b="0">
                 <a:solidFill>
                   <a:srgbClr val="334155"/>
                 </a:solidFill>
                 <a:latin typeface="Calibri"/>
               </a:rPr>
-              <a:t>5年累計</a:t>
-            </a:r>
-          </a:p>
-        </p:txBody>
-      </p:sp>
-      <p:sp>
-        <p:nvSpPr>
-          <p:cNvPr id="15" name="TextBox 14"/>
-          <p:cNvSpPr txBox="1"/>
-          <p:nvPr/>
-        </p:nvSpPr>
-        <p:spPr>
-          <a:xfrm>
-            <a:off x="2240280" y="3163824"/>
-            <a:ext cx="1645920" cy="438912"/>
-          </a:xfrm>
-          <a:prstGeom prst="rect">
-            <a:avLst/>
-          </a:prstGeom>
-          <a:noFill/>
-        </p:spPr>
-        <p:txBody>
-          <a:bodyPr wrap="square">
-            <a:spAutoFit/>
-          </a:bodyPr>
-          <a:lstStyle/>
-          <a:p>
-            <a:pPr algn="r"/>
-            <a:r>
-              <a:rPr sz="1400" b="1" i="0">
-                <a:solidFill>
-                  <a:srgbClr val="DC2626"/>
-                </a:solidFill>
-                <a:latin typeface="Calibri"/>
-              </a:rPr>
-              <a:t>21,000,000円</a:t>
-            </a:r>
-          </a:p>
-        </p:txBody>
-      </p:sp>
-      <p:sp>
-        <p:nvSpPr>
-          <p:cNvPr id="16" name="TextBox 15"/>
-          <p:cNvSpPr txBox="1"/>
-          <p:nvPr/>
-        </p:nvSpPr>
-        <p:spPr>
-          <a:xfrm>
-            <a:off x="4251960" y="2286000"/>
-            <a:ext cx="640080" cy="457200"/>
-          </a:xfrm>
-          <a:prstGeom prst="rect">
-            <a:avLst/>
-          </a:prstGeom>
-          <a:noFill/>
-        </p:spPr>
-        <p:txBody>
-          <a:bodyPr wrap="square">
-            <a:spAutoFit/>
-          </a:bodyPr>
-          <a:lstStyle/>
-          <a:p>
-            <a:pPr algn="ctr"/>
-            <a:r>
-              <a:rPr sz="1800" b="1" i="0">
-                <a:solidFill>
-                  <a:srgbClr val="64748B"/>
-                </a:solidFill>
-                <a:latin typeface="Calibri"/>
-              </a:rPr>
-              <a:t>VS</a:t>
-            </a:r>
-          </a:p>
-        </p:txBody>
-      </p:sp>
-      <p:sp>
-        <p:nvSpPr>
-          <p:cNvPr id="17" name="Rectangle 16"/>
+              <a:t>顧客予約/スタッフシフト
+リマインド通知</a:t>
+            </a:r>
+          </a:p>
+        </p:txBody>
+      </p:sp>
+      <p:sp>
+        <p:nvSpPr>
+          <p:cNvPr id="15" name="Rectangle 14"/>
           <p:cNvSpPr/>
           <p:nvPr/>
         </p:nvSpPr>
         <p:spPr>
           <a:xfrm>
-            <a:off x="4892040" y="804672"/>
-            <a:ext cx="3977639" cy="3611880"/>
+            <a:off x="6080760" y="804672"/>
+            <a:ext cx="2743200" cy="1828800"/>
           </a:xfrm>
           <a:prstGeom prst="rect">
             <a:avLst/>
           </a:prstGeom>
           <a:solidFill>
-            <a:srgbClr val="F0FDF4"/>
+            <a:srgbClr val="F5F7FA"/>
           </a:solidFill>
-          <a:ln w="6350">
+          <a:ln w="9525">
             <a:solidFill>
-              <a:srgbClr val="86EFAC"/>
+              <a:srgbClr val="CBD5E1"/>
             </a:solidFill>
           </a:ln>
         </p:spPr>
@@ -6308,60 +6411,58 @@
       </p:sp>
       <p:sp>
         <p:nvSpPr>
-          <p:cNvPr id="18" name="TextBox 17"/>
-          <p:cNvSpPr txBox="1"/>
-          <p:nvPr/>
-        </p:nvSpPr>
-        <p:spPr>
-          <a:xfrm>
-            <a:off x="4892040" y="868680"/>
-            <a:ext cx="3977639" cy="457200"/>
-          </a:xfrm>
-          <a:prstGeom prst="rect">
-            <a:avLst/>
-          </a:prstGeom>
-          <a:noFill/>
-        </p:spPr>
-        <p:txBody>
-          <a:bodyPr wrap="square">
-            <a:spAutoFit/>
-          </a:bodyPr>
-          <a:lstStyle/>
-          <a:p>
-            <a:pPr algn="ctr"/>
-            <a:r>
-              <a:rPr sz="1400" b="1" i="0">
-                <a:solidFill>
-                  <a:srgbClr val="16A34A"/>
-                </a:solidFill>
-                <a:latin typeface="Calibri"/>
-              </a:rPr>
-              <a:t>新システム（自社開発）</a:t>
-            </a:r>
-          </a:p>
-        </p:txBody>
-      </p:sp>
-      <p:sp>
-        <p:nvSpPr>
-          <p:cNvPr id="19" name="Rectangle 18"/>
+          <p:cNvPr id="16" name="TextBox 15"/>
+          <p:cNvSpPr txBox="1"/>
+          <p:nvPr/>
+        </p:nvSpPr>
+        <p:spPr>
+          <a:xfrm>
+            <a:off x="6217920" y="914400"/>
+            <a:ext cx="2148840" cy="384048"/>
+          </a:xfrm>
+          <a:prstGeom prst="rect">
+            <a:avLst/>
+          </a:prstGeom>
+          <a:noFill/>
+        </p:spPr>
+        <p:txBody>
+          <a:bodyPr wrap="square">
+            <a:spAutoFit/>
+          </a:bodyPr>
+          <a:lstStyle/>
+          <a:p>
+            <a:pPr algn="l"/>
+            <a:r>
+              <a:rPr sz="1300" b="1">
+                <a:solidFill>
+                  <a:srgbClr val="1E3A5F"/>
+                </a:solidFill>
+                <a:latin typeface="Calibri"/>
+              </a:rPr>
+              <a:t>顧客管理</a:t>
+            </a:r>
+          </a:p>
+        </p:txBody>
+      </p:sp>
+      <p:sp>
+        <p:nvSpPr>
+          <p:cNvPr id="17" name="Rectangle 16"/>
           <p:cNvSpPr/>
           <p:nvPr/>
         </p:nvSpPr>
         <p:spPr>
           <a:xfrm>
-            <a:off x="5120640" y="1463040"/>
-            <a:ext cx="3520440" cy="621792"/>
+            <a:off x="7909560" y="896112"/>
+            <a:ext cx="685800" cy="274320"/>
           </a:xfrm>
           <a:prstGeom prst="rect">
             <a:avLst/>
           </a:prstGeom>
           <a:solidFill>
-            <a:srgbClr val="FFFFFF"/>
+            <a:srgbClr val="0891B2"/>
           </a:solidFill>
-          <a:ln w="6350">
-            <a:solidFill>
-              <a:srgbClr val="86EFAC"/>
-            </a:solidFill>
+          <a:ln>
+            <a:noFill/>
           </a:ln>
         </p:spPr>
         <p:style>
@@ -6388,14 +6489,49 @@
       </p:sp>
       <p:sp>
         <p:nvSpPr>
-          <p:cNvPr id="20" name="TextBox 19"/>
-          <p:cNvSpPr txBox="1"/>
-          <p:nvPr/>
-        </p:nvSpPr>
-        <p:spPr>
-          <a:xfrm>
-            <a:off x="5257800" y="1572768"/>
-            <a:ext cx="1645920" cy="411480"/>
+          <p:cNvPr id="18" name="TextBox 17"/>
+          <p:cNvSpPr txBox="1"/>
+          <p:nvPr/>
+        </p:nvSpPr>
+        <p:spPr>
+          <a:xfrm>
+            <a:off x="7909560" y="896112"/>
+            <a:ext cx="685800" cy="274320"/>
+          </a:xfrm>
+          <a:prstGeom prst="rect">
+            <a:avLst/>
+          </a:prstGeom>
+          <a:noFill/>
+        </p:spPr>
+        <p:txBody>
+          <a:bodyPr wrap="square">
+            <a:spAutoFit/>
+          </a:bodyPr>
+          <a:lstStyle/>
+          <a:p>
+            <a:pPr algn="ctr"/>
+            <a:r>
+              <a:rPr sz="900" b="1">
+                <a:solidFill>
+                  <a:srgbClr val="FFFFFF"/>
+                </a:solidFill>
+                <a:latin typeface="Calibri"/>
+              </a:rPr>
+              <a:t>開発中</a:t>
+            </a:r>
+          </a:p>
+        </p:txBody>
+      </p:sp>
+      <p:sp>
+        <p:nvSpPr>
+          <p:cNvPr id="19" name="TextBox 18"/>
+          <p:cNvSpPr txBox="1"/>
+          <p:nvPr/>
+        </p:nvSpPr>
+        <p:spPr>
+          <a:xfrm>
+            <a:off x="6217920" y="1399032"/>
+            <a:ext cx="2514600" cy="1051560"/>
           </a:xfrm>
           <a:prstGeom prst="rect">
             <a:avLst/>
@@ -6410,72 +6546,38 @@
           <a:p>
             <a:pPr algn="l"/>
             <a:r>
-              <a:rPr sz="1200" b="0" i="0">
+              <a:rPr sz="1200" b="0">
                 <a:solidFill>
                   <a:srgbClr val="334155"/>
                 </a:solidFill>
                 <a:latin typeface="Calibri"/>
               </a:rPr>
-              <a:t>開発費</a:t>
-            </a:r>
-          </a:p>
-        </p:txBody>
-      </p:sp>
-      <p:sp>
-        <p:nvSpPr>
-          <p:cNvPr id="21" name="TextBox 20"/>
-          <p:cNvSpPr txBox="1"/>
-          <p:nvPr/>
-        </p:nvSpPr>
-        <p:spPr>
-          <a:xfrm>
-            <a:off x="6720840" y="1554480"/>
-            <a:ext cx="1783080" cy="438912"/>
-          </a:xfrm>
-          <a:prstGeom prst="rect">
-            <a:avLst/>
-          </a:prstGeom>
-          <a:noFill/>
-        </p:spPr>
-        <p:txBody>
-          <a:bodyPr wrap="square">
-            <a:spAutoFit/>
-          </a:bodyPr>
-          <a:lstStyle/>
-          <a:p>
-            <a:pPr algn="r"/>
-            <a:r>
-              <a:rPr sz="1300" b="1" i="0">
-                <a:solidFill>
-                  <a:srgbClr val="16A34A"/>
-                </a:solidFill>
-                <a:latin typeface="Calibri"/>
-              </a:rPr>
-              <a:t>一度のみ（要見積）</a:t>
-            </a:r>
-          </a:p>
-        </p:txBody>
-      </p:sp>
-      <p:sp>
-        <p:nvSpPr>
-          <p:cNvPr id="22" name="Rectangle 21"/>
+              <a:t>来店履歴/施術メモ
+ポイント・VIP管理</a:t>
+            </a:r>
+          </a:p>
+        </p:txBody>
+      </p:sp>
+      <p:sp>
+        <p:nvSpPr>
+          <p:cNvPr id="20" name="Rectangle 19"/>
           <p:cNvSpPr/>
           <p:nvPr/>
         </p:nvSpPr>
         <p:spPr>
           <a:xfrm>
-            <a:off x="5120640" y="2267712"/>
-            <a:ext cx="3520440" cy="621792"/>
+            <a:off x="228600" y="2862072"/>
+            <a:ext cx="2743200" cy="1828800"/>
           </a:xfrm>
           <a:prstGeom prst="rect">
             <a:avLst/>
           </a:prstGeom>
           <a:solidFill>
-            <a:srgbClr val="FFFFFF"/>
+            <a:srgbClr val="F5F7FA"/>
           </a:solidFill>
-          <a:ln w="6350">
+          <a:ln w="9525">
             <a:solidFill>
-              <a:srgbClr val="86EFAC"/>
+              <a:srgbClr val="CBD5E1"/>
             </a:solidFill>
           </a:ln>
         </p:spPr>
@@ -6503,14 +6605,14 @@
       </p:sp>
       <p:sp>
         <p:nvSpPr>
-          <p:cNvPr id="23" name="TextBox 22"/>
-          <p:cNvSpPr txBox="1"/>
-          <p:nvPr/>
-        </p:nvSpPr>
-        <p:spPr>
-          <a:xfrm>
-            <a:off x="5257800" y="2377440"/>
-            <a:ext cx="1645920" cy="411480"/>
+          <p:cNvPr id="21" name="TextBox 20"/>
+          <p:cNvSpPr txBox="1"/>
+          <p:nvPr/>
+        </p:nvSpPr>
+        <p:spPr>
+          <a:xfrm>
+            <a:off x="365760" y="2971800"/>
+            <a:ext cx="2148840" cy="384048"/>
           </a:xfrm>
           <a:prstGeom prst="rect">
             <a:avLst/>
@@ -6525,73 +6627,36 @@
           <a:p>
             <a:pPr algn="l"/>
             <a:r>
-              <a:rPr sz="1200" b="0" i="0">
-                <a:solidFill>
-                  <a:srgbClr val="334155"/>
-                </a:solidFill>
-                <a:latin typeface="Calibri"/>
-              </a:rPr>
-              <a:t>月額費用</a:t>
-            </a:r>
-          </a:p>
-        </p:txBody>
-      </p:sp>
-      <p:sp>
-        <p:nvSpPr>
-          <p:cNvPr id="24" name="TextBox 23"/>
-          <p:cNvSpPr txBox="1"/>
-          <p:nvPr/>
-        </p:nvSpPr>
-        <p:spPr>
-          <a:xfrm>
-            <a:off x="6720840" y="2359152"/>
-            <a:ext cx="1783080" cy="438912"/>
-          </a:xfrm>
-          <a:prstGeom prst="rect">
-            <a:avLst/>
-          </a:prstGeom>
-          <a:noFill/>
-        </p:spPr>
-        <p:txBody>
-          <a:bodyPr wrap="square">
-            <a:spAutoFit/>
-          </a:bodyPr>
-          <a:lstStyle/>
-          <a:p>
-            <a:pPr algn="r"/>
-            <a:r>
-              <a:rPr sz="1300" b="1" i="0">
-                <a:solidFill>
-                  <a:srgbClr val="16A34A"/>
-                </a:solidFill>
-                <a:latin typeface="Calibri"/>
-              </a:rPr>
-              <a:t>サーバー代のみ</a:t>
-            </a:r>
-          </a:p>
-        </p:txBody>
-      </p:sp>
-      <p:sp>
-        <p:nvSpPr>
-          <p:cNvPr id="25" name="Rectangle 24"/>
+              <a:rPr sz="1300" b="1">
+                <a:solidFill>
+                  <a:srgbClr val="1E3A5F"/>
+                </a:solidFill>
+                <a:latin typeface="Calibri"/>
+              </a:rPr>
+              <a:t>在庫管理</a:t>
+            </a:r>
+          </a:p>
+        </p:txBody>
+      </p:sp>
+      <p:sp>
+        <p:nvSpPr>
+          <p:cNvPr id="22" name="Rectangle 21"/>
           <p:cNvSpPr/>
           <p:nvPr/>
         </p:nvSpPr>
         <p:spPr>
           <a:xfrm>
-            <a:off x="5120640" y="3072384"/>
-            <a:ext cx="3520440" cy="621792"/>
+            <a:off x="2057400" y="2953512"/>
+            <a:ext cx="685800" cy="274320"/>
           </a:xfrm>
           <a:prstGeom prst="rect">
             <a:avLst/>
           </a:prstGeom>
           <a:solidFill>
-            <a:srgbClr val="FFFFFF"/>
+            <a:srgbClr val="0891B2"/>
           </a:solidFill>
-          <a:ln w="6350">
-            <a:solidFill>
-              <a:srgbClr val="86EFAC"/>
-            </a:solidFill>
+          <a:ln>
+            <a:noFill/>
           </a:ln>
         </p:spPr>
         <p:style>
@@ -6618,14 +6683,49 @@
       </p:sp>
       <p:sp>
         <p:nvSpPr>
-          <p:cNvPr id="26" name="TextBox 25"/>
-          <p:cNvSpPr txBox="1"/>
-          <p:nvPr/>
-        </p:nvSpPr>
-        <p:spPr>
-          <a:xfrm>
-            <a:off x="5257800" y="3182112"/>
-            <a:ext cx="1645920" cy="411480"/>
+          <p:cNvPr id="23" name="TextBox 22"/>
+          <p:cNvSpPr txBox="1"/>
+          <p:nvPr/>
+        </p:nvSpPr>
+        <p:spPr>
+          <a:xfrm>
+            <a:off x="2057400" y="2953512"/>
+            <a:ext cx="685800" cy="274320"/>
+          </a:xfrm>
+          <a:prstGeom prst="rect">
+            <a:avLst/>
+          </a:prstGeom>
+          <a:noFill/>
+        </p:spPr>
+        <p:txBody>
+          <a:bodyPr wrap="square">
+            <a:spAutoFit/>
+          </a:bodyPr>
+          <a:lstStyle/>
+          <a:p>
+            <a:pPr algn="ctr"/>
+            <a:r>
+              <a:rPr sz="900" b="1">
+                <a:solidFill>
+                  <a:srgbClr val="FFFFFF"/>
+                </a:solidFill>
+                <a:latin typeface="Calibri"/>
+              </a:rPr>
+              <a:t>開発中</a:t>
+            </a:r>
+          </a:p>
+        </p:txBody>
+      </p:sp>
+      <p:sp>
+        <p:nvSpPr>
+          <p:cNvPr id="24" name="TextBox 23"/>
+          <p:cNvSpPr txBox="1"/>
+          <p:nvPr/>
+        </p:nvSpPr>
+        <p:spPr>
+          <a:xfrm>
+            <a:off x="365760" y="3456432"/>
+            <a:ext cx="2514600" cy="1051560"/>
           </a:xfrm>
           <a:prstGeom prst="rect">
             <a:avLst/>
@@ -6640,71 +6740,39 @@
           <a:p>
             <a:pPr algn="l"/>
             <a:r>
-              <a:rPr sz="1200" b="0" i="0">
+              <a:rPr sz="1200" b="0">
                 <a:solidFill>
                   <a:srgbClr val="334155"/>
                 </a:solidFill>
                 <a:latin typeface="Calibri"/>
               </a:rPr>
-              <a:t>回収期間</a:t>
-            </a:r>
-          </a:p>
-        </p:txBody>
-      </p:sp>
-      <p:sp>
-        <p:nvSpPr>
-          <p:cNvPr id="27" name="TextBox 26"/>
-          <p:cNvSpPr txBox="1"/>
-          <p:nvPr/>
-        </p:nvSpPr>
-        <p:spPr>
-          <a:xfrm>
-            <a:off x="6720840" y="3163824"/>
-            <a:ext cx="1783080" cy="438912"/>
-          </a:xfrm>
-          <a:prstGeom prst="rect">
-            <a:avLst/>
-          </a:prstGeom>
-          <a:noFill/>
-        </p:spPr>
-        <p:txBody>
-          <a:bodyPr wrap="square">
-            <a:spAutoFit/>
-          </a:bodyPr>
-          <a:lstStyle/>
-          <a:p>
-            <a:pPr algn="r"/>
-            <a:r>
-              <a:rPr sz="1300" b="1" i="0">
-                <a:solidFill>
-                  <a:srgbClr val="16A34A"/>
-                </a:solidFill>
-                <a:latin typeface="Calibri"/>
-              </a:rPr>
-              <a:t>2〜3年で回収見込</a:t>
-            </a:r>
-          </a:p>
-        </p:txBody>
-      </p:sp>
-      <p:sp>
-        <p:nvSpPr>
-          <p:cNvPr id="28" name="Rectangle 27"/>
+              <a:t>商品・薬剤の在庫追跡
+発注アラート</a:t>
+            </a:r>
+          </a:p>
+        </p:txBody>
+      </p:sp>
+      <p:sp>
+        <p:nvSpPr>
+          <p:cNvPr id="25" name="Rectangle 24"/>
           <p:cNvSpPr/>
           <p:nvPr/>
         </p:nvSpPr>
         <p:spPr>
           <a:xfrm>
-            <a:off x="274320" y="4617720"/>
-            <a:ext cx="8595360" cy="411480"/>
+            <a:off x="3154680" y="2862072"/>
+            <a:ext cx="2743200" cy="1828800"/>
           </a:xfrm>
           <a:prstGeom prst="rect">
             <a:avLst/>
           </a:prstGeom>
           <a:solidFill>
-            <a:srgbClr val="1E3A5F"/>
+            <a:srgbClr val="F5F7FA"/>
           </a:solidFill>
-          <a:ln>
-            <a:noFill/>
+          <a:ln w="9525">
+            <a:solidFill>
+              <a:srgbClr val="CBD5E1"/>
+            </a:solidFill>
           </a:ln>
         </p:spPr>
         <p:style>
@@ -6731,35 +6799,343 @@
       </p:sp>
       <p:sp>
         <p:nvSpPr>
+          <p:cNvPr id="26" name="TextBox 25"/>
+          <p:cNvSpPr txBox="1"/>
+          <p:nvPr/>
+        </p:nvSpPr>
+        <p:spPr>
+          <a:xfrm>
+            <a:off x="3291840" y="2971800"/>
+            <a:ext cx="2148840" cy="384048"/>
+          </a:xfrm>
+          <a:prstGeom prst="rect">
+            <a:avLst/>
+          </a:prstGeom>
+          <a:noFill/>
+        </p:spPr>
+        <p:txBody>
+          <a:bodyPr wrap="square">
+            <a:spAutoFit/>
+          </a:bodyPr>
+          <a:lstStyle/>
+          <a:p>
+            <a:pPr algn="l"/>
+            <a:r>
+              <a:rPr sz="1300" b="1">
+                <a:solidFill>
+                  <a:srgbClr val="1E3A5F"/>
+                </a:solidFill>
+                <a:latin typeface="Calibri"/>
+              </a:rPr>
+              <a:t>売上レポート</a:t>
+            </a:r>
+          </a:p>
+        </p:txBody>
+      </p:sp>
+      <p:sp>
+        <p:nvSpPr>
+          <p:cNvPr id="27" name="Rectangle 26"/>
+          <p:cNvSpPr/>
+          <p:nvPr/>
+        </p:nvSpPr>
+        <p:spPr>
+          <a:xfrm>
+            <a:off x="4983480" y="2953512"/>
+            <a:ext cx="685800" cy="274320"/>
+          </a:xfrm>
+          <a:prstGeom prst="rect">
+            <a:avLst/>
+          </a:prstGeom>
+          <a:solidFill>
+            <a:srgbClr val="0891B2"/>
+          </a:solidFill>
+          <a:ln>
+            <a:noFill/>
+          </a:ln>
+        </p:spPr>
+        <p:style>
+          <a:lnRef idx="1">
+            <a:schemeClr val="accent1"/>
+          </a:lnRef>
+          <a:fillRef idx="3">
+            <a:schemeClr val="accent1"/>
+          </a:fillRef>
+          <a:effectRef idx="2">
+            <a:schemeClr val="accent1"/>
+          </a:effectRef>
+          <a:fontRef idx="minor">
+            <a:schemeClr val="lt1"/>
+          </a:fontRef>
+        </p:style>
+        <p:txBody>
+          <a:bodyPr rtlCol="0" anchor="ctr"/>
+          <a:lstStyle/>
+          <a:p>
+            <a:pPr algn="ctr"/>
+          </a:p>
+        </p:txBody>
+      </p:sp>
+      <p:sp>
+        <p:nvSpPr>
+          <p:cNvPr id="28" name="TextBox 27"/>
+          <p:cNvSpPr txBox="1"/>
+          <p:nvPr/>
+        </p:nvSpPr>
+        <p:spPr>
+          <a:xfrm>
+            <a:off x="4983480" y="2953512"/>
+            <a:ext cx="685800" cy="274320"/>
+          </a:xfrm>
+          <a:prstGeom prst="rect">
+            <a:avLst/>
+          </a:prstGeom>
+          <a:noFill/>
+        </p:spPr>
+        <p:txBody>
+          <a:bodyPr wrap="square">
+            <a:spAutoFit/>
+          </a:bodyPr>
+          <a:lstStyle/>
+          <a:p>
+            <a:pPr algn="ctr"/>
+            <a:r>
+              <a:rPr sz="900" b="1">
+                <a:solidFill>
+                  <a:srgbClr val="FFFFFF"/>
+                </a:solidFill>
+                <a:latin typeface="Calibri"/>
+              </a:rPr>
+              <a:t>開発中</a:t>
+            </a:r>
+          </a:p>
+        </p:txBody>
+      </p:sp>
+      <p:sp>
+        <p:nvSpPr>
           <p:cNvPr id="29" name="TextBox 28"/>
           <p:cNvSpPr txBox="1"/>
           <p:nvPr/>
         </p:nvSpPr>
         <p:spPr>
           <a:xfrm>
-            <a:off x="274320" y="4645152"/>
-            <a:ext cx="8595360" cy="347472"/>
-          </a:xfrm>
-          <a:prstGeom prst="rect">
-            <a:avLst/>
-          </a:prstGeom>
-          <a:noFill/>
-        </p:spPr>
-        <p:txBody>
-          <a:bodyPr wrap="square">
-            <a:spAutoFit/>
-          </a:bodyPr>
-          <a:lstStyle/>
-          <a:p>
-            <a:pPr algn="ctr"/>
-            <a:r>
-              <a:rPr sz="1300" b="1" i="0">
+            <a:off x="3291840" y="3456432"/>
+            <a:ext cx="2514600" cy="1051560"/>
+          </a:xfrm>
+          <a:prstGeom prst="rect">
+            <a:avLst/>
+          </a:prstGeom>
+          <a:noFill/>
+        </p:spPr>
+        <p:txBody>
+          <a:bodyPr wrap="square">
+            <a:spAutoFit/>
+          </a:bodyPr>
+          <a:lstStyle/>
+          <a:p>
+            <a:pPr algn="l"/>
+            <a:r>
+              <a:rPr sz="1200" b="0">
+                <a:solidFill>
+                  <a:srgbClr val="334155"/>
+                </a:solidFill>
+                <a:latin typeface="Calibri"/>
+              </a:rPr>
+              <a:t>日次・月次・店舗別分析
+本部一括確認</a:t>
+            </a:r>
+          </a:p>
+        </p:txBody>
+      </p:sp>
+      <p:sp>
+        <p:nvSpPr>
+          <p:cNvPr id="30" name="Rectangle 29"/>
+          <p:cNvSpPr/>
+          <p:nvPr/>
+        </p:nvSpPr>
+        <p:spPr>
+          <a:xfrm>
+            <a:off x="6080760" y="2862072"/>
+            <a:ext cx="2743200" cy="1828800"/>
+          </a:xfrm>
+          <a:prstGeom prst="rect">
+            <a:avLst/>
+          </a:prstGeom>
+          <a:solidFill>
+            <a:srgbClr val="F5F7FA"/>
+          </a:solidFill>
+          <a:ln w="9525">
+            <a:solidFill>
+              <a:srgbClr val="CBD5E1"/>
+            </a:solidFill>
+          </a:ln>
+        </p:spPr>
+        <p:style>
+          <a:lnRef idx="1">
+            <a:schemeClr val="accent1"/>
+          </a:lnRef>
+          <a:fillRef idx="3">
+            <a:schemeClr val="accent1"/>
+          </a:fillRef>
+          <a:effectRef idx="2">
+            <a:schemeClr val="accent1"/>
+          </a:effectRef>
+          <a:fontRef idx="minor">
+            <a:schemeClr val="lt1"/>
+          </a:fontRef>
+        </p:style>
+        <p:txBody>
+          <a:bodyPr rtlCol="0" anchor="ctr"/>
+          <a:lstStyle/>
+          <a:p>
+            <a:pPr algn="ctr"/>
+          </a:p>
+        </p:txBody>
+      </p:sp>
+      <p:sp>
+        <p:nvSpPr>
+          <p:cNvPr id="31" name="TextBox 30"/>
+          <p:cNvSpPr txBox="1"/>
+          <p:nvPr/>
+        </p:nvSpPr>
+        <p:spPr>
+          <a:xfrm>
+            <a:off x="6217920" y="2971800"/>
+            <a:ext cx="2148840" cy="384048"/>
+          </a:xfrm>
+          <a:prstGeom prst="rect">
+            <a:avLst/>
+          </a:prstGeom>
+          <a:noFill/>
+        </p:spPr>
+        <p:txBody>
+          <a:bodyPr wrap="square">
+            <a:spAutoFit/>
+          </a:bodyPr>
+          <a:lstStyle/>
+          <a:p>
+            <a:pPr algn="l"/>
+            <a:r>
+              <a:rPr sz="1300" b="1">
+                <a:solidFill>
+                  <a:srgbClr val="1E3A5F"/>
+                </a:solidFill>
+                <a:latin typeface="Calibri"/>
+              </a:rPr>
+              <a:t>スタッフ管理</a:t>
+            </a:r>
+          </a:p>
+        </p:txBody>
+      </p:sp>
+      <p:sp>
+        <p:nvSpPr>
+          <p:cNvPr id="32" name="Rectangle 31"/>
+          <p:cNvSpPr/>
+          <p:nvPr/>
+        </p:nvSpPr>
+        <p:spPr>
+          <a:xfrm>
+            <a:off x="7909560" y="2953512"/>
+            <a:ext cx="822960" cy="274320"/>
+          </a:xfrm>
+          <a:prstGeom prst="rect">
+            <a:avLst/>
+          </a:prstGeom>
+          <a:solidFill>
+            <a:srgbClr val="16A34A"/>
+          </a:solidFill>
+          <a:ln>
+            <a:noFill/>
+          </a:ln>
+        </p:spPr>
+        <p:style>
+          <a:lnRef idx="1">
+            <a:schemeClr val="accent1"/>
+          </a:lnRef>
+          <a:fillRef idx="3">
+            <a:schemeClr val="accent1"/>
+          </a:fillRef>
+          <a:effectRef idx="2">
+            <a:schemeClr val="accent1"/>
+          </a:effectRef>
+          <a:fontRef idx="minor">
+            <a:schemeClr val="lt1"/>
+          </a:fontRef>
+        </p:style>
+        <p:txBody>
+          <a:bodyPr rtlCol="0" anchor="ctr"/>
+          <a:lstStyle/>
+          <a:p>
+            <a:pPr algn="ctr"/>
+          </a:p>
+        </p:txBody>
+      </p:sp>
+      <p:sp>
+        <p:nvSpPr>
+          <p:cNvPr id="33" name="TextBox 32"/>
+          <p:cNvSpPr txBox="1"/>
+          <p:nvPr/>
+        </p:nvSpPr>
+        <p:spPr>
+          <a:xfrm>
+            <a:off x="7909560" y="2953512"/>
+            <a:ext cx="822960" cy="274320"/>
+          </a:xfrm>
+          <a:prstGeom prst="rect">
+            <a:avLst/>
+          </a:prstGeom>
+          <a:noFill/>
+        </p:spPr>
+        <p:txBody>
+          <a:bodyPr wrap="square">
+            <a:spAutoFit/>
+          </a:bodyPr>
+          <a:lstStyle/>
+          <a:p>
+            <a:pPr algn="ctr"/>
+            <a:r>
+              <a:rPr sz="900" b="1">
                 <a:solidFill>
                   <a:srgbClr val="FFFFFF"/>
                 </a:solidFill>
                 <a:latin typeface="Calibri"/>
               </a:rPr>
-              <a:t>長期的に年間350万円以上のコスト削減ポテンシャル</a:t>
+              <a:t>実装済み</a:t>
+            </a:r>
+          </a:p>
+        </p:txBody>
+      </p:sp>
+      <p:sp>
+        <p:nvSpPr>
+          <p:cNvPr id="34" name="TextBox 33"/>
+          <p:cNvSpPr txBox="1"/>
+          <p:nvPr/>
+        </p:nvSpPr>
+        <p:spPr>
+          <a:xfrm>
+            <a:off x="6217920" y="3456432"/>
+            <a:ext cx="2514600" cy="1051560"/>
+          </a:xfrm>
+          <a:prstGeom prst="rect">
+            <a:avLst/>
+          </a:prstGeom>
+          <a:noFill/>
+        </p:spPr>
+        <p:txBody>
+          <a:bodyPr wrap="square">
+            <a:spAutoFit/>
+          </a:bodyPr>
+          <a:lstStyle/>
+          <a:p>
+            <a:pPr algn="l"/>
+            <a:r>
+              <a:rPr sz="1200" b="0">
+                <a:solidFill>
+                  <a:srgbClr val="334155"/>
+                </a:solidFill>
+                <a:latin typeface="Calibri"/>
+              </a:rPr>
+              <a:t>権限設定/勤怠記録
+コミッション計算</a:t>
             </a:r>
           </a:p>
         </p:txBody>
@@ -6892,13 +7268,13 @@
           <a:p>
             <a:pPr algn="l"/>
             <a:r>
-              <a:rPr sz="2200" b="1" i="0">
+              <a:rPr sz="2200" b="1">
                 <a:solidFill>
                   <a:srgbClr val="FFFFFF"/>
                 </a:solidFill>
                 <a:latin typeface="Calibri"/>
               </a:rPr>
-              <a:t>開発スケジュール（案）</a:t>
+              <a:t>コスト比較  —  現行 vs 新システム</a:t>
             </a:r>
           </a:p>
         </p:txBody>
@@ -6912,16 +7288,18 @@
         <p:spPr>
           <a:xfrm>
             <a:off x="274320" y="804672"/>
-            <a:ext cx="1463040" cy="658368"/>
+            <a:ext cx="3977639" cy="3611880"/>
           </a:xfrm>
           <a:prstGeom prst="rect">
             <a:avLst/>
           </a:prstGeom>
           <a:solidFill>
-            <a:srgbClr val="0D9488"/>
+            <a:srgbClr val="FEF2F2"/>
           </a:solidFill>
-          <a:ln>
-            <a:noFill/>
+          <a:ln w="9525">
+            <a:solidFill>
+              <a:srgbClr val="FECACA"/>
+            </a:solidFill>
           </a:ln>
         </p:spPr>
         <p:style>
@@ -6954,88 +7332,53 @@
         </p:nvSpPr>
         <p:spPr>
           <a:xfrm>
-            <a:off x="274320" y="841248"/>
-            <a:ext cx="1463040" cy="320040"/>
-          </a:xfrm>
-          <a:prstGeom prst="rect">
-            <a:avLst/>
-          </a:prstGeom>
-          <a:noFill/>
-        </p:spPr>
-        <p:txBody>
-          <a:bodyPr wrap="square">
-            <a:spAutoFit/>
-          </a:bodyPr>
-          <a:lstStyle/>
-          <a:p>
-            <a:pPr algn="ctr"/>
-            <a:r>
-              <a:rPr sz="1100" b="1" i="0">
-                <a:solidFill>
-                  <a:srgbClr val="FFFFFF"/>
-                </a:solidFill>
-                <a:latin typeface="Calibri"/>
-              </a:rPr>
-              <a:t>フェーズ 1</a:t>
-            </a:r>
-          </a:p>
-        </p:txBody>
-      </p:sp>
-      <p:sp>
-        <p:nvSpPr>
-          <p:cNvPr id="7" name="TextBox 6"/>
-          <p:cNvSpPr txBox="1"/>
-          <p:nvPr/>
-        </p:nvSpPr>
-        <p:spPr>
-          <a:xfrm>
-            <a:off x="274320" y="1133856"/>
-            <a:ext cx="1463040" cy="301752"/>
-          </a:xfrm>
-          <a:prstGeom prst="rect">
-            <a:avLst/>
-          </a:prstGeom>
-          <a:noFill/>
-        </p:spPr>
-        <p:txBody>
-          <a:bodyPr wrap="square">
-            <a:spAutoFit/>
-          </a:bodyPr>
-          <a:lstStyle/>
-          <a:p>
-            <a:pPr algn="ctr"/>
-            <a:r>
-              <a:rPr sz="1000" b="0" i="0">
-                <a:solidFill>
-                  <a:srgbClr val="FFFFFF"/>
-                </a:solidFill>
-                <a:latin typeface="Calibri"/>
-              </a:rPr>
-              <a:t>1〜2ヶ月</a:t>
-            </a:r>
-          </a:p>
-        </p:txBody>
-      </p:sp>
-      <p:sp>
-        <p:nvSpPr>
-          <p:cNvPr id="8" name="Rectangle 7"/>
+            <a:off x="274320" y="868680"/>
+            <a:ext cx="3977639" cy="457200"/>
+          </a:xfrm>
+          <a:prstGeom prst="rect">
+            <a:avLst/>
+          </a:prstGeom>
+          <a:noFill/>
+        </p:spPr>
+        <p:txBody>
+          <a:bodyPr wrap="square">
+            <a:spAutoFit/>
+          </a:bodyPr>
+          <a:lstStyle/>
+          <a:p>
+            <a:pPr algn="ctr"/>
+            <a:r>
+              <a:rPr sz="1400" b="1">
+                <a:solidFill>
+                  <a:srgbClr val="DC2626"/>
+                </a:solidFill>
+                <a:latin typeface="Calibri"/>
+              </a:rPr>
+              <a:t>現行システム（VitaminC）</a:t>
+            </a:r>
+          </a:p>
+        </p:txBody>
+      </p:sp>
+      <p:sp>
+        <p:nvSpPr>
+          <p:cNvPr id="7" name="Rectangle 6"/>
           <p:cNvSpPr/>
           <p:nvPr/>
         </p:nvSpPr>
         <p:spPr>
           <a:xfrm>
-            <a:off x="1828800" y="804672"/>
-            <a:ext cx="7040880" cy="658368"/>
+            <a:off x="502920" y="1463040"/>
+            <a:ext cx="3520440" cy="621792"/>
           </a:xfrm>
           <a:prstGeom prst="rect">
             <a:avLst/>
           </a:prstGeom>
           <a:solidFill>
-            <a:srgbClr val="F5F7FA"/>
+            <a:srgbClr val="FFFFFF"/>
           </a:solidFill>
-          <a:ln w="6350">
+          <a:ln w="9525">
             <a:solidFill>
-              <a:srgbClr val="E2E8F0"/>
+              <a:srgbClr val="FECACA"/>
             </a:solidFill>
           </a:ln>
         </p:spPr>
@@ -7063,35 +7406,70 @@
       </p:sp>
       <p:sp>
         <p:nvSpPr>
+          <p:cNvPr id="8" name="TextBox 7"/>
+          <p:cNvSpPr txBox="1"/>
+          <p:nvPr/>
+        </p:nvSpPr>
+        <p:spPr>
+          <a:xfrm>
+            <a:off x="640080" y="1572768"/>
+            <a:ext cx="1828800" cy="411480"/>
+          </a:xfrm>
+          <a:prstGeom prst="rect">
+            <a:avLst/>
+          </a:prstGeom>
+          <a:noFill/>
+        </p:spPr>
+        <p:txBody>
+          <a:bodyPr wrap="square">
+            <a:spAutoFit/>
+          </a:bodyPr>
+          <a:lstStyle/>
+          <a:p>
+            <a:pPr algn="l"/>
+            <a:r>
+              <a:rPr sz="1200" b="0">
+                <a:solidFill>
+                  <a:srgbClr val="334155"/>
+                </a:solidFill>
+                <a:latin typeface="Calibri"/>
+              </a:rPr>
+              <a:t>月額保守費</a:t>
+            </a:r>
+          </a:p>
+        </p:txBody>
+      </p:sp>
+      <p:sp>
+        <p:nvSpPr>
           <p:cNvPr id="9" name="TextBox 8"/>
           <p:cNvSpPr txBox="1"/>
           <p:nvPr/>
         </p:nvSpPr>
         <p:spPr>
           <a:xfrm>
-            <a:off x="1965960" y="941832"/>
-            <a:ext cx="6766560" cy="411480"/>
-          </a:xfrm>
-          <a:prstGeom prst="rect">
-            <a:avLst/>
-          </a:prstGeom>
-          <a:noFill/>
-        </p:spPr>
-        <p:txBody>
-          <a:bodyPr wrap="square">
-            <a:spAutoFit/>
-          </a:bodyPr>
-          <a:lstStyle/>
-          <a:p>
-            <a:pPr algn="l"/>
-            <a:r>
-              <a:rPr sz="1400" b="0" i="0">
-                <a:solidFill>
-                  <a:srgbClr val="1A1A2E"/>
-                </a:solidFill>
-                <a:latin typeface="Calibri"/>
-              </a:rPr>
-              <a:t>要件定義・UI設計</a:t>
+            <a:off x="2240280" y="1554480"/>
+            <a:ext cx="1645920" cy="438912"/>
+          </a:xfrm>
+          <a:prstGeom prst="rect">
+            <a:avLst/>
+          </a:prstGeom>
+          <a:noFill/>
+        </p:spPr>
+        <p:txBody>
+          <a:bodyPr wrap="square">
+            <a:spAutoFit/>
+          </a:bodyPr>
+          <a:lstStyle/>
+          <a:p>
+            <a:pPr algn="r"/>
+            <a:r>
+              <a:rPr sz="1400" b="1">
+                <a:solidFill>
+                  <a:srgbClr val="DC2626"/>
+                </a:solidFill>
+                <a:latin typeface="Calibri"/>
+              </a:rPr>
+              <a:t>350,000円</a:t>
             </a:r>
           </a:p>
         </p:txBody>
@@ -7104,17 +7482,19 @@
         </p:nvSpPr>
         <p:spPr>
           <a:xfrm>
-            <a:off x="274320" y="1600200"/>
-            <a:ext cx="1463040" cy="658368"/>
+            <a:off x="502920" y="2267712"/>
+            <a:ext cx="3520440" cy="621792"/>
           </a:xfrm>
           <a:prstGeom prst="rect">
             <a:avLst/>
           </a:prstGeom>
           <a:solidFill>
-            <a:srgbClr val="0891B2"/>
+            <a:srgbClr val="FFFFFF"/>
           </a:solidFill>
-          <a:ln>
-            <a:noFill/>
+          <a:ln w="9525">
+            <a:solidFill>
+              <a:srgbClr val="FECACA"/>
+            </a:solidFill>
           </a:ln>
         </p:spPr>
         <p:style>
@@ -7147,29 +7527,29 @@
         </p:nvSpPr>
         <p:spPr>
           <a:xfrm>
-            <a:off x="274320" y="1636776"/>
-            <a:ext cx="1463040" cy="320040"/>
-          </a:xfrm>
-          <a:prstGeom prst="rect">
-            <a:avLst/>
-          </a:prstGeom>
-          <a:noFill/>
-        </p:spPr>
-        <p:txBody>
-          <a:bodyPr wrap="square">
-            <a:spAutoFit/>
-          </a:bodyPr>
-          <a:lstStyle/>
-          <a:p>
-            <a:pPr algn="ctr"/>
-            <a:r>
-              <a:rPr sz="1100" b="1" i="0">
-                <a:solidFill>
-                  <a:srgbClr val="FFFFFF"/>
-                </a:solidFill>
-                <a:latin typeface="Calibri"/>
-              </a:rPr>
-              <a:t>フェーズ 2</a:t>
+            <a:off x="640080" y="2377440"/>
+            <a:ext cx="1828800" cy="411480"/>
+          </a:xfrm>
+          <a:prstGeom prst="rect">
+            <a:avLst/>
+          </a:prstGeom>
+          <a:noFill/>
+        </p:spPr>
+        <p:txBody>
+          <a:bodyPr wrap="square">
+            <a:spAutoFit/>
+          </a:bodyPr>
+          <a:lstStyle/>
+          <a:p>
+            <a:pPr algn="l"/>
+            <a:r>
+              <a:rPr sz="1200" b="0">
+                <a:solidFill>
+                  <a:srgbClr val="334155"/>
+                </a:solidFill>
+                <a:latin typeface="Calibri"/>
+              </a:rPr>
+              <a:t>年間コスト</a:t>
             </a:r>
           </a:p>
         </p:txBody>
@@ -7182,29 +7562,29 @@
         </p:nvSpPr>
         <p:spPr>
           <a:xfrm>
-            <a:off x="274320" y="1929384"/>
-            <a:ext cx="1463040" cy="301752"/>
-          </a:xfrm>
-          <a:prstGeom prst="rect">
-            <a:avLst/>
-          </a:prstGeom>
-          <a:noFill/>
-        </p:spPr>
-        <p:txBody>
-          <a:bodyPr wrap="square">
-            <a:spAutoFit/>
-          </a:bodyPr>
-          <a:lstStyle/>
-          <a:p>
-            <a:pPr algn="ctr"/>
-            <a:r>
-              <a:rPr sz="1000" b="0" i="0">
-                <a:solidFill>
-                  <a:srgbClr val="FFFFFF"/>
-                </a:solidFill>
-                <a:latin typeface="Calibri"/>
-              </a:rPr>
-              <a:t>3〜5ヶ月</a:t>
+            <a:off x="2240280" y="2359152"/>
+            <a:ext cx="1645920" cy="438912"/>
+          </a:xfrm>
+          <a:prstGeom prst="rect">
+            <a:avLst/>
+          </a:prstGeom>
+          <a:noFill/>
+        </p:spPr>
+        <p:txBody>
+          <a:bodyPr wrap="square">
+            <a:spAutoFit/>
+          </a:bodyPr>
+          <a:lstStyle/>
+          <a:p>
+            <a:pPr algn="r"/>
+            <a:r>
+              <a:rPr sz="1400" b="1">
+                <a:solidFill>
+                  <a:srgbClr val="DC2626"/>
+                </a:solidFill>
+                <a:latin typeface="Calibri"/>
+              </a:rPr>
+              <a:t>4,200,000円</a:t>
             </a:r>
           </a:p>
         </p:txBody>
@@ -7217,18 +7597,18 @@
         </p:nvSpPr>
         <p:spPr>
           <a:xfrm>
-            <a:off x="1828800" y="1600200"/>
-            <a:ext cx="7040880" cy="658368"/>
+            <a:off x="502920" y="3072384"/>
+            <a:ext cx="3520440" cy="621792"/>
           </a:xfrm>
           <a:prstGeom prst="rect">
             <a:avLst/>
           </a:prstGeom>
           <a:solidFill>
-            <a:srgbClr val="F5F7FA"/>
+            <a:srgbClr val="FFFFFF"/>
           </a:solidFill>
-          <a:ln w="6350">
+          <a:ln w="9525">
             <a:solidFill>
-              <a:srgbClr val="E2E8F0"/>
+              <a:srgbClr val="FECACA"/>
             </a:solidFill>
           </a:ln>
         </p:spPr>
@@ -7262,8 +7642,8 @@
         </p:nvSpPr>
         <p:spPr>
           <a:xfrm>
-            <a:off x="1965960" y="1737360"/>
-            <a:ext cx="6766560" cy="411480"/>
+            <a:off x="640080" y="3182112"/>
+            <a:ext cx="1828800" cy="411480"/>
           </a:xfrm>
           <a:prstGeom prst="rect">
             <a:avLst/>
@@ -7278,36 +7658,108 @@
           <a:p>
             <a:pPr algn="l"/>
             <a:r>
-              <a:rPr sz="1400" b="0" i="0">
-                <a:solidFill>
-                  <a:srgbClr val="1A1A2E"/>
-                </a:solidFill>
-                <a:latin typeface="Calibri"/>
-              </a:rPr>
-              <a:t>コア機能開発（POS・会計機能）</a:t>
-            </a:r>
-          </a:p>
-        </p:txBody>
-      </p:sp>
-      <p:sp>
-        <p:nvSpPr>
-          <p:cNvPr id="15" name="Rectangle 14"/>
+              <a:rPr sz="1200" b="0">
+                <a:solidFill>
+                  <a:srgbClr val="334155"/>
+                </a:solidFill>
+                <a:latin typeface="Calibri"/>
+              </a:rPr>
+              <a:t>5年累計</a:t>
+            </a:r>
+          </a:p>
+        </p:txBody>
+      </p:sp>
+      <p:sp>
+        <p:nvSpPr>
+          <p:cNvPr id="15" name="TextBox 14"/>
+          <p:cNvSpPr txBox="1"/>
+          <p:nvPr/>
+        </p:nvSpPr>
+        <p:spPr>
+          <a:xfrm>
+            <a:off x="2240280" y="3163824"/>
+            <a:ext cx="1645920" cy="438912"/>
+          </a:xfrm>
+          <a:prstGeom prst="rect">
+            <a:avLst/>
+          </a:prstGeom>
+          <a:noFill/>
+        </p:spPr>
+        <p:txBody>
+          <a:bodyPr wrap="square">
+            <a:spAutoFit/>
+          </a:bodyPr>
+          <a:lstStyle/>
+          <a:p>
+            <a:pPr algn="r"/>
+            <a:r>
+              <a:rPr sz="1400" b="1">
+                <a:solidFill>
+                  <a:srgbClr val="DC2626"/>
+                </a:solidFill>
+                <a:latin typeface="Calibri"/>
+              </a:rPr>
+              <a:t>21,000,000円</a:t>
+            </a:r>
+          </a:p>
+        </p:txBody>
+      </p:sp>
+      <p:sp>
+        <p:nvSpPr>
+          <p:cNvPr id="16" name="TextBox 15"/>
+          <p:cNvSpPr txBox="1"/>
+          <p:nvPr/>
+        </p:nvSpPr>
+        <p:spPr>
+          <a:xfrm>
+            <a:off x="4251960" y="2286000"/>
+            <a:ext cx="640080" cy="457200"/>
+          </a:xfrm>
+          <a:prstGeom prst="rect">
+            <a:avLst/>
+          </a:prstGeom>
+          <a:noFill/>
+        </p:spPr>
+        <p:txBody>
+          <a:bodyPr wrap="square">
+            <a:spAutoFit/>
+          </a:bodyPr>
+          <a:lstStyle/>
+          <a:p>
+            <a:pPr algn="ctr"/>
+            <a:r>
+              <a:rPr sz="1800" b="1">
+                <a:solidFill>
+                  <a:srgbClr val="64748B"/>
+                </a:solidFill>
+                <a:latin typeface="Calibri"/>
+              </a:rPr>
+              <a:t>VS</a:t>
+            </a:r>
+          </a:p>
+        </p:txBody>
+      </p:sp>
+      <p:sp>
+        <p:nvSpPr>
+          <p:cNvPr id="17" name="Rectangle 16"/>
           <p:cNvSpPr/>
           <p:nvPr/>
         </p:nvSpPr>
         <p:spPr>
           <a:xfrm>
-            <a:off x="274320" y="2395728"/>
-            <a:ext cx="1463040" cy="658368"/>
+            <a:off x="4892040" y="804672"/>
+            <a:ext cx="3977639" cy="3611880"/>
           </a:xfrm>
           <a:prstGeom prst="rect">
             <a:avLst/>
           </a:prstGeom>
           <a:solidFill>
-            <a:srgbClr val="2563EB"/>
+            <a:srgbClr val="F0FDF4"/>
           </a:solidFill>
-          <a:ln>
-            <a:noFill/>
+          <a:ln w="9525">
+            <a:solidFill>
+              <a:srgbClr val="86EFAC"/>
+            </a:solidFill>
           </a:ln>
         </p:spPr>
         <p:style>
@@ -7334,94 +7786,59 @@
       </p:sp>
       <p:sp>
         <p:nvSpPr>
-          <p:cNvPr id="16" name="TextBox 15"/>
-          <p:cNvSpPr txBox="1"/>
-          <p:nvPr/>
-        </p:nvSpPr>
-        <p:spPr>
-          <a:xfrm>
-            <a:off x="274320" y="2432304"/>
-            <a:ext cx="1463040" cy="320040"/>
-          </a:xfrm>
-          <a:prstGeom prst="rect">
-            <a:avLst/>
-          </a:prstGeom>
-          <a:noFill/>
-        </p:spPr>
-        <p:txBody>
-          <a:bodyPr wrap="square">
-            <a:spAutoFit/>
-          </a:bodyPr>
-          <a:lstStyle/>
-          <a:p>
-            <a:pPr algn="ctr"/>
-            <a:r>
-              <a:rPr sz="1100" b="1" i="0">
-                <a:solidFill>
-                  <a:srgbClr val="FFFFFF"/>
-                </a:solidFill>
-                <a:latin typeface="Calibri"/>
-              </a:rPr>
-              <a:t>フェーズ 3</a:t>
-            </a:r>
-          </a:p>
-        </p:txBody>
-      </p:sp>
-      <p:sp>
-        <p:nvSpPr>
-          <p:cNvPr id="17" name="TextBox 16"/>
-          <p:cNvSpPr txBox="1"/>
-          <p:nvPr/>
-        </p:nvSpPr>
-        <p:spPr>
-          <a:xfrm>
-            <a:off x="274320" y="2724912"/>
-            <a:ext cx="1463040" cy="301752"/>
-          </a:xfrm>
-          <a:prstGeom prst="rect">
-            <a:avLst/>
-          </a:prstGeom>
-          <a:noFill/>
-        </p:spPr>
-        <p:txBody>
-          <a:bodyPr wrap="square">
-            <a:spAutoFit/>
-          </a:bodyPr>
-          <a:lstStyle/>
-          <a:p>
-            <a:pPr algn="ctr"/>
-            <a:r>
-              <a:rPr sz="1000" b="0" i="0">
-                <a:solidFill>
-                  <a:srgbClr val="FFFFFF"/>
-                </a:solidFill>
-                <a:latin typeface="Calibri"/>
-              </a:rPr>
-              <a:t>6〜7ヶ月</a:t>
-            </a:r>
-          </a:p>
-        </p:txBody>
-      </p:sp>
-      <p:sp>
-        <p:nvSpPr>
-          <p:cNvPr id="18" name="Rectangle 17"/>
+          <p:cNvPr id="18" name="TextBox 17"/>
+          <p:cNvSpPr txBox="1"/>
+          <p:nvPr/>
+        </p:nvSpPr>
+        <p:spPr>
+          <a:xfrm>
+            <a:off x="4892040" y="868680"/>
+            <a:ext cx="3977639" cy="457200"/>
+          </a:xfrm>
+          <a:prstGeom prst="rect">
+            <a:avLst/>
+          </a:prstGeom>
+          <a:noFill/>
+        </p:spPr>
+        <p:txBody>
+          <a:bodyPr wrap="square">
+            <a:spAutoFit/>
+          </a:bodyPr>
+          <a:lstStyle/>
+          <a:p>
+            <a:pPr algn="ctr"/>
+            <a:r>
+              <a:rPr sz="1400" b="1">
+                <a:solidFill>
+                  <a:srgbClr val="16A34A"/>
+                </a:solidFill>
+                <a:latin typeface="Calibri"/>
+              </a:rPr>
+              <a:t>新システム（自社開発）</a:t>
+            </a:r>
+          </a:p>
+        </p:txBody>
+      </p:sp>
+      <p:sp>
+        <p:nvSpPr>
+          <p:cNvPr id="19" name="Rectangle 18"/>
           <p:cNvSpPr/>
           <p:nvPr/>
         </p:nvSpPr>
         <p:spPr>
           <a:xfrm>
-            <a:off x="1828800" y="2395728"/>
-            <a:ext cx="7040880" cy="658368"/>
+            <a:off x="5120640" y="1463040"/>
+            <a:ext cx="3520440" cy="621792"/>
           </a:xfrm>
           <a:prstGeom prst="rect">
             <a:avLst/>
           </a:prstGeom>
           <a:solidFill>
-            <a:srgbClr val="F5F7FA"/>
+            <a:srgbClr val="FFFFFF"/>
           </a:solidFill>
-          <a:ln w="6350">
+          <a:ln w="9525">
             <a:solidFill>
-              <a:srgbClr val="E2E8F0"/>
+              <a:srgbClr val="86EFAC"/>
             </a:solidFill>
           </a:ln>
         </p:spPr>
@@ -7449,14 +7866,14 @@
       </p:sp>
       <p:sp>
         <p:nvSpPr>
-          <p:cNvPr id="19" name="TextBox 18"/>
-          <p:cNvSpPr txBox="1"/>
-          <p:nvPr/>
-        </p:nvSpPr>
-        <p:spPr>
-          <a:xfrm>
-            <a:off x="1965960" y="2532888"/>
-            <a:ext cx="6766560" cy="411480"/>
+          <p:cNvPr id="20" name="TextBox 19"/>
+          <p:cNvSpPr txBox="1"/>
+          <p:nvPr/>
+        </p:nvSpPr>
+        <p:spPr>
+          <a:xfrm>
+            <a:off x="5257800" y="1572768"/>
+            <a:ext cx="1645920" cy="411480"/>
           </a:xfrm>
           <a:prstGeom prst="rect">
             <a:avLst/>
@@ -7471,36 +7888,73 @@
           <a:p>
             <a:pPr algn="l"/>
             <a:r>
-              <a:rPr sz="1400" b="0" i="0">
-                <a:solidFill>
-                  <a:srgbClr val="1A1A2E"/>
-                </a:solidFill>
-                <a:latin typeface="Calibri"/>
-              </a:rPr>
-              <a:t>予約・顧客管理機能の開発</a:t>
-            </a:r>
-          </a:p>
-        </p:txBody>
-      </p:sp>
-      <p:sp>
-        <p:nvSpPr>
-          <p:cNvPr id="20" name="Rectangle 19"/>
+              <a:rPr sz="1200" b="0">
+                <a:solidFill>
+                  <a:srgbClr val="334155"/>
+                </a:solidFill>
+                <a:latin typeface="Calibri"/>
+              </a:rPr>
+              <a:t>開発費</a:t>
+            </a:r>
+          </a:p>
+        </p:txBody>
+      </p:sp>
+      <p:sp>
+        <p:nvSpPr>
+          <p:cNvPr id="21" name="TextBox 20"/>
+          <p:cNvSpPr txBox="1"/>
+          <p:nvPr/>
+        </p:nvSpPr>
+        <p:spPr>
+          <a:xfrm>
+            <a:off x="6720840" y="1554480"/>
+            <a:ext cx="1783080" cy="438912"/>
+          </a:xfrm>
+          <a:prstGeom prst="rect">
+            <a:avLst/>
+          </a:prstGeom>
+          <a:noFill/>
+        </p:spPr>
+        <p:txBody>
+          <a:bodyPr wrap="square">
+            <a:spAutoFit/>
+          </a:bodyPr>
+          <a:lstStyle/>
+          <a:p>
+            <a:pPr algn="r"/>
+            <a:r>
+              <a:rPr sz="1300" b="1">
+                <a:solidFill>
+                  <a:srgbClr val="16A34A"/>
+                </a:solidFill>
+                <a:latin typeface="Calibri"/>
+              </a:rPr>
+              <a:t>一度のみ（要見積）</a:t>
+            </a:r>
+          </a:p>
+        </p:txBody>
+      </p:sp>
+      <p:sp>
+        <p:nvSpPr>
+          <p:cNvPr id="22" name="Rectangle 21"/>
           <p:cNvSpPr/>
           <p:nvPr/>
         </p:nvSpPr>
         <p:spPr>
           <a:xfrm>
-            <a:off x="274320" y="3191256"/>
-            <a:ext cx="1463040" cy="658368"/>
+            <a:off x="5120640" y="2267712"/>
+            <a:ext cx="3520440" cy="621792"/>
           </a:xfrm>
           <a:prstGeom prst="rect">
             <a:avLst/>
           </a:prstGeom>
           <a:solidFill>
-            <a:srgbClr val="7C3AED"/>
+            <a:srgbClr val="FFFFFF"/>
           </a:solidFill>
-          <a:ln>
-            <a:noFill/>
+          <a:ln w="9525">
+            <a:solidFill>
+              <a:srgbClr val="86EFAC"/>
+            </a:solidFill>
           </a:ln>
         </p:spPr>
         <p:style>
@@ -7527,94 +7981,94 @@
       </p:sp>
       <p:sp>
         <p:nvSpPr>
-          <p:cNvPr id="21" name="TextBox 20"/>
-          <p:cNvSpPr txBox="1"/>
-          <p:nvPr/>
-        </p:nvSpPr>
-        <p:spPr>
-          <a:xfrm>
-            <a:off x="274320" y="3227832"/>
-            <a:ext cx="1463040" cy="320040"/>
-          </a:xfrm>
-          <a:prstGeom prst="rect">
-            <a:avLst/>
-          </a:prstGeom>
-          <a:noFill/>
-        </p:spPr>
-        <p:txBody>
-          <a:bodyPr wrap="square">
-            <a:spAutoFit/>
-          </a:bodyPr>
-          <a:lstStyle/>
-          <a:p>
-            <a:pPr algn="ctr"/>
-            <a:r>
-              <a:rPr sz="1100" b="1" i="0">
-                <a:solidFill>
-                  <a:srgbClr val="FFFFFF"/>
-                </a:solidFill>
-                <a:latin typeface="Calibri"/>
-              </a:rPr>
-              <a:t>フェーズ 4</a:t>
-            </a:r>
-          </a:p>
-        </p:txBody>
-      </p:sp>
-      <p:sp>
-        <p:nvSpPr>
-          <p:cNvPr id="22" name="TextBox 21"/>
-          <p:cNvSpPr txBox="1"/>
-          <p:nvPr/>
-        </p:nvSpPr>
-        <p:spPr>
-          <a:xfrm>
-            <a:off x="274320" y="3520439"/>
-            <a:ext cx="1463040" cy="301752"/>
-          </a:xfrm>
-          <a:prstGeom prst="rect">
-            <a:avLst/>
-          </a:prstGeom>
-          <a:noFill/>
-        </p:spPr>
-        <p:txBody>
-          <a:bodyPr wrap="square">
-            <a:spAutoFit/>
-          </a:bodyPr>
-          <a:lstStyle/>
-          <a:p>
-            <a:pPr algn="ctr"/>
-            <a:r>
-              <a:rPr sz="1000" b="0" i="0">
-                <a:solidFill>
-                  <a:srgbClr val="FFFFFF"/>
-                </a:solidFill>
-                <a:latin typeface="Calibri"/>
-              </a:rPr>
-              <a:t>8ヶ月</a:t>
-            </a:r>
-          </a:p>
-        </p:txBody>
-      </p:sp>
-      <p:sp>
-        <p:nvSpPr>
-          <p:cNvPr id="23" name="Rectangle 22"/>
+          <p:cNvPr id="23" name="TextBox 22"/>
+          <p:cNvSpPr txBox="1"/>
+          <p:nvPr/>
+        </p:nvSpPr>
+        <p:spPr>
+          <a:xfrm>
+            <a:off x="5257800" y="2377440"/>
+            <a:ext cx="1645920" cy="411480"/>
+          </a:xfrm>
+          <a:prstGeom prst="rect">
+            <a:avLst/>
+          </a:prstGeom>
+          <a:noFill/>
+        </p:spPr>
+        <p:txBody>
+          <a:bodyPr wrap="square">
+            <a:spAutoFit/>
+          </a:bodyPr>
+          <a:lstStyle/>
+          <a:p>
+            <a:pPr algn="l"/>
+            <a:r>
+              <a:rPr sz="1200" b="0">
+                <a:solidFill>
+                  <a:srgbClr val="334155"/>
+                </a:solidFill>
+                <a:latin typeface="Calibri"/>
+              </a:rPr>
+              <a:t>月額費用</a:t>
+            </a:r>
+          </a:p>
+        </p:txBody>
+      </p:sp>
+      <p:sp>
+        <p:nvSpPr>
+          <p:cNvPr id="24" name="TextBox 23"/>
+          <p:cNvSpPr txBox="1"/>
+          <p:nvPr/>
+        </p:nvSpPr>
+        <p:spPr>
+          <a:xfrm>
+            <a:off x="6720840" y="2359152"/>
+            <a:ext cx="1783080" cy="438912"/>
+          </a:xfrm>
+          <a:prstGeom prst="rect">
+            <a:avLst/>
+          </a:prstGeom>
+          <a:noFill/>
+        </p:spPr>
+        <p:txBody>
+          <a:bodyPr wrap="square">
+            <a:spAutoFit/>
+          </a:bodyPr>
+          <a:lstStyle/>
+          <a:p>
+            <a:pPr algn="r"/>
+            <a:r>
+              <a:rPr sz="1300" b="1">
+                <a:solidFill>
+                  <a:srgbClr val="16A34A"/>
+                </a:solidFill>
+                <a:latin typeface="Calibri"/>
+              </a:rPr>
+              <a:t>サーバー代のみ</a:t>
+            </a:r>
+          </a:p>
+        </p:txBody>
+      </p:sp>
+      <p:sp>
+        <p:nvSpPr>
+          <p:cNvPr id="25" name="Rectangle 24"/>
           <p:cNvSpPr/>
           <p:nvPr/>
         </p:nvSpPr>
         <p:spPr>
           <a:xfrm>
-            <a:off x="1828800" y="3191256"/>
-            <a:ext cx="7040880" cy="658368"/>
+            <a:off x="5120640" y="3072384"/>
+            <a:ext cx="3520440" cy="621792"/>
           </a:xfrm>
           <a:prstGeom prst="rect">
             <a:avLst/>
           </a:prstGeom>
           <a:solidFill>
-            <a:srgbClr val="F5F7FA"/>
+            <a:srgbClr val="FFFFFF"/>
           </a:solidFill>
-          <a:ln w="6350">
+          <a:ln w="9525">
             <a:solidFill>
-              <a:srgbClr val="E2E8F0"/>
+              <a:srgbClr val="86EFAC"/>
             </a:solidFill>
           </a:ln>
         </p:spPr>
@@ -7642,14 +8096,14 @@
       </p:sp>
       <p:sp>
         <p:nvSpPr>
-          <p:cNvPr id="24" name="TextBox 23"/>
-          <p:cNvSpPr txBox="1"/>
-          <p:nvPr/>
-        </p:nvSpPr>
-        <p:spPr>
-          <a:xfrm>
-            <a:off x="1965960" y="3328415"/>
-            <a:ext cx="6766560" cy="411480"/>
+          <p:cNvPr id="26" name="TextBox 25"/>
+          <p:cNvSpPr txBox="1"/>
+          <p:nvPr/>
+        </p:nvSpPr>
+        <p:spPr>
+          <a:xfrm>
+            <a:off x="5257800" y="3182112"/>
+            <a:ext cx="1645920" cy="411480"/>
           </a:xfrm>
           <a:prstGeom prst="rect">
             <a:avLst/>
@@ -7664,27 +8118,62 @@
           <a:p>
             <a:pPr algn="l"/>
             <a:r>
-              <a:rPr sz="1400" b="0" i="0">
-                <a:solidFill>
-                  <a:srgbClr val="1A1A2E"/>
-                </a:solidFill>
-                <a:latin typeface="Calibri"/>
-              </a:rPr>
-              <a:t>テスト店舗での試験導入（1〜2店舗）</a:t>
-            </a:r>
-          </a:p>
-        </p:txBody>
-      </p:sp>
-      <p:sp>
-        <p:nvSpPr>
-          <p:cNvPr id="25" name="Rectangle 24"/>
+              <a:rPr sz="1200" b="0">
+                <a:solidFill>
+                  <a:srgbClr val="334155"/>
+                </a:solidFill>
+                <a:latin typeface="Calibri"/>
+              </a:rPr>
+              <a:t>回収期間</a:t>
+            </a:r>
+          </a:p>
+        </p:txBody>
+      </p:sp>
+      <p:sp>
+        <p:nvSpPr>
+          <p:cNvPr id="27" name="TextBox 26"/>
+          <p:cNvSpPr txBox="1"/>
+          <p:nvPr/>
+        </p:nvSpPr>
+        <p:spPr>
+          <a:xfrm>
+            <a:off x="6720840" y="3163824"/>
+            <a:ext cx="1783080" cy="438912"/>
+          </a:xfrm>
+          <a:prstGeom prst="rect">
+            <a:avLst/>
+          </a:prstGeom>
+          <a:noFill/>
+        </p:spPr>
+        <p:txBody>
+          <a:bodyPr wrap="square">
+            <a:spAutoFit/>
+          </a:bodyPr>
+          <a:lstStyle/>
+          <a:p>
+            <a:pPr algn="r"/>
+            <a:r>
+              <a:rPr sz="1300" b="1">
+                <a:solidFill>
+                  <a:srgbClr val="16A34A"/>
+                </a:solidFill>
+                <a:latin typeface="Calibri"/>
+              </a:rPr>
+              <a:t>2〜3年で回収見込</a:t>
+            </a:r>
+          </a:p>
+        </p:txBody>
+      </p:sp>
+      <p:sp>
+        <p:nvSpPr>
+          <p:cNvPr id="28" name="Rectangle 27"/>
           <p:cNvSpPr/>
           <p:nvPr/>
         </p:nvSpPr>
         <p:spPr>
           <a:xfrm>
-            <a:off x="274320" y="3986784"/>
-            <a:ext cx="1463040" cy="658368"/>
+            <a:off x="274320" y="4617720"/>
+            <a:ext cx="8595360" cy="411480"/>
           </a:xfrm>
           <a:prstGeom prst="rect">
             <a:avLst/>
@@ -7720,150 +8209,35 @@
       </p:sp>
       <p:sp>
         <p:nvSpPr>
-          <p:cNvPr id="26" name="TextBox 25"/>
-          <p:cNvSpPr txBox="1"/>
-          <p:nvPr/>
-        </p:nvSpPr>
-        <p:spPr>
-          <a:xfrm>
-            <a:off x="274320" y="4023360"/>
-            <a:ext cx="1463040" cy="320040"/>
-          </a:xfrm>
-          <a:prstGeom prst="rect">
-            <a:avLst/>
-          </a:prstGeom>
-          <a:noFill/>
-        </p:spPr>
-        <p:txBody>
-          <a:bodyPr wrap="square">
-            <a:spAutoFit/>
-          </a:bodyPr>
-          <a:lstStyle/>
-          <a:p>
-            <a:pPr algn="ctr"/>
-            <a:r>
-              <a:rPr sz="1100" b="1" i="0">
+          <p:cNvPr id="29" name="TextBox 28"/>
+          <p:cNvSpPr txBox="1"/>
+          <p:nvPr/>
+        </p:nvSpPr>
+        <p:spPr>
+          <a:xfrm>
+            <a:off x="274320" y="4617720"/>
+            <a:ext cx="8595360" cy="411480"/>
+          </a:xfrm>
+          <a:prstGeom prst="rect">
+            <a:avLst/>
+          </a:prstGeom>
+          <a:noFill/>
+        </p:spPr>
+        <p:txBody>
+          <a:bodyPr wrap="square">
+            <a:spAutoFit/>
+          </a:bodyPr>
+          <a:lstStyle/>
+          <a:p>
+            <a:pPr algn="ctr"/>
+            <a:r>
+              <a:rPr sz="1300" b="1">
                 <a:solidFill>
                   <a:srgbClr val="FFFFFF"/>
                 </a:solidFill>
                 <a:latin typeface="Calibri"/>
               </a:rPr>
-              <a:t>フェーズ 5</a:t>
-            </a:r>
-          </a:p>
-        </p:txBody>
-      </p:sp>
-      <p:sp>
-        <p:nvSpPr>
-          <p:cNvPr id="27" name="TextBox 26"/>
-          <p:cNvSpPr txBox="1"/>
-          <p:nvPr/>
-        </p:nvSpPr>
-        <p:spPr>
-          <a:xfrm>
-            <a:off x="274320" y="4315968"/>
-            <a:ext cx="1463040" cy="301752"/>
-          </a:xfrm>
-          <a:prstGeom prst="rect">
-            <a:avLst/>
-          </a:prstGeom>
-          <a:noFill/>
-        </p:spPr>
-        <p:txBody>
-          <a:bodyPr wrap="square">
-            <a:spAutoFit/>
-          </a:bodyPr>
-          <a:lstStyle/>
-          <a:p>
-            <a:pPr algn="ctr"/>
-            <a:r>
-              <a:rPr sz="1000" b="0" i="0">
-                <a:solidFill>
-                  <a:srgbClr val="FFFFFF"/>
-                </a:solidFill>
-                <a:latin typeface="Calibri"/>
-              </a:rPr>
-              <a:t>9〜12ヶ月</a:t>
-            </a:r>
-          </a:p>
-        </p:txBody>
-      </p:sp>
-      <p:sp>
-        <p:nvSpPr>
-          <p:cNvPr id="28" name="Rectangle 27"/>
-          <p:cNvSpPr/>
-          <p:nvPr/>
-        </p:nvSpPr>
-        <p:spPr>
-          <a:xfrm>
-            <a:off x="1828800" y="3986784"/>
-            <a:ext cx="7040880" cy="658368"/>
-          </a:xfrm>
-          <a:prstGeom prst="rect">
-            <a:avLst/>
-          </a:prstGeom>
-          <a:solidFill>
-            <a:srgbClr val="F5F7FA"/>
-          </a:solidFill>
-          <a:ln w="6350">
-            <a:solidFill>
-              <a:srgbClr val="E2E8F0"/>
-            </a:solidFill>
-          </a:ln>
-        </p:spPr>
-        <p:style>
-          <a:lnRef idx="1">
-            <a:schemeClr val="accent1"/>
-          </a:lnRef>
-          <a:fillRef idx="3">
-            <a:schemeClr val="accent1"/>
-          </a:fillRef>
-          <a:effectRef idx="2">
-            <a:schemeClr val="accent1"/>
-          </a:effectRef>
-          <a:fontRef idx="minor">
-            <a:schemeClr val="lt1"/>
-          </a:fontRef>
-        </p:style>
-        <p:txBody>
-          <a:bodyPr rtlCol="0" anchor="ctr"/>
-          <a:lstStyle/>
-          <a:p>
-            <a:pPr algn="ctr"/>
-          </a:p>
-        </p:txBody>
-      </p:sp>
-      <p:sp>
-        <p:nvSpPr>
-          <p:cNvPr id="29" name="TextBox 28"/>
-          <p:cNvSpPr txBox="1"/>
-          <p:nvPr/>
-        </p:nvSpPr>
-        <p:spPr>
-          <a:xfrm>
-            <a:off x="1965960" y="4123944"/>
-            <a:ext cx="6766560" cy="411480"/>
-          </a:xfrm>
-          <a:prstGeom prst="rect">
-            <a:avLst/>
-          </a:prstGeom>
-          <a:noFill/>
-        </p:spPr>
-        <p:txBody>
-          <a:bodyPr wrap="square">
-            <a:spAutoFit/>
-          </a:bodyPr>
-          <a:lstStyle/>
-          <a:p>
-            <a:pPr algn="l"/>
-            <a:r>
-              <a:rPr sz="1400" b="0" i="0">
-                <a:solidFill>
-                  <a:srgbClr val="1A1A2E"/>
-                </a:solidFill>
-                <a:latin typeface="Calibri"/>
-              </a:rPr>
-              <a:t>全70店舗への順次展開</a:t>
+              <a:t>長期的に年間350万円以上のコスト削減ポテンシャル</a:t>
             </a:r>
           </a:p>
         </p:txBody>
@@ -7944,7 +8318,7 @@
             <a:avLst/>
           </a:prstGeom>
           <a:solidFill>
-            <a:srgbClr val="0D9488"/>
+            <a:srgbClr val="1E3A5F"/>
           </a:solidFill>
           <a:ln>
             <a:noFill/>
@@ -7996,13 +8370,13 @@
           <a:p>
             <a:pPr algn="l"/>
             <a:r>
-              <a:rPr sz="2000" b="1" i="0">
+              <a:rPr sz="2200" b="1">
                 <a:solidFill>
                   <a:srgbClr val="FFFFFF"/>
                 </a:solidFill>
                 <a:latin typeface="Calibri"/>
               </a:rPr>
-              <a:t>本日の打ち合わせ  —  確認したいこと</a:t>
+              <a:t>開発スケジュール（案）</a:t>
             </a:r>
           </a:p>
         </p:txBody>
@@ -8016,18 +8390,16 @@
         <p:spPr>
           <a:xfrm>
             <a:off x="274320" y="804672"/>
-            <a:ext cx="4160520" cy="1965960"/>
+            <a:ext cx="1463040" cy="658368"/>
           </a:xfrm>
           <a:prstGeom prst="rect">
             <a:avLst/>
           </a:prstGeom>
           <a:solidFill>
-            <a:srgbClr val="EBF5FB"/>
+            <a:srgbClr val="16A34A"/>
           </a:solidFill>
-          <a:ln w="6350">
-            <a:solidFill>
-              <a:srgbClr val="BFDBFE"/>
-            </a:solidFill>
+          <a:ln>
+            <a:noFill/>
           </a:ln>
         </p:spPr>
         <p:style>
@@ -8060,29 +8432,29 @@
         </p:nvSpPr>
         <p:spPr>
           <a:xfrm>
-            <a:off x="457200" y="896112"/>
-            <a:ext cx="3840480" cy="384048"/>
-          </a:xfrm>
-          <a:prstGeom prst="rect">
-            <a:avLst/>
-          </a:prstGeom>
-          <a:noFill/>
-        </p:spPr>
-        <p:txBody>
-          <a:bodyPr wrap="square">
-            <a:spAutoFit/>
-          </a:bodyPr>
-          <a:lstStyle/>
-          <a:p>
-            <a:pPr algn="l"/>
-            <a:r>
-              <a:rPr sz="1300" b="1" i="0">
-                <a:solidFill>
-                  <a:srgbClr val="1E3A5F"/>
-                </a:solidFill>
-                <a:latin typeface="Calibri"/>
-              </a:rPr>
-              <a:t>■  業務フロー</a:t>
+            <a:off x="274320" y="841248"/>
+            <a:ext cx="1463040" cy="320040"/>
+          </a:xfrm>
+          <a:prstGeom prst="rect">
+            <a:avLst/>
+          </a:prstGeom>
+          <a:noFill/>
+        </p:spPr>
+        <p:txBody>
+          <a:bodyPr wrap="square">
+            <a:spAutoFit/>
+          </a:bodyPr>
+          <a:lstStyle/>
+          <a:p>
+            <a:pPr algn="ctr"/>
+            <a:r>
+              <a:rPr sz="1100" b="1">
+                <a:solidFill>
+                  <a:srgbClr val="FFFFFF"/>
+                </a:solidFill>
+                <a:latin typeface="Calibri"/>
+              </a:rPr>
+              <a:t>フェーズ 1</a:t>
             </a:r>
           </a:p>
         </p:txBody>
@@ -8095,88 +8467,53 @@
         </p:nvSpPr>
         <p:spPr>
           <a:xfrm>
-            <a:off x="457200" y="1371600"/>
-            <a:ext cx="3886200" cy="566928"/>
-          </a:xfrm>
-          <a:prstGeom prst="rect">
-            <a:avLst/>
-          </a:prstGeom>
-          <a:noFill/>
-        </p:spPr>
-        <p:txBody>
-          <a:bodyPr wrap="square">
-            <a:spAutoFit/>
-          </a:bodyPr>
-          <a:lstStyle/>
-          <a:p>
-            <a:pPr algn="l"/>
-            <a:r>
-              <a:rPr sz="1200" b="0" i="0">
-                <a:solidFill>
-                  <a:srgbClr val="334155"/>
-                </a:solidFill>
-                <a:latin typeface="Calibri"/>
-              </a:rPr>
-              <a:t>▶  1日の業務の流れ（来店〜退店）</a:t>
-            </a:r>
-          </a:p>
-        </p:txBody>
-      </p:sp>
-      <p:sp>
-        <p:nvSpPr>
-          <p:cNvPr id="8" name="TextBox 7"/>
-          <p:cNvSpPr txBox="1"/>
-          <p:nvPr/>
-        </p:nvSpPr>
-        <p:spPr>
-          <a:xfrm>
-            <a:off x="457200" y="1993392"/>
-            <a:ext cx="3886200" cy="566928"/>
-          </a:xfrm>
-          <a:prstGeom prst="rect">
-            <a:avLst/>
-          </a:prstGeom>
-          <a:noFill/>
-        </p:spPr>
-        <p:txBody>
-          <a:bodyPr wrap="square">
-            <a:spAutoFit/>
-          </a:bodyPr>
-          <a:lstStyle/>
-          <a:p>
-            <a:pPr algn="l"/>
-            <a:r>
-              <a:rPr sz="1200" b="0" i="0">
-                <a:solidFill>
-                  <a:srgbClr val="334155"/>
-                </a:solidFill>
-                <a:latin typeface="Calibri"/>
-              </a:rPr>
-              <a:t>▶  紙・Excelで管理していることは？</a:t>
-            </a:r>
-          </a:p>
-        </p:txBody>
-      </p:sp>
-      <p:sp>
-        <p:nvSpPr>
-          <p:cNvPr id="9" name="Rectangle 8"/>
+            <a:off x="274320" y="1133856"/>
+            <a:ext cx="1463040" cy="301752"/>
+          </a:xfrm>
+          <a:prstGeom prst="rect">
+            <a:avLst/>
+          </a:prstGeom>
+          <a:noFill/>
+        </p:spPr>
+        <p:txBody>
+          <a:bodyPr wrap="square">
+            <a:spAutoFit/>
+          </a:bodyPr>
+          <a:lstStyle/>
+          <a:p>
+            <a:pPr algn="ctr"/>
+            <a:r>
+              <a:rPr sz="1000" b="0">
+                <a:solidFill>
+                  <a:srgbClr val="FFFFFF"/>
+                </a:solidFill>
+                <a:latin typeface="Calibri"/>
+              </a:rPr>
+              <a:t>完了済み</a:t>
+            </a:r>
+          </a:p>
+        </p:txBody>
+      </p:sp>
+      <p:sp>
+        <p:nvSpPr>
+          <p:cNvPr id="8" name="Rectangle 7"/>
           <p:cNvSpPr/>
           <p:nvPr/>
         </p:nvSpPr>
         <p:spPr>
           <a:xfrm>
-            <a:off x="4800600" y="804672"/>
-            <a:ext cx="4160520" cy="1965960"/>
+            <a:off x="1828800" y="804672"/>
+            <a:ext cx="7040880" cy="658368"/>
           </a:xfrm>
           <a:prstGeom prst="rect">
             <a:avLst/>
           </a:prstGeom>
           <a:solidFill>
-            <a:srgbClr val="EBF5FB"/>
+            <a:srgbClr val="16A34A"/>
           </a:solidFill>
-          <a:ln w="6350">
+          <a:ln w="9525">
             <a:solidFill>
-              <a:srgbClr val="BFDBFE"/>
+              <a:srgbClr val="16A34A"/>
             </a:solidFill>
           </a:ln>
         </p:spPr>
@@ -8204,14 +8541,14 @@
       </p:sp>
       <p:sp>
         <p:nvSpPr>
-          <p:cNvPr id="10" name="TextBox 9"/>
-          <p:cNvSpPr txBox="1"/>
-          <p:nvPr/>
-        </p:nvSpPr>
-        <p:spPr>
-          <a:xfrm>
-            <a:off x="4983480" y="896112"/>
-            <a:ext cx="3840480" cy="384048"/>
+          <p:cNvPr id="9" name="TextBox 8"/>
+          <p:cNvSpPr txBox="1"/>
+          <p:nvPr/>
+        </p:nvSpPr>
+        <p:spPr>
+          <a:xfrm>
+            <a:off x="1965960" y="941832"/>
+            <a:ext cx="6766560" cy="411480"/>
           </a:xfrm>
           <a:prstGeom prst="rect">
             <a:avLst/>
@@ -8226,108 +8563,36 @@
           <a:p>
             <a:pPr algn="l"/>
             <a:r>
-              <a:rPr sz="1300" b="1" i="0">
-                <a:solidFill>
-                  <a:srgbClr val="1E3A5F"/>
-                </a:solidFill>
-                <a:latin typeface="Calibri"/>
-              </a:rPr>
-              <a:t>■  現行システムの不満</a:t>
-            </a:r>
-          </a:p>
-        </p:txBody>
-      </p:sp>
-      <p:sp>
-        <p:nvSpPr>
-          <p:cNvPr id="11" name="TextBox 10"/>
-          <p:cNvSpPr txBox="1"/>
-          <p:nvPr/>
-        </p:nvSpPr>
-        <p:spPr>
-          <a:xfrm>
-            <a:off x="4983480" y="1371600"/>
-            <a:ext cx="3886200" cy="566928"/>
-          </a:xfrm>
-          <a:prstGeom prst="rect">
-            <a:avLst/>
-          </a:prstGeom>
-          <a:noFill/>
-        </p:spPr>
-        <p:txBody>
-          <a:bodyPr wrap="square">
-            <a:spAutoFit/>
-          </a:bodyPr>
-          <a:lstStyle/>
-          <a:p>
-            <a:pPr algn="l"/>
-            <a:r>
-              <a:rPr sz="1200" b="0" i="0">
-                <a:solidFill>
-                  <a:srgbClr val="334155"/>
-                </a:solidFill>
-                <a:latin typeface="Calibri"/>
-              </a:rPr>
-              <a:t>▶  VitaminCで一番困っていることは？</a:t>
-            </a:r>
-          </a:p>
-        </p:txBody>
-      </p:sp>
-      <p:sp>
-        <p:nvSpPr>
-          <p:cNvPr id="12" name="TextBox 11"/>
-          <p:cNvSpPr txBox="1"/>
-          <p:nvPr/>
-        </p:nvSpPr>
-        <p:spPr>
-          <a:xfrm>
-            <a:off x="4983480" y="1993392"/>
-            <a:ext cx="3886200" cy="566928"/>
-          </a:xfrm>
-          <a:prstGeom prst="rect">
-            <a:avLst/>
-          </a:prstGeom>
-          <a:noFill/>
-        </p:spPr>
-        <p:txBody>
-          <a:bodyPr wrap="square">
-            <a:spAutoFit/>
-          </a:bodyPr>
-          <a:lstStyle/>
-          <a:p>
-            <a:pPr algn="l"/>
-            <a:r>
-              <a:rPr sz="1200" b="0" i="0">
-                <a:solidFill>
-                  <a:srgbClr val="334155"/>
-                </a:solidFill>
-                <a:latin typeface="Calibri"/>
-              </a:rPr>
-              <a:t>▶  欲しいのに今できない機能は？</a:t>
-            </a:r>
-          </a:p>
-        </p:txBody>
-      </p:sp>
-      <p:sp>
-        <p:nvSpPr>
-          <p:cNvPr id="13" name="Rectangle 12"/>
+              <a:rPr sz="1300" b="1">
+                <a:solidFill>
+                  <a:srgbClr val="FFFFFF"/>
+                </a:solidFill>
+                <a:latin typeface="Calibri"/>
+              </a:rPr>
+              <a:t>✅ 要件定義・コアエンジン開発（会計/予約/スタッフ管理）</a:t>
+            </a:r>
+          </a:p>
+        </p:txBody>
+      </p:sp>
+      <p:sp>
+        <p:nvSpPr>
+          <p:cNvPr id="10" name="Rectangle 9"/>
           <p:cNvSpPr/>
           <p:nvPr/>
         </p:nvSpPr>
         <p:spPr>
           <a:xfrm>
-            <a:off x="274320" y="2907791"/>
-            <a:ext cx="4160520" cy="1965960"/>
+            <a:off x="274320" y="1600200"/>
+            <a:ext cx="1463040" cy="658368"/>
           </a:xfrm>
           <a:prstGeom prst="rect">
             <a:avLst/>
           </a:prstGeom>
           <a:solidFill>
-            <a:srgbClr val="EBF5FB"/>
+            <a:srgbClr val="0891B2"/>
           </a:solidFill>
-          <a:ln w="6350">
-            <a:solidFill>
-              <a:srgbClr val="BFDBFE"/>
-            </a:solidFill>
+          <a:ln>
+            <a:noFill/>
           </a:ln>
         </p:spPr>
         <p:style>
@@ -8354,129 +8619,94 @@
       </p:sp>
       <p:sp>
         <p:nvSpPr>
-          <p:cNvPr id="14" name="TextBox 13"/>
-          <p:cNvSpPr txBox="1"/>
-          <p:nvPr/>
-        </p:nvSpPr>
-        <p:spPr>
-          <a:xfrm>
-            <a:off x="457200" y="2999232"/>
-            <a:ext cx="3840480" cy="384048"/>
-          </a:xfrm>
-          <a:prstGeom prst="rect">
-            <a:avLst/>
-          </a:prstGeom>
-          <a:noFill/>
-        </p:spPr>
-        <p:txBody>
-          <a:bodyPr wrap="square">
-            <a:spAutoFit/>
-          </a:bodyPr>
-          <a:lstStyle/>
-          <a:p>
-            <a:pPr algn="l"/>
-            <a:r>
-              <a:rPr sz="1300" b="1" i="0">
-                <a:solidFill>
-                  <a:srgbClr val="1E3A5F"/>
-                </a:solidFill>
-                <a:latin typeface="Calibri"/>
-              </a:rPr>
-              <a:t>■  優先機能・規模</a:t>
-            </a:r>
-          </a:p>
-        </p:txBody>
-      </p:sp>
-      <p:sp>
-        <p:nvSpPr>
-          <p:cNvPr id="15" name="TextBox 14"/>
-          <p:cNvSpPr txBox="1"/>
-          <p:nvPr/>
-        </p:nvSpPr>
-        <p:spPr>
-          <a:xfrm>
-            <a:off x="457200" y="3474720"/>
-            <a:ext cx="3886200" cy="566928"/>
-          </a:xfrm>
-          <a:prstGeom prst="rect">
-            <a:avLst/>
-          </a:prstGeom>
-          <a:noFill/>
-        </p:spPr>
-        <p:txBody>
-          <a:bodyPr wrap="square">
-            <a:spAutoFit/>
-          </a:bodyPr>
-          <a:lstStyle/>
-          <a:p>
-            <a:pPr algn="l"/>
-            <a:r>
-              <a:rPr sz="1200" b="0" i="0">
-                <a:solidFill>
-                  <a:srgbClr val="334155"/>
-                </a:solidFill>
-                <a:latin typeface="Calibri"/>
-              </a:rPr>
-              <a:t>▶  まず使いたい機能のTOP3は？</a:t>
-            </a:r>
-          </a:p>
-        </p:txBody>
-      </p:sp>
-      <p:sp>
-        <p:nvSpPr>
-          <p:cNvPr id="16" name="TextBox 15"/>
-          <p:cNvSpPr txBox="1"/>
-          <p:nvPr/>
-        </p:nvSpPr>
-        <p:spPr>
-          <a:xfrm>
-            <a:off x="457200" y="4096511"/>
-            <a:ext cx="3886200" cy="566928"/>
-          </a:xfrm>
-          <a:prstGeom prst="rect">
-            <a:avLst/>
-          </a:prstGeom>
-          <a:noFill/>
-        </p:spPr>
-        <p:txBody>
-          <a:bodyPr wrap="square">
-            <a:spAutoFit/>
-          </a:bodyPr>
-          <a:lstStyle/>
-          <a:p>
-            <a:pPr algn="l"/>
-            <a:r>
-              <a:rPr sz="1200" b="0" i="0">
-                <a:solidFill>
-                  <a:srgbClr val="334155"/>
-                </a:solidFill>
-                <a:latin typeface="Calibri"/>
-              </a:rPr>
-              <a:t>▶  試験導入できる店舗はある？</a:t>
-            </a:r>
-          </a:p>
-        </p:txBody>
-      </p:sp>
-      <p:sp>
-        <p:nvSpPr>
-          <p:cNvPr id="17" name="Rectangle 16"/>
+          <p:cNvPr id="11" name="TextBox 10"/>
+          <p:cNvSpPr txBox="1"/>
+          <p:nvPr/>
+        </p:nvSpPr>
+        <p:spPr>
+          <a:xfrm>
+            <a:off x="274320" y="1636776"/>
+            <a:ext cx="1463040" cy="320040"/>
+          </a:xfrm>
+          <a:prstGeom prst="rect">
+            <a:avLst/>
+          </a:prstGeom>
+          <a:noFill/>
+        </p:spPr>
+        <p:txBody>
+          <a:bodyPr wrap="square">
+            <a:spAutoFit/>
+          </a:bodyPr>
+          <a:lstStyle/>
+          <a:p>
+            <a:pPr algn="ctr"/>
+            <a:r>
+              <a:rPr sz="1100" b="1">
+                <a:solidFill>
+                  <a:srgbClr val="FFFFFF"/>
+                </a:solidFill>
+                <a:latin typeface="Calibri"/>
+              </a:rPr>
+              <a:t>フェーズ 2</a:t>
+            </a:r>
+          </a:p>
+        </p:txBody>
+      </p:sp>
+      <p:sp>
+        <p:nvSpPr>
+          <p:cNvPr id="12" name="TextBox 11"/>
+          <p:cNvSpPr txBox="1"/>
+          <p:nvPr/>
+        </p:nvSpPr>
+        <p:spPr>
+          <a:xfrm>
+            <a:off x="274320" y="1929384"/>
+            <a:ext cx="1463040" cy="301752"/>
+          </a:xfrm>
+          <a:prstGeom prst="rect">
+            <a:avLst/>
+          </a:prstGeom>
+          <a:noFill/>
+        </p:spPr>
+        <p:txBody>
+          <a:bodyPr wrap="square">
+            <a:spAutoFit/>
+          </a:bodyPr>
+          <a:lstStyle/>
+          <a:p>
+            <a:pPr algn="ctr"/>
+            <a:r>
+              <a:rPr sz="1000" b="0">
+                <a:solidFill>
+                  <a:srgbClr val="FFFFFF"/>
+                </a:solidFill>
+                <a:latin typeface="Calibri"/>
+              </a:rPr>
+              <a:t>3〜4ヶ月</a:t>
+            </a:r>
+          </a:p>
+        </p:txBody>
+      </p:sp>
+      <p:sp>
+        <p:nvSpPr>
+          <p:cNvPr id="13" name="Rectangle 12"/>
           <p:cNvSpPr/>
           <p:nvPr/>
         </p:nvSpPr>
         <p:spPr>
           <a:xfrm>
-            <a:off x="4800600" y="2907791"/>
-            <a:ext cx="4160520" cy="1965960"/>
+            <a:off x="1828800" y="1600200"/>
+            <a:ext cx="7040880" cy="658368"/>
           </a:xfrm>
           <a:prstGeom prst="rect">
             <a:avLst/>
           </a:prstGeom>
           <a:solidFill>
-            <a:srgbClr val="EBF5FB"/>
+            <a:srgbClr val="F5F7FA"/>
           </a:solidFill>
-          <a:ln w="6350">
+          <a:ln w="9525">
             <a:solidFill>
-              <a:srgbClr val="BFDBFE"/>
+              <a:srgbClr val="E2E8F0"/>
             </a:solidFill>
           </a:ln>
         </p:spPr>
@@ -8504,14 +8734,14 @@
       </p:sp>
       <p:sp>
         <p:nvSpPr>
-          <p:cNvPr id="18" name="TextBox 17"/>
-          <p:cNvSpPr txBox="1"/>
-          <p:nvPr/>
-        </p:nvSpPr>
-        <p:spPr>
-          <a:xfrm>
-            <a:off x="4983480" y="2999232"/>
-            <a:ext cx="3840480" cy="384048"/>
+          <p:cNvPr id="14" name="TextBox 13"/>
+          <p:cNvSpPr txBox="1"/>
+          <p:nvPr/>
+        </p:nvSpPr>
+        <p:spPr>
+          <a:xfrm>
+            <a:off x="1965960" y="1737360"/>
+            <a:ext cx="6766560" cy="411480"/>
           </a:xfrm>
           <a:prstGeom prst="rect">
             <a:avLst/>
@@ -8526,14 +8756,172 @@
           <a:p>
             <a:pPr algn="l"/>
             <a:r>
-              <a:rPr sz="1300" b="1" i="0">
-                <a:solidFill>
-                  <a:srgbClr val="1E3A5F"/>
-                </a:solidFill>
-                <a:latin typeface="Calibri"/>
-              </a:rPr>
-              <a:t>■  意思決定・予算</a:t>
-            </a:r>
+              <a:rPr sz="1300" b="0">
+                <a:solidFill>
+                  <a:srgbClr val="1A1A2E"/>
+                </a:solidFill>
+                <a:latin typeface="Calibri"/>
+              </a:rPr>
+              <a:t>UI開発・店舗向けアプリ完成・決済端末連携</a:t>
+            </a:r>
+          </a:p>
+        </p:txBody>
+      </p:sp>
+      <p:sp>
+        <p:nvSpPr>
+          <p:cNvPr id="15" name="Rectangle 14"/>
+          <p:cNvSpPr/>
+          <p:nvPr/>
+        </p:nvSpPr>
+        <p:spPr>
+          <a:xfrm>
+            <a:off x="274320" y="2395728"/>
+            <a:ext cx="1463040" cy="658368"/>
+          </a:xfrm>
+          <a:prstGeom prst="rect">
+            <a:avLst/>
+          </a:prstGeom>
+          <a:solidFill>
+            <a:srgbClr val="2563EB"/>
+          </a:solidFill>
+          <a:ln>
+            <a:noFill/>
+          </a:ln>
+        </p:spPr>
+        <p:style>
+          <a:lnRef idx="1">
+            <a:schemeClr val="accent1"/>
+          </a:lnRef>
+          <a:fillRef idx="3">
+            <a:schemeClr val="accent1"/>
+          </a:fillRef>
+          <a:effectRef idx="2">
+            <a:schemeClr val="accent1"/>
+          </a:effectRef>
+          <a:fontRef idx="minor">
+            <a:schemeClr val="lt1"/>
+          </a:fontRef>
+        </p:style>
+        <p:txBody>
+          <a:bodyPr rtlCol="0" anchor="ctr"/>
+          <a:lstStyle/>
+          <a:p>
+            <a:pPr algn="ctr"/>
+          </a:p>
+        </p:txBody>
+      </p:sp>
+      <p:sp>
+        <p:nvSpPr>
+          <p:cNvPr id="16" name="TextBox 15"/>
+          <p:cNvSpPr txBox="1"/>
+          <p:nvPr/>
+        </p:nvSpPr>
+        <p:spPr>
+          <a:xfrm>
+            <a:off x="274320" y="2432304"/>
+            <a:ext cx="1463040" cy="320040"/>
+          </a:xfrm>
+          <a:prstGeom prst="rect">
+            <a:avLst/>
+          </a:prstGeom>
+          <a:noFill/>
+        </p:spPr>
+        <p:txBody>
+          <a:bodyPr wrap="square">
+            <a:spAutoFit/>
+          </a:bodyPr>
+          <a:lstStyle/>
+          <a:p>
+            <a:pPr algn="ctr"/>
+            <a:r>
+              <a:rPr sz="1100" b="1">
+                <a:solidFill>
+                  <a:srgbClr val="FFFFFF"/>
+                </a:solidFill>
+                <a:latin typeface="Calibri"/>
+              </a:rPr>
+              <a:t>フェーズ 3</a:t>
+            </a:r>
+          </a:p>
+        </p:txBody>
+      </p:sp>
+      <p:sp>
+        <p:nvSpPr>
+          <p:cNvPr id="17" name="TextBox 16"/>
+          <p:cNvSpPr txBox="1"/>
+          <p:nvPr/>
+        </p:nvSpPr>
+        <p:spPr>
+          <a:xfrm>
+            <a:off x="274320" y="2724912"/>
+            <a:ext cx="1463040" cy="301752"/>
+          </a:xfrm>
+          <a:prstGeom prst="rect">
+            <a:avLst/>
+          </a:prstGeom>
+          <a:noFill/>
+        </p:spPr>
+        <p:txBody>
+          <a:bodyPr wrap="square">
+            <a:spAutoFit/>
+          </a:bodyPr>
+          <a:lstStyle/>
+          <a:p>
+            <a:pPr algn="ctr"/>
+            <a:r>
+              <a:rPr sz="1000" b="0">
+                <a:solidFill>
+                  <a:srgbClr val="FFFFFF"/>
+                </a:solidFill>
+                <a:latin typeface="Calibri"/>
+              </a:rPr>
+              <a:t>5〜6ヶ月</a:t>
+            </a:r>
+          </a:p>
+        </p:txBody>
+      </p:sp>
+      <p:sp>
+        <p:nvSpPr>
+          <p:cNvPr id="18" name="Rectangle 17"/>
+          <p:cNvSpPr/>
+          <p:nvPr/>
+        </p:nvSpPr>
+        <p:spPr>
+          <a:xfrm>
+            <a:off x="1828800" y="2395728"/>
+            <a:ext cx="7040880" cy="658368"/>
+          </a:xfrm>
+          <a:prstGeom prst="rect">
+            <a:avLst/>
+          </a:prstGeom>
+          <a:solidFill>
+            <a:srgbClr val="F5F7FA"/>
+          </a:solidFill>
+          <a:ln w="9525">
+            <a:solidFill>
+              <a:srgbClr val="E2E8F0"/>
+            </a:solidFill>
+          </a:ln>
+        </p:spPr>
+        <p:style>
+          <a:lnRef idx="1">
+            <a:schemeClr val="accent1"/>
+          </a:lnRef>
+          <a:fillRef idx="3">
+            <a:schemeClr val="accent1"/>
+          </a:fillRef>
+          <a:effectRef idx="2">
+            <a:schemeClr val="accent1"/>
+          </a:effectRef>
+          <a:fontRef idx="minor">
+            <a:schemeClr val="lt1"/>
+          </a:fontRef>
+        </p:style>
+        <p:txBody>
+          <a:bodyPr rtlCol="0" anchor="ctr"/>
+          <a:lstStyle/>
+          <a:p>
+            <a:pPr algn="ctr"/>
           </a:p>
         </p:txBody>
       </p:sp>
@@ -8545,8 +8933,8 @@
         </p:nvSpPr>
         <p:spPr>
           <a:xfrm>
-            <a:off x="4983480" y="3474720"/>
-            <a:ext cx="3886200" cy="566928"/>
+            <a:off x="1965960" y="2532888"/>
+            <a:ext cx="6766560" cy="411480"/>
           </a:xfrm>
           <a:prstGeom prst="rect">
             <a:avLst/>
@@ -8561,27 +8949,185 @@
           <a:p>
             <a:pPr algn="l"/>
             <a:r>
-              <a:rPr sz="1200" b="0" i="0">
-                <a:solidFill>
-                  <a:srgbClr val="334155"/>
-                </a:solidFill>
-                <a:latin typeface="Calibri"/>
-              </a:rPr>
-              <a:t>▶  導入決定権のある方は誰ですか？</a:t>
-            </a:r>
-          </a:p>
-        </p:txBody>
-      </p:sp>
-      <p:sp>
-        <p:nvSpPr>
-          <p:cNvPr id="20" name="TextBox 19"/>
-          <p:cNvSpPr txBox="1"/>
-          <p:nvPr/>
-        </p:nvSpPr>
-        <p:spPr>
-          <a:xfrm>
-            <a:off x="4983480" y="4096511"/>
-            <a:ext cx="3886200" cy="566928"/>
+              <a:rPr sz="1300" b="0">
+                <a:solidFill>
+                  <a:srgbClr val="1A1A2E"/>
+                </a:solidFill>
+                <a:latin typeface="Calibri"/>
+              </a:rPr>
+              <a:t>顧客管理・在庫管理・売上レポート機能</a:t>
+            </a:r>
+          </a:p>
+        </p:txBody>
+      </p:sp>
+      <p:sp>
+        <p:nvSpPr>
+          <p:cNvPr id="20" name="Rectangle 19"/>
+          <p:cNvSpPr/>
+          <p:nvPr/>
+        </p:nvSpPr>
+        <p:spPr>
+          <a:xfrm>
+            <a:off x="274320" y="3191256"/>
+            <a:ext cx="1463040" cy="658368"/>
+          </a:xfrm>
+          <a:prstGeom prst="rect">
+            <a:avLst/>
+          </a:prstGeom>
+          <a:solidFill>
+            <a:srgbClr val="7C3AED"/>
+          </a:solidFill>
+          <a:ln>
+            <a:noFill/>
+          </a:ln>
+        </p:spPr>
+        <p:style>
+          <a:lnRef idx="1">
+            <a:schemeClr val="accent1"/>
+          </a:lnRef>
+          <a:fillRef idx="3">
+            <a:schemeClr val="accent1"/>
+          </a:fillRef>
+          <a:effectRef idx="2">
+            <a:schemeClr val="accent1"/>
+          </a:effectRef>
+          <a:fontRef idx="minor">
+            <a:schemeClr val="lt1"/>
+          </a:fontRef>
+        </p:style>
+        <p:txBody>
+          <a:bodyPr rtlCol="0" anchor="ctr"/>
+          <a:lstStyle/>
+          <a:p>
+            <a:pPr algn="ctr"/>
+          </a:p>
+        </p:txBody>
+      </p:sp>
+      <p:sp>
+        <p:nvSpPr>
+          <p:cNvPr id="21" name="TextBox 20"/>
+          <p:cNvSpPr txBox="1"/>
+          <p:nvPr/>
+        </p:nvSpPr>
+        <p:spPr>
+          <a:xfrm>
+            <a:off x="274320" y="3227832"/>
+            <a:ext cx="1463040" cy="320040"/>
+          </a:xfrm>
+          <a:prstGeom prst="rect">
+            <a:avLst/>
+          </a:prstGeom>
+          <a:noFill/>
+        </p:spPr>
+        <p:txBody>
+          <a:bodyPr wrap="square">
+            <a:spAutoFit/>
+          </a:bodyPr>
+          <a:lstStyle/>
+          <a:p>
+            <a:pPr algn="ctr"/>
+            <a:r>
+              <a:rPr sz="1100" b="1">
+                <a:solidFill>
+                  <a:srgbClr val="FFFFFF"/>
+                </a:solidFill>
+                <a:latin typeface="Calibri"/>
+              </a:rPr>
+              <a:t>フェーズ 4</a:t>
+            </a:r>
+          </a:p>
+        </p:txBody>
+      </p:sp>
+      <p:sp>
+        <p:nvSpPr>
+          <p:cNvPr id="22" name="TextBox 21"/>
+          <p:cNvSpPr txBox="1"/>
+          <p:nvPr/>
+        </p:nvSpPr>
+        <p:spPr>
+          <a:xfrm>
+            <a:off x="274320" y="3520439"/>
+            <a:ext cx="1463040" cy="301752"/>
+          </a:xfrm>
+          <a:prstGeom prst="rect">
+            <a:avLst/>
+          </a:prstGeom>
+          <a:noFill/>
+        </p:spPr>
+        <p:txBody>
+          <a:bodyPr wrap="square">
+            <a:spAutoFit/>
+          </a:bodyPr>
+          <a:lstStyle/>
+          <a:p>
+            <a:pPr algn="ctr"/>
+            <a:r>
+              <a:rPr sz="1000" b="0">
+                <a:solidFill>
+                  <a:srgbClr val="FFFFFF"/>
+                </a:solidFill>
+                <a:latin typeface="Calibri"/>
+              </a:rPr>
+              <a:t>7ヶ月</a:t>
+            </a:r>
+          </a:p>
+        </p:txBody>
+      </p:sp>
+      <p:sp>
+        <p:nvSpPr>
+          <p:cNvPr id="23" name="Rectangle 22"/>
+          <p:cNvSpPr/>
+          <p:nvPr/>
+        </p:nvSpPr>
+        <p:spPr>
+          <a:xfrm>
+            <a:off x="1828800" y="3191256"/>
+            <a:ext cx="7040880" cy="658368"/>
+          </a:xfrm>
+          <a:prstGeom prst="rect">
+            <a:avLst/>
+          </a:prstGeom>
+          <a:solidFill>
+            <a:srgbClr val="F5F7FA"/>
+          </a:solidFill>
+          <a:ln w="9525">
+            <a:solidFill>
+              <a:srgbClr val="E2E8F0"/>
+            </a:solidFill>
+          </a:ln>
+        </p:spPr>
+        <p:style>
+          <a:lnRef idx="1">
+            <a:schemeClr val="accent1"/>
+          </a:lnRef>
+          <a:fillRef idx="3">
+            <a:schemeClr val="accent1"/>
+          </a:fillRef>
+          <a:effectRef idx="2">
+            <a:schemeClr val="accent1"/>
+          </a:effectRef>
+          <a:fontRef idx="minor">
+            <a:schemeClr val="lt1"/>
+          </a:fontRef>
+        </p:style>
+        <p:txBody>
+          <a:bodyPr rtlCol="0" anchor="ctr"/>
+          <a:lstStyle/>
+          <a:p>
+            <a:pPr algn="ctr"/>
+          </a:p>
+        </p:txBody>
+      </p:sp>
+      <p:sp>
+        <p:nvSpPr>
+          <p:cNvPr id="24" name="TextBox 23"/>
+          <p:cNvSpPr txBox="1"/>
+          <p:nvPr/>
+        </p:nvSpPr>
+        <p:spPr>
+          <a:xfrm>
+            <a:off x="1965960" y="3328415"/>
+            <a:ext cx="6766560" cy="411480"/>
           </a:xfrm>
           <a:prstGeom prst="rect">
             <a:avLst/>
@@ -8596,48 +9142,206 @@
           <a:p>
             <a:pPr algn="l"/>
             <a:r>
-              <a:rPr sz="1200" b="0" i="0">
-                <a:solidFill>
-                  <a:srgbClr val="334155"/>
-                </a:solidFill>
-                <a:latin typeface="Calibri"/>
-              </a:rPr>
-              <a:t>▶  導入希望時期・予算感は？</a:t>
-            </a:r>
-          </a:p>
-        </p:txBody>
-      </p:sp>
-      <p:sp>
-        <p:nvSpPr>
-          <p:cNvPr id="21" name="TextBox 20"/>
-          <p:cNvSpPr txBox="1"/>
-          <p:nvPr/>
-        </p:nvSpPr>
-        <p:spPr>
-          <a:xfrm>
-            <a:off x="457200" y="4754880"/>
-            <a:ext cx="8229600" cy="320040"/>
-          </a:xfrm>
-          <a:prstGeom prst="rect">
-            <a:avLst/>
-          </a:prstGeom>
-          <a:noFill/>
-        </p:spPr>
-        <p:txBody>
-          <a:bodyPr wrap="square">
-            <a:spAutoFit/>
-          </a:bodyPr>
-          <a:lstStyle/>
-          <a:p>
-            <a:pPr algn="ctr"/>
-            <a:r>
-              <a:rPr sz="1100" b="0" i="0">
-                <a:solidFill>
-                  <a:srgbClr val="64748B"/>
-                </a:solidFill>
-                <a:latin typeface="Calibri"/>
-              </a:rPr>
-              <a:t>※ 詳細は別紙「要件ヒアリングシート」を使用</a:t>
+              <a:rPr sz="1300" b="0">
+                <a:solidFill>
+                  <a:srgbClr val="1A1A2E"/>
+                </a:solidFill>
+                <a:latin typeface="Calibri"/>
+              </a:rPr>
+              <a:t>テスト店舗での試験導入（1〜2店舗）</a:t>
+            </a:r>
+          </a:p>
+        </p:txBody>
+      </p:sp>
+      <p:sp>
+        <p:nvSpPr>
+          <p:cNvPr id="25" name="Rectangle 24"/>
+          <p:cNvSpPr/>
+          <p:nvPr/>
+        </p:nvSpPr>
+        <p:spPr>
+          <a:xfrm>
+            <a:off x="274320" y="3986784"/>
+            <a:ext cx="1463040" cy="658368"/>
+          </a:xfrm>
+          <a:prstGeom prst="rect">
+            <a:avLst/>
+          </a:prstGeom>
+          <a:solidFill>
+            <a:srgbClr val="1E3A5F"/>
+          </a:solidFill>
+          <a:ln>
+            <a:noFill/>
+          </a:ln>
+        </p:spPr>
+        <p:style>
+          <a:lnRef idx="1">
+            <a:schemeClr val="accent1"/>
+          </a:lnRef>
+          <a:fillRef idx="3">
+            <a:schemeClr val="accent1"/>
+          </a:fillRef>
+          <a:effectRef idx="2">
+            <a:schemeClr val="accent1"/>
+          </a:effectRef>
+          <a:fontRef idx="minor">
+            <a:schemeClr val="lt1"/>
+          </a:fontRef>
+        </p:style>
+        <p:txBody>
+          <a:bodyPr rtlCol="0" anchor="ctr"/>
+          <a:lstStyle/>
+          <a:p>
+            <a:pPr algn="ctr"/>
+          </a:p>
+        </p:txBody>
+      </p:sp>
+      <p:sp>
+        <p:nvSpPr>
+          <p:cNvPr id="26" name="TextBox 25"/>
+          <p:cNvSpPr txBox="1"/>
+          <p:nvPr/>
+        </p:nvSpPr>
+        <p:spPr>
+          <a:xfrm>
+            <a:off x="274320" y="4023360"/>
+            <a:ext cx="1463040" cy="320040"/>
+          </a:xfrm>
+          <a:prstGeom prst="rect">
+            <a:avLst/>
+          </a:prstGeom>
+          <a:noFill/>
+        </p:spPr>
+        <p:txBody>
+          <a:bodyPr wrap="square">
+            <a:spAutoFit/>
+          </a:bodyPr>
+          <a:lstStyle/>
+          <a:p>
+            <a:pPr algn="ctr"/>
+            <a:r>
+              <a:rPr sz="1100" b="1">
+                <a:solidFill>
+                  <a:srgbClr val="FFFFFF"/>
+                </a:solidFill>
+                <a:latin typeface="Calibri"/>
+              </a:rPr>
+              <a:t>フェーズ 5</a:t>
+            </a:r>
+          </a:p>
+        </p:txBody>
+      </p:sp>
+      <p:sp>
+        <p:nvSpPr>
+          <p:cNvPr id="27" name="TextBox 26"/>
+          <p:cNvSpPr txBox="1"/>
+          <p:nvPr/>
+        </p:nvSpPr>
+        <p:spPr>
+          <a:xfrm>
+            <a:off x="274320" y="4315968"/>
+            <a:ext cx="1463040" cy="301752"/>
+          </a:xfrm>
+          <a:prstGeom prst="rect">
+            <a:avLst/>
+          </a:prstGeom>
+          <a:noFill/>
+        </p:spPr>
+        <p:txBody>
+          <a:bodyPr wrap="square">
+            <a:spAutoFit/>
+          </a:bodyPr>
+          <a:lstStyle/>
+          <a:p>
+            <a:pPr algn="ctr"/>
+            <a:r>
+              <a:rPr sz="1000" b="0">
+                <a:solidFill>
+                  <a:srgbClr val="FFFFFF"/>
+                </a:solidFill>
+                <a:latin typeface="Calibri"/>
+              </a:rPr>
+              <a:t>8〜12ヶ月</a:t>
+            </a:r>
+          </a:p>
+        </p:txBody>
+      </p:sp>
+      <p:sp>
+        <p:nvSpPr>
+          <p:cNvPr id="28" name="Rectangle 27"/>
+          <p:cNvSpPr/>
+          <p:nvPr/>
+        </p:nvSpPr>
+        <p:spPr>
+          <a:xfrm>
+            <a:off x="1828800" y="3986784"/>
+            <a:ext cx="7040880" cy="658368"/>
+          </a:xfrm>
+          <a:prstGeom prst="rect">
+            <a:avLst/>
+          </a:prstGeom>
+          <a:solidFill>
+            <a:srgbClr val="F5F7FA"/>
+          </a:solidFill>
+          <a:ln w="9525">
+            <a:solidFill>
+              <a:srgbClr val="E2E8F0"/>
+            </a:solidFill>
+          </a:ln>
+        </p:spPr>
+        <p:style>
+          <a:lnRef idx="1">
+            <a:schemeClr val="accent1"/>
+          </a:lnRef>
+          <a:fillRef idx="3">
+            <a:schemeClr val="accent1"/>
+          </a:fillRef>
+          <a:effectRef idx="2">
+            <a:schemeClr val="accent1"/>
+          </a:effectRef>
+          <a:fontRef idx="minor">
+            <a:schemeClr val="lt1"/>
+          </a:fontRef>
+        </p:style>
+        <p:txBody>
+          <a:bodyPr rtlCol="0" anchor="ctr"/>
+          <a:lstStyle/>
+          <a:p>
+            <a:pPr algn="ctr"/>
+          </a:p>
+        </p:txBody>
+      </p:sp>
+      <p:sp>
+        <p:nvSpPr>
+          <p:cNvPr id="29" name="TextBox 28"/>
+          <p:cNvSpPr txBox="1"/>
+          <p:nvPr/>
+        </p:nvSpPr>
+        <p:spPr>
+          <a:xfrm>
+            <a:off x="1965960" y="4123944"/>
+            <a:ext cx="6766560" cy="411480"/>
+          </a:xfrm>
+          <a:prstGeom prst="rect">
+            <a:avLst/>
+          </a:prstGeom>
+          <a:noFill/>
+        </p:spPr>
+        <p:txBody>
+          <a:bodyPr wrap="square">
+            <a:spAutoFit/>
+          </a:bodyPr>
+          <a:lstStyle/>
+          <a:p>
+            <a:pPr algn="l"/>
+            <a:r>
+              <a:rPr sz="1300" b="0">
+                <a:solidFill>
+                  <a:srgbClr val="1A1A2E"/>
+                </a:solidFill>
+                <a:latin typeface="Calibri"/>
+              </a:rPr>
+              <a:t>全70店舗への順次展開</a:t>
             </a:r>
           </a:p>
         </p:txBody>
@@ -8675,7 +9379,7 @@
             <a:avLst/>
           </a:prstGeom>
           <a:solidFill>
-            <a:srgbClr val="1E3A5F"/>
+            <a:srgbClr val="FFFFFF"/>
           </a:solidFill>
           <a:ln>
             <a:noFill/>
@@ -8705,16 +9409,16 @@
       </p:sp>
       <p:sp>
         <p:nvSpPr>
-          <p:cNvPr id="3" name="Oval 2"/>
+          <p:cNvPr id="3" name="Rectangle 2"/>
           <p:cNvSpPr/>
           <p:nvPr/>
         </p:nvSpPr>
         <p:spPr>
           <a:xfrm>
-            <a:off x="-457200" y="2743200"/>
-            <a:ext cx="4114800" cy="4114800"/>
-          </a:xfrm>
-          <a:prstGeom prst="ellipse">
+            <a:off x="0" y="0"/>
+            <a:ext cx="9144000" cy="658368"/>
+          </a:xfrm>
+          <a:prstGeom prst="rect">
             <a:avLst/>
           </a:prstGeom>
           <a:solidFill>
@@ -8754,8 +9458,8 @@
         </p:nvSpPr>
         <p:spPr>
           <a:xfrm>
-            <a:off x="640080" y="274320"/>
-            <a:ext cx="4572000" cy="502920"/>
+            <a:off x="457200" y="109728"/>
+            <a:ext cx="8229600" cy="457200"/>
           </a:xfrm>
           <a:prstGeom prst="rect">
             <a:avLst/>
@@ -8770,13 +9474,13 @@
           <a:p>
             <a:pPr algn="l"/>
             <a:r>
-              <a:rPr sz="1300" b="1" i="0">
-                <a:solidFill>
-                  <a:srgbClr val="14B8A6"/>
-                </a:solidFill>
-                <a:latin typeface="Calibri"/>
-              </a:rPr>
-              <a:t>まとめ</a:t>
+              <a:rPr sz="2200" b="1">
+                <a:solidFill>
+                  <a:srgbClr val="FFFFFF"/>
+                </a:solidFill>
+                <a:latin typeface="Calibri"/>
+              </a:rPr>
+              <a:t>本日の打ち合わせ  —  確認したいこと</a:t>
             </a:r>
           </a:p>
         </p:txBody>
@@ -8789,10 +9493,706 @@
         </p:nvSpPr>
         <p:spPr>
           <a:xfrm>
-            <a:off x="640080" y="914400"/>
-            <a:ext cx="5120640" cy="621792"/>
-          </a:xfrm>
-          <a:prstGeom prst="rect">
+            <a:off x="274320" y="804672"/>
+            <a:ext cx="4160520" cy="1965960"/>
+          </a:xfrm>
+          <a:prstGeom prst="rect">
+            <a:avLst/>
+          </a:prstGeom>
+          <a:solidFill>
+            <a:srgbClr val="EBF5FB"/>
+          </a:solidFill>
+          <a:ln w="9525">
+            <a:solidFill>
+              <a:srgbClr val="BFDBFE"/>
+            </a:solidFill>
+          </a:ln>
+        </p:spPr>
+        <p:style>
+          <a:lnRef idx="1">
+            <a:schemeClr val="accent1"/>
+          </a:lnRef>
+          <a:fillRef idx="3">
+            <a:schemeClr val="accent1"/>
+          </a:fillRef>
+          <a:effectRef idx="2">
+            <a:schemeClr val="accent1"/>
+          </a:effectRef>
+          <a:fontRef idx="minor">
+            <a:schemeClr val="lt1"/>
+          </a:fontRef>
+        </p:style>
+        <p:txBody>
+          <a:bodyPr rtlCol="0" anchor="ctr"/>
+          <a:lstStyle/>
+          <a:p>
+            <a:pPr algn="ctr"/>
+          </a:p>
+        </p:txBody>
+      </p:sp>
+      <p:sp>
+        <p:nvSpPr>
+          <p:cNvPr id="6" name="TextBox 5"/>
+          <p:cNvSpPr txBox="1"/>
+          <p:nvPr/>
+        </p:nvSpPr>
+        <p:spPr>
+          <a:xfrm>
+            <a:off x="457200" y="896112"/>
+            <a:ext cx="3840480" cy="384048"/>
+          </a:xfrm>
+          <a:prstGeom prst="rect">
+            <a:avLst/>
+          </a:prstGeom>
+          <a:noFill/>
+        </p:spPr>
+        <p:txBody>
+          <a:bodyPr wrap="square">
+            <a:spAutoFit/>
+          </a:bodyPr>
+          <a:lstStyle/>
+          <a:p>
+            <a:pPr algn="l"/>
+            <a:r>
+              <a:rPr sz="1300" b="1">
+                <a:solidFill>
+                  <a:srgbClr val="1E3A5F"/>
+                </a:solidFill>
+                <a:latin typeface="Calibri"/>
+              </a:rPr>
+              <a:t>■  業務フロー</a:t>
+            </a:r>
+          </a:p>
+        </p:txBody>
+      </p:sp>
+      <p:sp>
+        <p:nvSpPr>
+          <p:cNvPr id="7" name="TextBox 6"/>
+          <p:cNvSpPr txBox="1"/>
+          <p:nvPr/>
+        </p:nvSpPr>
+        <p:spPr>
+          <a:xfrm>
+            <a:off x="457200" y="1371600"/>
+            <a:ext cx="3886200" cy="566928"/>
+          </a:xfrm>
+          <a:prstGeom prst="rect">
+            <a:avLst/>
+          </a:prstGeom>
+          <a:noFill/>
+        </p:spPr>
+        <p:txBody>
+          <a:bodyPr wrap="square">
+            <a:spAutoFit/>
+          </a:bodyPr>
+          <a:lstStyle/>
+          <a:p>
+            <a:pPr algn="l"/>
+            <a:r>
+              <a:rPr sz="1200" b="0">
+                <a:solidFill>
+                  <a:srgbClr val="334155"/>
+                </a:solidFill>
+                <a:latin typeface="Calibri"/>
+              </a:rPr>
+              <a:t>▶  1日の流れ（来店〜退店）を教えてください</a:t>
+            </a:r>
+          </a:p>
+        </p:txBody>
+      </p:sp>
+      <p:sp>
+        <p:nvSpPr>
+          <p:cNvPr id="8" name="TextBox 7"/>
+          <p:cNvSpPr txBox="1"/>
+          <p:nvPr/>
+        </p:nvSpPr>
+        <p:spPr>
+          <a:xfrm>
+            <a:off x="457200" y="1993392"/>
+            <a:ext cx="3886200" cy="566928"/>
+          </a:xfrm>
+          <a:prstGeom prst="rect">
+            <a:avLst/>
+          </a:prstGeom>
+          <a:noFill/>
+        </p:spPr>
+        <p:txBody>
+          <a:bodyPr wrap="square">
+            <a:spAutoFit/>
+          </a:bodyPr>
+          <a:lstStyle/>
+          <a:p>
+            <a:pPr algn="l"/>
+            <a:r>
+              <a:rPr sz="1200" b="0">
+                <a:solidFill>
+                  <a:srgbClr val="334155"/>
+                </a:solidFill>
+                <a:latin typeface="Calibri"/>
+              </a:rPr>
+              <a:t>▶  紙・Excelで管理している業務はありますか</a:t>
+            </a:r>
+          </a:p>
+        </p:txBody>
+      </p:sp>
+      <p:sp>
+        <p:nvSpPr>
+          <p:cNvPr id="9" name="Rectangle 8"/>
+          <p:cNvSpPr/>
+          <p:nvPr/>
+        </p:nvSpPr>
+        <p:spPr>
+          <a:xfrm>
+            <a:off x="4800600" y="804672"/>
+            <a:ext cx="4160520" cy="1965960"/>
+          </a:xfrm>
+          <a:prstGeom prst="rect">
+            <a:avLst/>
+          </a:prstGeom>
+          <a:solidFill>
+            <a:srgbClr val="EBF5FB"/>
+          </a:solidFill>
+          <a:ln w="9525">
+            <a:solidFill>
+              <a:srgbClr val="BFDBFE"/>
+            </a:solidFill>
+          </a:ln>
+        </p:spPr>
+        <p:style>
+          <a:lnRef idx="1">
+            <a:schemeClr val="accent1"/>
+          </a:lnRef>
+          <a:fillRef idx="3">
+            <a:schemeClr val="accent1"/>
+          </a:fillRef>
+          <a:effectRef idx="2">
+            <a:schemeClr val="accent1"/>
+          </a:effectRef>
+          <a:fontRef idx="minor">
+            <a:schemeClr val="lt1"/>
+          </a:fontRef>
+        </p:style>
+        <p:txBody>
+          <a:bodyPr rtlCol="0" anchor="ctr"/>
+          <a:lstStyle/>
+          <a:p>
+            <a:pPr algn="ctr"/>
+          </a:p>
+        </p:txBody>
+      </p:sp>
+      <p:sp>
+        <p:nvSpPr>
+          <p:cNvPr id="10" name="TextBox 9"/>
+          <p:cNvSpPr txBox="1"/>
+          <p:nvPr/>
+        </p:nvSpPr>
+        <p:spPr>
+          <a:xfrm>
+            <a:off x="4983480" y="896112"/>
+            <a:ext cx="3840480" cy="384048"/>
+          </a:xfrm>
+          <a:prstGeom prst="rect">
+            <a:avLst/>
+          </a:prstGeom>
+          <a:noFill/>
+        </p:spPr>
+        <p:txBody>
+          <a:bodyPr wrap="square">
+            <a:spAutoFit/>
+          </a:bodyPr>
+          <a:lstStyle/>
+          <a:p>
+            <a:pPr algn="l"/>
+            <a:r>
+              <a:rPr sz="1300" b="1">
+                <a:solidFill>
+                  <a:srgbClr val="1E3A5F"/>
+                </a:solidFill>
+                <a:latin typeface="Calibri"/>
+              </a:rPr>
+              <a:t>■  現行システムの不満</a:t>
+            </a:r>
+          </a:p>
+        </p:txBody>
+      </p:sp>
+      <p:sp>
+        <p:nvSpPr>
+          <p:cNvPr id="11" name="TextBox 10"/>
+          <p:cNvSpPr txBox="1"/>
+          <p:nvPr/>
+        </p:nvSpPr>
+        <p:spPr>
+          <a:xfrm>
+            <a:off x="4983480" y="1371600"/>
+            <a:ext cx="3886200" cy="566928"/>
+          </a:xfrm>
+          <a:prstGeom prst="rect">
+            <a:avLst/>
+          </a:prstGeom>
+          <a:noFill/>
+        </p:spPr>
+        <p:txBody>
+          <a:bodyPr wrap="square">
+            <a:spAutoFit/>
+          </a:bodyPr>
+          <a:lstStyle/>
+          <a:p>
+            <a:pPr algn="l"/>
+            <a:r>
+              <a:rPr sz="1200" b="0">
+                <a:solidFill>
+                  <a:srgbClr val="334155"/>
+                </a:solidFill>
+                <a:latin typeface="Calibri"/>
+              </a:rPr>
+              <a:t>▶  VitaminCで一番困っていることは？</a:t>
+            </a:r>
+          </a:p>
+        </p:txBody>
+      </p:sp>
+      <p:sp>
+        <p:nvSpPr>
+          <p:cNvPr id="12" name="TextBox 11"/>
+          <p:cNvSpPr txBox="1"/>
+          <p:nvPr/>
+        </p:nvSpPr>
+        <p:spPr>
+          <a:xfrm>
+            <a:off x="4983480" y="1993392"/>
+            <a:ext cx="3886200" cy="566928"/>
+          </a:xfrm>
+          <a:prstGeom prst="rect">
+            <a:avLst/>
+          </a:prstGeom>
+          <a:noFill/>
+        </p:spPr>
+        <p:txBody>
+          <a:bodyPr wrap="square">
+            <a:spAutoFit/>
+          </a:bodyPr>
+          <a:lstStyle/>
+          <a:p>
+            <a:pPr algn="l"/>
+            <a:r>
+              <a:rPr sz="1200" b="0">
+                <a:solidFill>
+                  <a:srgbClr val="334155"/>
+                </a:solidFill>
+                <a:latin typeface="Calibri"/>
+              </a:rPr>
+              <a:t>▶  欲しいのに今できない機能は？</a:t>
+            </a:r>
+          </a:p>
+        </p:txBody>
+      </p:sp>
+      <p:sp>
+        <p:nvSpPr>
+          <p:cNvPr id="13" name="Rectangle 12"/>
+          <p:cNvSpPr/>
+          <p:nvPr/>
+        </p:nvSpPr>
+        <p:spPr>
+          <a:xfrm>
+            <a:off x="274320" y="2907791"/>
+            <a:ext cx="4160520" cy="1965960"/>
+          </a:xfrm>
+          <a:prstGeom prst="rect">
+            <a:avLst/>
+          </a:prstGeom>
+          <a:solidFill>
+            <a:srgbClr val="EBF5FB"/>
+          </a:solidFill>
+          <a:ln w="9525">
+            <a:solidFill>
+              <a:srgbClr val="BFDBFE"/>
+            </a:solidFill>
+          </a:ln>
+        </p:spPr>
+        <p:style>
+          <a:lnRef idx="1">
+            <a:schemeClr val="accent1"/>
+          </a:lnRef>
+          <a:fillRef idx="3">
+            <a:schemeClr val="accent1"/>
+          </a:fillRef>
+          <a:effectRef idx="2">
+            <a:schemeClr val="accent1"/>
+          </a:effectRef>
+          <a:fontRef idx="minor">
+            <a:schemeClr val="lt1"/>
+          </a:fontRef>
+        </p:style>
+        <p:txBody>
+          <a:bodyPr rtlCol="0" anchor="ctr"/>
+          <a:lstStyle/>
+          <a:p>
+            <a:pPr algn="ctr"/>
+          </a:p>
+        </p:txBody>
+      </p:sp>
+      <p:sp>
+        <p:nvSpPr>
+          <p:cNvPr id="14" name="TextBox 13"/>
+          <p:cNvSpPr txBox="1"/>
+          <p:nvPr/>
+        </p:nvSpPr>
+        <p:spPr>
+          <a:xfrm>
+            <a:off x="457200" y="2999232"/>
+            <a:ext cx="3840480" cy="384048"/>
+          </a:xfrm>
+          <a:prstGeom prst="rect">
+            <a:avLst/>
+          </a:prstGeom>
+          <a:noFill/>
+        </p:spPr>
+        <p:txBody>
+          <a:bodyPr wrap="square">
+            <a:spAutoFit/>
+          </a:bodyPr>
+          <a:lstStyle/>
+          <a:p>
+            <a:pPr algn="l"/>
+            <a:r>
+              <a:rPr sz="1300" b="1">
+                <a:solidFill>
+                  <a:srgbClr val="1E3A5F"/>
+                </a:solidFill>
+                <a:latin typeface="Calibri"/>
+              </a:rPr>
+              <a:t>■  割引・プロモーション</a:t>
+            </a:r>
+          </a:p>
+        </p:txBody>
+      </p:sp>
+      <p:sp>
+        <p:nvSpPr>
+          <p:cNvPr id="15" name="TextBox 14"/>
+          <p:cNvSpPr txBox="1"/>
+          <p:nvPr/>
+        </p:nvSpPr>
+        <p:spPr>
+          <a:xfrm>
+            <a:off x="457200" y="3474720"/>
+            <a:ext cx="3886200" cy="566928"/>
+          </a:xfrm>
+          <a:prstGeom prst="rect">
+            <a:avLst/>
+          </a:prstGeom>
+          <a:noFill/>
+        </p:spPr>
+        <p:txBody>
+          <a:bodyPr wrap="square">
+            <a:spAutoFit/>
+          </a:bodyPr>
+          <a:lstStyle/>
+          <a:p>
+            <a:pPr algn="l"/>
+            <a:r>
+              <a:rPr sz="1200" b="0">
+                <a:solidFill>
+                  <a:srgbClr val="334155"/>
+                </a:solidFill>
+                <a:latin typeface="Calibri"/>
+              </a:rPr>
+              <a:t>▶  クーポン・割引はどう管理していますか？</a:t>
+            </a:r>
+          </a:p>
+        </p:txBody>
+      </p:sp>
+      <p:sp>
+        <p:nvSpPr>
+          <p:cNvPr id="16" name="TextBox 15"/>
+          <p:cNvSpPr txBox="1"/>
+          <p:nvPr/>
+        </p:nvSpPr>
+        <p:spPr>
+          <a:xfrm>
+            <a:off x="457200" y="4096511"/>
+            <a:ext cx="3886200" cy="566928"/>
+          </a:xfrm>
+          <a:prstGeom prst="rect">
+            <a:avLst/>
+          </a:prstGeom>
+          <a:noFill/>
+        </p:spPr>
+        <p:txBody>
+          <a:bodyPr wrap="square">
+            <a:spAutoFit/>
+          </a:bodyPr>
+          <a:lstStyle/>
+          <a:p>
+            <a:pPr algn="l"/>
+            <a:r>
+              <a:rPr sz="1200" b="0">
+                <a:solidFill>
+                  <a:srgbClr val="334155"/>
+                </a:solidFill>
+                <a:latin typeface="Calibri"/>
+              </a:rPr>
+              <a:t>▶  スタッフ別のコミッション計算はしていますか？</a:t>
+            </a:r>
+          </a:p>
+        </p:txBody>
+      </p:sp>
+      <p:sp>
+        <p:nvSpPr>
+          <p:cNvPr id="17" name="Rectangle 16"/>
+          <p:cNvSpPr/>
+          <p:nvPr/>
+        </p:nvSpPr>
+        <p:spPr>
+          <a:xfrm>
+            <a:off x="4800600" y="2907791"/>
+            <a:ext cx="4160520" cy="1965960"/>
+          </a:xfrm>
+          <a:prstGeom prst="rect">
+            <a:avLst/>
+          </a:prstGeom>
+          <a:solidFill>
+            <a:srgbClr val="EBF5FB"/>
+          </a:solidFill>
+          <a:ln w="9525">
+            <a:solidFill>
+              <a:srgbClr val="BFDBFE"/>
+            </a:solidFill>
+          </a:ln>
+        </p:spPr>
+        <p:style>
+          <a:lnRef idx="1">
+            <a:schemeClr val="accent1"/>
+          </a:lnRef>
+          <a:fillRef idx="3">
+            <a:schemeClr val="accent1"/>
+          </a:fillRef>
+          <a:effectRef idx="2">
+            <a:schemeClr val="accent1"/>
+          </a:effectRef>
+          <a:fontRef idx="minor">
+            <a:schemeClr val="lt1"/>
+          </a:fontRef>
+        </p:style>
+        <p:txBody>
+          <a:bodyPr rtlCol="0" anchor="ctr"/>
+          <a:lstStyle/>
+          <a:p>
+            <a:pPr algn="ctr"/>
+          </a:p>
+        </p:txBody>
+      </p:sp>
+      <p:sp>
+        <p:nvSpPr>
+          <p:cNvPr id="18" name="TextBox 17"/>
+          <p:cNvSpPr txBox="1"/>
+          <p:nvPr/>
+        </p:nvSpPr>
+        <p:spPr>
+          <a:xfrm>
+            <a:off x="4983480" y="2999232"/>
+            <a:ext cx="3840480" cy="384048"/>
+          </a:xfrm>
+          <a:prstGeom prst="rect">
+            <a:avLst/>
+          </a:prstGeom>
+          <a:noFill/>
+        </p:spPr>
+        <p:txBody>
+          <a:bodyPr wrap="square">
+            <a:spAutoFit/>
+          </a:bodyPr>
+          <a:lstStyle/>
+          <a:p>
+            <a:pPr algn="l"/>
+            <a:r>
+              <a:rPr sz="1300" b="1">
+                <a:solidFill>
+                  <a:srgbClr val="1E3A5F"/>
+                </a:solidFill>
+                <a:latin typeface="Calibri"/>
+              </a:rPr>
+              <a:t>■  意思決定・予算</a:t>
+            </a:r>
+          </a:p>
+        </p:txBody>
+      </p:sp>
+      <p:sp>
+        <p:nvSpPr>
+          <p:cNvPr id="19" name="TextBox 18"/>
+          <p:cNvSpPr txBox="1"/>
+          <p:nvPr/>
+        </p:nvSpPr>
+        <p:spPr>
+          <a:xfrm>
+            <a:off x="4983480" y="3474720"/>
+            <a:ext cx="3886200" cy="566928"/>
+          </a:xfrm>
+          <a:prstGeom prst="rect">
+            <a:avLst/>
+          </a:prstGeom>
+          <a:noFill/>
+        </p:spPr>
+        <p:txBody>
+          <a:bodyPr wrap="square">
+            <a:spAutoFit/>
+          </a:bodyPr>
+          <a:lstStyle/>
+          <a:p>
+            <a:pPr algn="l"/>
+            <a:r>
+              <a:rPr sz="1200" b="0">
+                <a:solidFill>
+                  <a:srgbClr val="334155"/>
+                </a:solidFill>
+                <a:latin typeface="Calibri"/>
+              </a:rPr>
+              <a:t>▶  導入決定権のある方は誰ですか？</a:t>
+            </a:r>
+          </a:p>
+        </p:txBody>
+      </p:sp>
+      <p:sp>
+        <p:nvSpPr>
+          <p:cNvPr id="20" name="TextBox 19"/>
+          <p:cNvSpPr txBox="1"/>
+          <p:nvPr/>
+        </p:nvSpPr>
+        <p:spPr>
+          <a:xfrm>
+            <a:off x="4983480" y="4096511"/>
+            <a:ext cx="3886200" cy="566928"/>
+          </a:xfrm>
+          <a:prstGeom prst="rect">
+            <a:avLst/>
+          </a:prstGeom>
+          <a:noFill/>
+        </p:spPr>
+        <p:txBody>
+          <a:bodyPr wrap="square">
+            <a:spAutoFit/>
+          </a:bodyPr>
+          <a:lstStyle/>
+          <a:p>
+            <a:pPr algn="l"/>
+            <a:r>
+              <a:rPr sz="1200" b="0">
+                <a:solidFill>
+                  <a:srgbClr val="334155"/>
+                </a:solidFill>
+                <a:latin typeface="Calibri"/>
+              </a:rPr>
+              <a:t>▶  導入希望時期・予算感は？</a:t>
+            </a:r>
+          </a:p>
+        </p:txBody>
+      </p:sp>
+      <p:sp>
+        <p:nvSpPr>
+          <p:cNvPr id="21" name="TextBox 20"/>
+          <p:cNvSpPr txBox="1"/>
+          <p:nvPr/>
+        </p:nvSpPr>
+        <p:spPr>
+          <a:xfrm>
+            <a:off x="457200" y="4754880"/>
+            <a:ext cx="8229600" cy="320040"/>
+          </a:xfrm>
+          <a:prstGeom prst="rect">
+            <a:avLst/>
+          </a:prstGeom>
+          <a:noFill/>
+        </p:spPr>
+        <p:txBody>
+          <a:bodyPr wrap="square">
+            <a:spAutoFit/>
+          </a:bodyPr>
+          <a:lstStyle/>
+          <a:p>
+            <a:pPr algn="ctr"/>
+            <a:r>
+              <a:rPr sz="1100" b="0">
+                <a:solidFill>
+                  <a:srgbClr val="64748B"/>
+                </a:solidFill>
+                <a:latin typeface="Calibri"/>
+              </a:rPr>
+              <a:t>※ 詳細は別紙「要件ヒアリングシート」を使用</a:t>
+            </a:r>
+          </a:p>
+        </p:txBody>
+      </p:sp>
+    </p:spTree>
+  </p:cSld>
+  <p:clrMapOvr>
+    <a:masterClrMapping/>
+  </p:clrMapOvr>
+</p:sld>
+</file>
+
+<file path=ppt/slides/slide9.xml><?xml version="1.0" encoding="utf-8"?>
+<p:sld xmlns:a="http://schemas.openxmlformats.org/drawingml/2006/main" xmlns:p="http://schemas.openxmlformats.org/presentationml/2006/main" xmlns:r="http://schemas.openxmlformats.org/officeDocument/2006/relationships">
+  <p:cSld>
+    <p:spTree>
+      <p:nvGrpSpPr>
+        <p:cNvPr id="1" name=""/>
+        <p:cNvGrpSpPr/>
+        <p:nvPr/>
+      </p:nvGrpSpPr>
+      <p:grpSpPr/>
+      <p:sp>
+        <p:nvSpPr>
+          <p:cNvPr id="2" name="Rectangle 1"/>
+          <p:cNvSpPr/>
+          <p:nvPr/>
+        </p:nvSpPr>
+        <p:spPr>
+          <a:xfrm>
+            <a:off x="0" y="0"/>
+            <a:ext cx="9144000" cy="5143500"/>
+          </a:xfrm>
+          <a:prstGeom prst="rect">
+            <a:avLst/>
+          </a:prstGeom>
+          <a:solidFill>
+            <a:srgbClr val="1E3A5F"/>
+          </a:solidFill>
+          <a:ln>
+            <a:noFill/>
+          </a:ln>
+        </p:spPr>
+        <p:style>
+          <a:lnRef idx="1">
+            <a:schemeClr val="accent1"/>
+          </a:lnRef>
+          <a:fillRef idx="3">
+            <a:schemeClr val="accent1"/>
+          </a:fillRef>
+          <a:effectRef idx="2">
+            <a:schemeClr val="accent1"/>
+          </a:effectRef>
+          <a:fontRef idx="minor">
+            <a:schemeClr val="lt1"/>
+          </a:fontRef>
+        </p:style>
+        <p:txBody>
+          <a:bodyPr rtlCol="0" anchor="ctr"/>
+          <a:lstStyle/>
+          <a:p>
+            <a:pPr algn="ctr"/>
+          </a:p>
+        </p:txBody>
+      </p:sp>
+      <p:sp>
+        <p:nvSpPr>
+          <p:cNvPr id="3" name="Oval 2"/>
+          <p:cNvSpPr/>
+          <p:nvPr/>
+        </p:nvSpPr>
+        <p:spPr>
+          <a:xfrm>
+            <a:off x="-457200" y="2743200"/>
+            <a:ext cx="4114800" cy="4114800"/>
+          </a:xfrm>
+          <a:prstGeom prst="ellipse">
             <a:avLst/>
           </a:prstGeom>
           <a:solidFill>
@@ -8826,14 +10226,14 @@
       </p:sp>
       <p:sp>
         <p:nvSpPr>
-          <p:cNvPr id="6" name="TextBox 5"/>
-          <p:cNvSpPr txBox="1"/>
-          <p:nvPr/>
-        </p:nvSpPr>
-        <p:spPr>
-          <a:xfrm>
-            <a:off x="777240" y="1005840"/>
-            <a:ext cx="4846320" cy="438912"/>
+          <p:cNvPr id="4" name="TextBox 3"/>
+          <p:cNvSpPr txBox="1"/>
+          <p:nvPr/>
+        </p:nvSpPr>
+        <p:spPr>
+          <a:xfrm>
+            <a:off x="640080" y="274320"/>
+            <a:ext cx="4572000" cy="502920"/>
           </a:xfrm>
           <a:prstGeom prst="rect">
             <a:avLst/>
@@ -8848,26 +10248,26 @@
           <a:p>
             <a:pPr algn="l"/>
             <a:r>
-              <a:rPr sz="1400" b="1" i="0">
-                <a:solidFill>
-                  <a:srgbClr val="FFFFFF"/>
-                </a:solidFill>
-                <a:latin typeface="Calibri"/>
-              </a:rPr>
-              <a:t>✓  年間 420万円 のコスト削減ポテンシャル</a:t>
-            </a:r>
-          </a:p>
-        </p:txBody>
-      </p:sp>
-      <p:sp>
-        <p:nvSpPr>
-          <p:cNvPr id="7" name="Rectangle 6"/>
+              <a:rPr sz="1300" b="1">
+                <a:solidFill>
+                  <a:srgbClr val="14B8A6"/>
+                </a:solidFill>
+                <a:latin typeface="Calibri"/>
+              </a:rPr>
+              <a:t>まとめ</a:t>
+            </a:r>
+          </a:p>
+        </p:txBody>
+      </p:sp>
+      <p:sp>
+        <p:nvSpPr>
+          <p:cNvPr id="5" name="Rectangle 4"/>
           <p:cNvSpPr/>
           <p:nvPr/>
         </p:nvSpPr>
         <p:spPr>
           <a:xfrm>
-            <a:off x="640080" y="1691640"/>
+            <a:off x="640080" y="914400"/>
             <a:ext cx="5120640" cy="621792"/>
           </a:xfrm>
           <a:prstGeom prst="rect">
@@ -8904,13 +10304,13 @@
       </p:sp>
       <p:sp>
         <p:nvSpPr>
-          <p:cNvPr id="8" name="TextBox 7"/>
-          <p:cNvSpPr txBox="1"/>
-          <p:nvPr/>
-        </p:nvSpPr>
-        <p:spPr>
-          <a:xfrm>
-            <a:off x="777240" y="1783080"/>
+          <p:cNvPr id="6" name="TextBox 5"/>
+          <p:cNvSpPr txBox="1"/>
+          <p:nvPr/>
+        </p:nvSpPr>
+        <p:spPr>
+          <a:xfrm>
+            <a:off x="777240" y="1005840"/>
             <a:ext cx="4846320" cy="438912"/>
           </a:xfrm>
           <a:prstGeom prst="rect">
@@ -8926,26 +10326,26 @@
           <a:p>
             <a:pPr algn="l"/>
             <a:r>
-              <a:rPr sz="1400" b="1" i="0">
+              <a:rPr sz="1400" b="1">
                 <a:solidFill>
                   <a:srgbClr val="FFFFFF"/>
                 </a:solidFill>
                 <a:latin typeface="Calibri"/>
               </a:rPr>
-              <a:t>✓  70店舗に最適化した専用システム</a:t>
-            </a:r>
-          </a:p>
-        </p:txBody>
-      </p:sp>
-      <p:sp>
-        <p:nvSpPr>
-          <p:cNvPr id="9" name="Rectangle 8"/>
+              <a:t>✓  年間 420万円 のコスト削減ポテンシャル</a:t>
+            </a:r>
+          </a:p>
+        </p:txBody>
+      </p:sp>
+      <p:sp>
+        <p:nvSpPr>
+          <p:cNvPr id="7" name="Rectangle 6"/>
           <p:cNvSpPr/>
           <p:nvPr/>
         </p:nvSpPr>
         <p:spPr>
           <a:xfrm>
-            <a:off x="640080" y="2468880"/>
+            <a:off x="640080" y="1691640"/>
             <a:ext cx="5120640" cy="621792"/>
           </a:xfrm>
           <a:prstGeom prst="rect">
@@ -8982,6 +10382,84 @@
       </p:sp>
       <p:sp>
         <p:nvSpPr>
+          <p:cNvPr id="8" name="TextBox 7"/>
+          <p:cNvSpPr txBox="1"/>
+          <p:nvPr/>
+        </p:nvSpPr>
+        <p:spPr>
+          <a:xfrm>
+            <a:off x="777240" y="1783080"/>
+            <a:ext cx="4846320" cy="438912"/>
+          </a:xfrm>
+          <a:prstGeom prst="rect">
+            <a:avLst/>
+          </a:prstGeom>
+          <a:noFill/>
+        </p:spPr>
+        <p:txBody>
+          <a:bodyPr wrap="square">
+            <a:spAutoFit/>
+          </a:bodyPr>
+          <a:lstStyle/>
+          <a:p>
+            <a:pPr algn="l"/>
+            <a:r>
+              <a:rPr sz="1400" b="1">
+                <a:solidFill>
+                  <a:srgbClr val="FFFFFF"/>
+                </a:solidFill>
+                <a:latin typeface="Calibri"/>
+              </a:rPr>
+              <a:t>✓  コアエンジンは開発完了  —  すぐに動く</a:t>
+            </a:r>
+          </a:p>
+        </p:txBody>
+      </p:sp>
+      <p:sp>
+        <p:nvSpPr>
+          <p:cNvPr id="9" name="Rectangle 8"/>
+          <p:cNvSpPr/>
+          <p:nvPr/>
+        </p:nvSpPr>
+        <p:spPr>
+          <a:xfrm>
+            <a:off x="640080" y="2468880"/>
+            <a:ext cx="5120640" cy="621792"/>
+          </a:xfrm>
+          <a:prstGeom prst="rect">
+            <a:avLst/>
+          </a:prstGeom>
+          <a:solidFill>
+            <a:srgbClr val="0D9488"/>
+          </a:solidFill>
+          <a:ln>
+            <a:noFill/>
+          </a:ln>
+        </p:spPr>
+        <p:style>
+          <a:lnRef idx="1">
+            <a:schemeClr val="accent1"/>
+          </a:lnRef>
+          <a:fillRef idx="3">
+            <a:schemeClr val="accent1"/>
+          </a:fillRef>
+          <a:effectRef idx="2">
+            <a:schemeClr val="accent1"/>
+          </a:effectRef>
+          <a:fontRef idx="minor">
+            <a:schemeClr val="lt1"/>
+          </a:fontRef>
+        </p:style>
+        <p:txBody>
+          <a:bodyPr rtlCol="0" anchor="ctr"/>
+          <a:lstStyle/>
+          <a:p>
+            <a:pPr algn="ctr"/>
+          </a:p>
+        </p:txBody>
+      </p:sp>
+      <p:sp>
+        <p:nvSpPr>
           <p:cNvPr id="10" name="TextBox 9"/>
           <p:cNvSpPr txBox="1"/>
           <p:nvPr/>
@@ -9004,13 +10482,13 @@
           <a:p>
             <a:pPr algn="l"/>
             <a:r>
-              <a:rPr sz="1400" b="1" i="0">
+              <a:rPr sz="1400" b="1">
                 <a:solidFill>
                   <a:srgbClr val="FFFFFF"/>
                 </a:solidFill>
                 <a:latin typeface="Calibri"/>
               </a:rPr>
-              <a:t>✓  社内開発で迅速対応・カスタマイズ自由</a:t>
+              <a:t>✓  70店舗専用・社内開発で完全カスタマイズ</a:t>
             </a:r>
           </a:p>
         </p:txBody>
@@ -9039,7 +10517,7 @@
           <a:p>
             <a:pPr algn="l"/>
             <a:r>
-              <a:rPr sz="1400" b="1" i="0">
+              <a:rPr sz="1400" b="1">
                 <a:solidFill>
                   <a:srgbClr val="14B8A6"/>
                 </a:solidFill>
@@ -9160,7 +10638,7 @@
           <a:p>
             <a:pPr algn="ctr"/>
             <a:r>
-              <a:rPr sz="1400" b="1" i="0">
+              <a:rPr sz="1400" b="1">
                 <a:solidFill>
                   <a:srgbClr val="FFFFFF"/>
                 </a:solidFill>
@@ -9179,8 +10657,8 @@
         </p:nvSpPr>
         <p:spPr>
           <a:xfrm>
-            <a:off x="6565392" y="1399031"/>
-            <a:ext cx="2148840" cy="777240"/>
+            <a:off x="6565392" y="1444751"/>
+            <a:ext cx="2148840" cy="685800"/>
           </a:xfrm>
           <a:prstGeom prst="rect">
             <a:avLst/>
@@ -9195,7 +10673,7 @@
           <a:p>
             <a:pPr algn="l"/>
             <a:r>
-              <a:rPr sz="1200" b="0" i="0">
+              <a:rPr sz="1200" b="0">
                 <a:solidFill>
                   <a:srgbClr val="1E3A5F"/>
                 </a:solidFill>
@@ -9316,7 +10794,7 @@
           <a:p>
             <a:pPr algn="ctr"/>
             <a:r>
-              <a:rPr sz="1400" b="1" i="0">
+              <a:rPr sz="1400" b="1">
                 <a:solidFill>
                   <a:srgbClr val="FFFFFF"/>
                 </a:solidFill>
@@ -9335,8 +10813,8 @@
         </p:nvSpPr>
         <p:spPr>
           <a:xfrm>
-            <a:off x="6565392" y="2633472"/>
-            <a:ext cx="2148840" cy="777240"/>
+            <a:off x="6565392" y="2679192"/>
+            <a:ext cx="2148840" cy="685800"/>
           </a:xfrm>
           <a:prstGeom prst="rect">
             <a:avLst/>
@@ -9351,7 +10829,7 @@
           <a:p>
             <a:pPr algn="l"/>
             <a:r>
-              <a:rPr sz="1200" b="0" i="0">
+              <a:rPr sz="1200" b="0">
                 <a:solidFill>
                   <a:srgbClr val="1E3A5F"/>
                 </a:solidFill>
@@ -9472,7 +10950,7 @@
           <a:p>
             <a:pPr algn="ctr"/>
             <a:r>
-              <a:rPr sz="1400" b="1" i="0">
+              <a:rPr sz="1400" b="1">
                 <a:solidFill>
                   <a:srgbClr val="FFFFFF"/>
                 </a:solidFill>
@@ -9491,8 +10969,8 @@
         </p:nvSpPr>
         <p:spPr>
           <a:xfrm>
-            <a:off x="6565392" y="3867912"/>
-            <a:ext cx="2148840" cy="777240"/>
+            <a:off x="6565392" y="3913632"/>
+            <a:ext cx="2148840" cy="685800"/>
           </a:xfrm>
           <a:prstGeom prst="rect">
             <a:avLst/>
@@ -9507,7 +10985,7 @@
           <a:p>
             <a:pPr algn="l"/>
             <a:r>
-              <a:rPr sz="1200" b="0" i="0">
+              <a:rPr sz="1200" b="0">
                 <a:solidFill>
                   <a:srgbClr val="1E3A5F"/>
                 </a:solidFill>
